--- a/Locked Hackathon.pptx
+++ b/Locked Hackathon.pptx
@@ -6,11 +6,14 @@
   </p:sldMasterIdLst>
   <p:sldIdLst>
     <p:sldId id="256" r:id="rId2"/>
-    <p:sldId id="257" r:id="rId3"/>
-    <p:sldId id="258" r:id="rId4"/>
-    <p:sldId id="259" r:id="rId5"/>
-    <p:sldId id="260" r:id="rId6"/>
-    <p:sldId id="261" r:id="rId7"/>
+    <p:sldId id="262" r:id="rId3"/>
+    <p:sldId id="257" r:id="rId4"/>
+    <p:sldId id="258" r:id="rId5"/>
+    <p:sldId id="263" r:id="rId6"/>
+    <p:sldId id="259" r:id="rId7"/>
+    <p:sldId id="260" r:id="rId8"/>
+    <p:sldId id="265" r:id="rId9"/>
+    <p:sldId id="261" r:id="rId10"/>
   </p:sldIdLst>
   <p:sldSz cx="12192000" cy="6858000"/>
   <p:notesSz cx="6858000" cy="9144000"/>
@@ -109,20 +112,436 @@
       </a:defRPr>
     </a:lvl9pPr>
   </p:defaultTextStyle>
-  <p:extLst>
-    <p:ext uri="{EFAFB233-063F-42B5-8137-9DF3F51BA10A}">
-      <p15:sldGuideLst xmlns:p15="http://schemas.microsoft.com/office/powerpoint/2012/main"/>
-    </p:ext>
-  </p:extLst>
 </p:presentation>
 </file>
 
 <file path=ppt/revisionInfo.xml><?xml version="1.0" encoding="utf-8"?>
 <p1510:revInfo xmlns:a="http://schemas.openxmlformats.org/drawingml/2006/main" xmlns:r="http://schemas.openxmlformats.org/officeDocument/2006/relationships" xmlns:p1510="http://schemas.microsoft.com/office/powerpoint/2015/10/main">
   <p1510:revLst>
+    <p1510:client id="{42A9A753-CA78-4426-B3C4-2EDF91046442}" v="736" dt="2026-03-15T16:00:27.962"/>
     <p1510:client id="{4A8E986D-E3EE-4EA7-8EFD-1C01B331266F}" v="2615" dt="2026-03-15T14:55:29.152"/>
   </p1510:revLst>
 </p1510:revInfo>
+</file>
+
+<file path=ppt/changesInfos/changesInfo1.xml><?xml version="1.0" encoding="utf-8"?>
+<pc:chgInfo xmlns:a="http://schemas.openxmlformats.org/drawingml/2006/main" xmlns:r="http://schemas.openxmlformats.org/officeDocument/2006/relationships" xmlns:ac="http://schemas.microsoft.com/office/drawing/2013/main/command" xmlns:pc="http://schemas.microsoft.com/office/powerpoint/2013/main/command">
+  <pc:docChgLst>
+    <pc:chgData name="Sun, Steven" userId="672fd9e1-130d-4d83-bf46-4352c41140a3" providerId="ADAL" clId="{33C68A6E-30E6-4455-9392-469BFD8ACFCB}"/>
+    <pc:docChg chg="undo custSel addSld delSld modSld">
+      <pc:chgData name="Sun, Steven" userId="672fd9e1-130d-4d83-bf46-4352c41140a3" providerId="ADAL" clId="{33C68A6E-30E6-4455-9392-469BFD8ACFCB}" dt="2026-03-15T16:00:27.962" v="732" actId="1076"/>
+      <pc:docMkLst>
+        <pc:docMk/>
+      </pc:docMkLst>
+      <pc:sldChg chg="addSp delSp modSp mod">
+        <pc:chgData name="Sun, Steven" userId="672fd9e1-130d-4d83-bf46-4352c41140a3" providerId="ADAL" clId="{33C68A6E-30E6-4455-9392-469BFD8ACFCB}" dt="2026-03-15T15:48:01.517" v="379" actId="21"/>
+        <pc:sldMkLst>
+          <pc:docMk/>
+          <pc:sldMk cId="207617766" sldId="256"/>
+        </pc:sldMkLst>
+        <pc:picChg chg="add del mod">
+          <ac:chgData name="Sun, Steven" userId="672fd9e1-130d-4d83-bf46-4352c41140a3" providerId="ADAL" clId="{33C68A6E-30E6-4455-9392-469BFD8ACFCB}" dt="2026-03-15T15:48:01.517" v="379" actId="21"/>
+          <ac:picMkLst>
+            <pc:docMk/>
+            <pc:sldMk cId="207617766" sldId="256"/>
+            <ac:picMk id="5" creationId="{298CF924-9D23-B22D-311E-BA268DA85C92}"/>
+          </ac:picMkLst>
+        </pc:picChg>
+      </pc:sldChg>
+      <pc:sldChg chg="modSp mod">
+        <pc:chgData name="Sun, Steven" userId="672fd9e1-130d-4d83-bf46-4352c41140a3" providerId="ADAL" clId="{33C68A6E-30E6-4455-9392-469BFD8ACFCB}" dt="2026-03-15T15:48:59.402" v="409" actId="20577"/>
+        <pc:sldMkLst>
+          <pc:docMk/>
+          <pc:sldMk cId="2031509814" sldId="257"/>
+        </pc:sldMkLst>
+        <pc:spChg chg="mod">
+          <ac:chgData name="Sun, Steven" userId="672fd9e1-130d-4d83-bf46-4352c41140a3" providerId="ADAL" clId="{33C68A6E-30E6-4455-9392-469BFD8ACFCB}" dt="2026-03-15T15:48:55.193" v="406" actId="1076"/>
+          <ac:spMkLst>
+            <pc:docMk/>
+            <pc:sldMk cId="2031509814" sldId="257"/>
+            <ac:spMk id="2" creationId="{4BE9EC5B-CA7F-3E1E-FF8E-3D21AF280B48}"/>
+          </ac:spMkLst>
+        </pc:spChg>
+        <pc:spChg chg="mod">
+          <ac:chgData name="Sun, Steven" userId="672fd9e1-130d-4d83-bf46-4352c41140a3" providerId="ADAL" clId="{33C68A6E-30E6-4455-9392-469BFD8ACFCB}" dt="2026-03-15T15:48:59.402" v="409" actId="20577"/>
+          <ac:spMkLst>
+            <pc:docMk/>
+            <pc:sldMk cId="2031509814" sldId="257"/>
+            <ac:spMk id="3" creationId="{8305DA83-033D-8110-BB1E-8540625125A7}"/>
+          </ac:spMkLst>
+        </pc:spChg>
+      </pc:sldChg>
+      <pc:sldChg chg="modSp mod">
+        <pc:chgData name="Sun, Steven" userId="672fd9e1-130d-4d83-bf46-4352c41140a3" providerId="ADAL" clId="{33C68A6E-30E6-4455-9392-469BFD8ACFCB}" dt="2026-03-15T15:56:37.816" v="685" actId="20577"/>
+        <pc:sldMkLst>
+          <pc:docMk/>
+          <pc:sldMk cId="3241906051" sldId="258"/>
+        </pc:sldMkLst>
+        <pc:graphicFrameChg chg="mod modGraphic">
+          <ac:chgData name="Sun, Steven" userId="672fd9e1-130d-4d83-bf46-4352c41140a3" providerId="ADAL" clId="{33C68A6E-30E6-4455-9392-469BFD8ACFCB}" dt="2026-03-15T15:56:37.816" v="685" actId="20577"/>
+          <ac:graphicFrameMkLst>
+            <pc:docMk/>
+            <pc:sldMk cId="3241906051" sldId="258"/>
+            <ac:graphicFrameMk id="18" creationId="{CDA82DE0-830D-CA02-9BBC-ECB19E25CE57}"/>
+          </ac:graphicFrameMkLst>
+        </pc:graphicFrameChg>
+      </pc:sldChg>
+      <pc:sldChg chg="addSp modSp mod">
+        <pc:chgData name="Sun, Steven" userId="672fd9e1-130d-4d83-bf46-4352c41140a3" providerId="ADAL" clId="{33C68A6E-30E6-4455-9392-469BFD8ACFCB}" dt="2026-03-15T15:43:20.290" v="232" actId="403"/>
+        <pc:sldMkLst>
+          <pc:docMk/>
+          <pc:sldMk cId="3600156544" sldId="259"/>
+        </pc:sldMkLst>
+        <pc:spChg chg="add mod">
+          <ac:chgData name="Sun, Steven" userId="672fd9e1-130d-4d83-bf46-4352c41140a3" providerId="ADAL" clId="{33C68A6E-30E6-4455-9392-469BFD8ACFCB}" dt="2026-03-15T15:43:20.290" v="232" actId="403"/>
+          <ac:spMkLst>
+            <pc:docMk/>
+            <pc:sldMk cId="3600156544" sldId="259"/>
+            <ac:spMk id="3" creationId="{FBAACA81-54D4-CDBC-FF98-1EA229D835DC}"/>
+          </ac:spMkLst>
+        </pc:spChg>
+        <pc:spChg chg="add mod">
+          <ac:chgData name="Sun, Steven" userId="672fd9e1-130d-4d83-bf46-4352c41140a3" providerId="ADAL" clId="{33C68A6E-30E6-4455-9392-469BFD8ACFCB}" dt="2026-03-15T15:43:20.290" v="232" actId="403"/>
+          <ac:spMkLst>
+            <pc:docMk/>
+            <pc:sldMk cId="3600156544" sldId="259"/>
+            <ac:spMk id="4" creationId="{BD30F49C-B77C-6A31-C2D5-C7B8141C5D82}"/>
+          </ac:spMkLst>
+        </pc:spChg>
+        <pc:spChg chg="add mod">
+          <ac:chgData name="Sun, Steven" userId="672fd9e1-130d-4d83-bf46-4352c41140a3" providerId="ADAL" clId="{33C68A6E-30E6-4455-9392-469BFD8ACFCB}" dt="2026-03-15T15:39:28.345" v="72" actId="11529"/>
+          <ac:spMkLst>
+            <pc:docMk/>
+            <pc:sldMk cId="3600156544" sldId="259"/>
+            <ac:spMk id="7" creationId="{BAF4E6AD-368C-2A5D-629F-6C32A76061C3}"/>
+          </ac:spMkLst>
+        </pc:spChg>
+        <pc:spChg chg="add mod">
+          <ac:chgData name="Sun, Steven" userId="672fd9e1-130d-4d83-bf46-4352c41140a3" providerId="ADAL" clId="{33C68A6E-30E6-4455-9392-469BFD8ACFCB}" dt="2026-03-15T15:42:35.220" v="162" actId="1076"/>
+          <ac:spMkLst>
+            <pc:docMk/>
+            <pc:sldMk cId="3600156544" sldId="259"/>
+            <ac:spMk id="8" creationId="{17C932BA-AC48-B4B1-AA31-881EEC4E11A9}"/>
+          </ac:spMkLst>
+        </pc:spChg>
+        <pc:spChg chg="add mod">
+          <ac:chgData name="Sun, Steven" userId="672fd9e1-130d-4d83-bf46-4352c41140a3" providerId="ADAL" clId="{33C68A6E-30E6-4455-9392-469BFD8ACFCB}" dt="2026-03-15T15:43:10.112" v="224" actId="20577"/>
+          <ac:spMkLst>
+            <pc:docMk/>
+            <pc:sldMk cId="3600156544" sldId="259"/>
+            <ac:spMk id="10" creationId="{5B988EC5-28DC-1D32-FFC0-4BC7F43CD760}"/>
+          </ac:spMkLst>
+        </pc:spChg>
+        <pc:grpChg chg="add mod">
+          <ac:chgData name="Sun, Steven" userId="672fd9e1-130d-4d83-bf46-4352c41140a3" providerId="ADAL" clId="{33C68A6E-30E6-4455-9392-469BFD8ACFCB}" dt="2026-03-15T15:43:18.181" v="227" actId="1076"/>
+          <ac:grpSpMkLst>
+            <pc:docMk/>
+            <pc:sldMk cId="3600156544" sldId="259"/>
+            <ac:grpSpMk id="2" creationId="{7814B468-1EE3-F036-1464-4BA52CF7B8F7}"/>
+          </ac:grpSpMkLst>
+        </pc:grpChg>
+        <pc:graphicFrameChg chg="mod modGraphic">
+          <ac:chgData name="Sun, Steven" userId="672fd9e1-130d-4d83-bf46-4352c41140a3" providerId="ADAL" clId="{33C68A6E-30E6-4455-9392-469BFD8ACFCB}" dt="2026-03-15T15:42:49.836" v="169"/>
+          <ac:graphicFrameMkLst>
+            <pc:docMk/>
+            <pc:sldMk cId="3600156544" sldId="259"/>
+            <ac:graphicFrameMk id="5" creationId="{39F7373A-E9E6-73B6-0034-BCF400EC6340}"/>
+          </ac:graphicFrameMkLst>
+        </pc:graphicFrameChg>
+      </pc:sldChg>
+      <pc:sldChg chg="addSp delSp modSp mod">
+        <pc:chgData name="Sun, Steven" userId="672fd9e1-130d-4d83-bf46-4352c41140a3" providerId="ADAL" clId="{33C68A6E-30E6-4455-9392-469BFD8ACFCB}" dt="2026-03-15T15:45:01.569" v="289" actId="404"/>
+        <pc:sldMkLst>
+          <pc:docMk/>
+          <pc:sldMk cId="3574201877" sldId="260"/>
+        </pc:sldMkLst>
+        <pc:spChg chg="mod">
+          <ac:chgData name="Sun, Steven" userId="672fd9e1-130d-4d83-bf46-4352c41140a3" providerId="ADAL" clId="{33C68A6E-30E6-4455-9392-469BFD8ACFCB}" dt="2026-03-15T15:43:45.696" v="234" actId="1076"/>
+          <ac:spMkLst>
+            <pc:docMk/>
+            <pc:sldMk cId="3574201877" sldId="260"/>
+            <ac:spMk id="2" creationId="{39E40699-00ED-9C6C-F324-960C5E1DB057}"/>
+          </ac:spMkLst>
+        </pc:spChg>
+        <pc:spChg chg="add mod">
+          <ac:chgData name="Sun, Steven" userId="672fd9e1-130d-4d83-bf46-4352c41140a3" providerId="ADAL" clId="{33C68A6E-30E6-4455-9392-469BFD8ACFCB}" dt="2026-03-15T15:44:51.471" v="279" actId="403"/>
+          <ac:spMkLst>
+            <pc:docMk/>
+            <pc:sldMk cId="3574201877" sldId="260"/>
+            <ac:spMk id="4" creationId="{457D9BCC-C5B8-18F8-0361-9EFB9B84FE20}"/>
+          </ac:spMkLst>
+        </pc:spChg>
+        <pc:spChg chg="add mod">
+          <ac:chgData name="Sun, Steven" userId="672fd9e1-130d-4d83-bf46-4352c41140a3" providerId="ADAL" clId="{33C68A6E-30E6-4455-9392-469BFD8ACFCB}" dt="2026-03-15T15:44:51.471" v="279" actId="403"/>
+          <ac:spMkLst>
+            <pc:docMk/>
+            <pc:sldMk cId="3574201877" sldId="260"/>
+            <ac:spMk id="6" creationId="{C40AEA70-ABA5-3843-52FB-853B37F7D002}"/>
+          </ac:spMkLst>
+        </pc:spChg>
+        <pc:spChg chg="add mod">
+          <ac:chgData name="Sun, Steven" userId="672fd9e1-130d-4d83-bf46-4352c41140a3" providerId="ADAL" clId="{33C68A6E-30E6-4455-9392-469BFD8ACFCB}" dt="2026-03-15T15:44:56.516" v="283" actId="403"/>
+          <ac:spMkLst>
+            <pc:docMk/>
+            <pc:sldMk cId="3574201877" sldId="260"/>
+            <ac:spMk id="8" creationId="{DDD41C37-96F0-89D3-B90D-7FAC2D59B969}"/>
+          </ac:spMkLst>
+        </pc:spChg>
+        <pc:spChg chg="add mod">
+          <ac:chgData name="Sun, Steven" userId="672fd9e1-130d-4d83-bf46-4352c41140a3" providerId="ADAL" clId="{33C68A6E-30E6-4455-9392-469BFD8ACFCB}" dt="2026-03-15T15:45:01.569" v="289" actId="404"/>
+          <ac:spMkLst>
+            <pc:docMk/>
+            <pc:sldMk cId="3574201877" sldId="260"/>
+            <ac:spMk id="9" creationId="{3AA2CC05-D225-62C6-333E-E7916662B971}"/>
+          </ac:spMkLst>
+        </pc:spChg>
+        <pc:spChg chg="add del mod">
+          <ac:chgData name="Sun, Steven" userId="672fd9e1-130d-4d83-bf46-4352c41140a3" providerId="ADAL" clId="{33C68A6E-30E6-4455-9392-469BFD8ACFCB}" dt="2026-03-15T15:44:23.387" v="249" actId="478"/>
+          <ac:spMkLst>
+            <pc:docMk/>
+            <pc:sldMk cId="3574201877" sldId="260"/>
+            <ac:spMk id="11" creationId="{7D509167-4C04-9D14-A567-5BA6D13D5026}"/>
+          </ac:spMkLst>
+        </pc:spChg>
+        <pc:spChg chg="add mod">
+          <ac:chgData name="Sun, Steven" userId="672fd9e1-130d-4d83-bf46-4352c41140a3" providerId="ADAL" clId="{33C68A6E-30E6-4455-9392-469BFD8ACFCB}" dt="2026-03-15T15:44:23.701" v="250"/>
+          <ac:spMkLst>
+            <pc:docMk/>
+            <pc:sldMk cId="3574201877" sldId="260"/>
+            <ac:spMk id="13" creationId="{14B9B0F9-677D-8A49-A775-9739DCB35B0E}"/>
+          </ac:spMkLst>
+        </pc:spChg>
+        <pc:spChg chg="add mod">
+          <ac:chgData name="Sun, Steven" userId="672fd9e1-130d-4d83-bf46-4352c41140a3" providerId="ADAL" clId="{33C68A6E-30E6-4455-9392-469BFD8ACFCB}" dt="2026-03-15T15:44:42.980" v="271" actId="14100"/>
+          <ac:spMkLst>
+            <pc:docMk/>
+            <pc:sldMk cId="3574201877" sldId="260"/>
+            <ac:spMk id="14" creationId="{DCE1694A-2F90-94C7-DC6A-6B8743C0AF4D}"/>
+          </ac:spMkLst>
+        </pc:spChg>
+        <pc:grpChg chg="add mod">
+          <ac:chgData name="Sun, Steven" userId="672fd9e1-130d-4d83-bf46-4352c41140a3" providerId="ADAL" clId="{33C68A6E-30E6-4455-9392-469BFD8ACFCB}" dt="2026-03-15T15:44:49.484" v="274" actId="14100"/>
+          <ac:grpSpMkLst>
+            <pc:docMk/>
+            <pc:sldMk cId="3574201877" sldId="260"/>
+            <ac:grpSpMk id="3" creationId="{DC38FC60-D69A-D8A9-2419-29202631D06D}"/>
+          </ac:grpSpMkLst>
+        </pc:grpChg>
+        <pc:grpChg chg="add mod">
+          <ac:chgData name="Sun, Steven" userId="672fd9e1-130d-4d83-bf46-4352c41140a3" providerId="ADAL" clId="{33C68A6E-30E6-4455-9392-469BFD8ACFCB}" dt="2026-03-15T15:44:18.442" v="246" actId="14100"/>
+          <ac:grpSpMkLst>
+            <pc:docMk/>
+            <pc:sldMk cId="3574201877" sldId="260"/>
+            <ac:grpSpMk id="7" creationId="{9D3EA2CB-80C0-C9BB-C380-0A6299925012}"/>
+          </ac:grpSpMkLst>
+        </pc:grpChg>
+        <pc:grpChg chg="add mod">
+          <ac:chgData name="Sun, Steven" userId="672fd9e1-130d-4d83-bf46-4352c41140a3" providerId="ADAL" clId="{33C68A6E-30E6-4455-9392-469BFD8ACFCB}" dt="2026-03-15T15:44:46.587" v="273" actId="1076"/>
+          <ac:grpSpMkLst>
+            <pc:docMk/>
+            <pc:sldMk cId="3574201877" sldId="260"/>
+            <ac:grpSpMk id="12" creationId="{30F3825E-E58D-8DB9-B417-0AD812F7AD6F}"/>
+          </ac:grpSpMkLst>
+        </pc:grpChg>
+        <pc:graphicFrameChg chg="del mod">
+          <ac:chgData name="Sun, Steven" userId="672fd9e1-130d-4d83-bf46-4352c41140a3" providerId="ADAL" clId="{33C68A6E-30E6-4455-9392-469BFD8ACFCB}" dt="2026-03-15T15:44:21.614" v="248" actId="478"/>
+          <ac:graphicFrameMkLst>
+            <pc:docMk/>
+            <pc:sldMk cId="3574201877" sldId="260"/>
+            <ac:graphicFrameMk id="5" creationId="{7BAC24A7-803C-AE1E-7EEC-369CC9AF2158}"/>
+          </ac:graphicFrameMkLst>
+        </pc:graphicFrameChg>
+      </pc:sldChg>
+      <pc:sldChg chg="addSp delSp modSp mod">
+        <pc:chgData name="Sun, Steven" userId="672fd9e1-130d-4d83-bf46-4352c41140a3" providerId="ADAL" clId="{33C68A6E-30E6-4455-9392-469BFD8ACFCB}" dt="2026-03-15T16:00:27.962" v="732" actId="1076"/>
+        <pc:sldMkLst>
+          <pc:docMk/>
+          <pc:sldMk cId="300464526" sldId="261"/>
+        </pc:sldMkLst>
+        <pc:spChg chg="mod">
+          <ac:chgData name="Sun, Steven" userId="672fd9e1-130d-4d83-bf46-4352c41140a3" providerId="ADAL" clId="{33C68A6E-30E6-4455-9392-469BFD8ACFCB}" dt="2026-03-15T16:00:27.962" v="732" actId="1076"/>
+          <ac:spMkLst>
+            <pc:docMk/>
+            <pc:sldMk cId="300464526" sldId="261"/>
+            <ac:spMk id="2" creationId="{8C1CF3B1-2B78-CA7A-9636-E004EFCAFD82}"/>
+          </ac:spMkLst>
+        </pc:spChg>
+        <pc:spChg chg="mod">
+          <ac:chgData name="Sun, Steven" userId="672fd9e1-130d-4d83-bf46-4352c41140a3" providerId="ADAL" clId="{33C68A6E-30E6-4455-9392-469BFD8ACFCB}" dt="2026-03-15T16:00:21.509" v="731" actId="20577"/>
+          <ac:spMkLst>
+            <pc:docMk/>
+            <pc:sldMk cId="300464526" sldId="261"/>
+            <ac:spMk id="26" creationId="{75200D72-AAAE-0901-3A8B-FDE07F0D918D}"/>
+          </ac:spMkLst>
+        </pc:spChg>
+        <pc:picChg chg="add del">
+          <ac:chgData name="Sun, Steven" userId="672fd9e1-130d-4d83-bf46-4352c41140a3" providerId="ADAL" clId="{33C68A6E-30E6-4455-9392-469BFD8ACFCB}" dt="2026-03-15T15:46:49.678" v="307" actId="478"/>
+          <ac:picMkLst>
+            <pc:docMk/>
+            <pc:sldMk cId="300464526" sldId="261"/>
+            <ac:picMk id="7" creationId="{C387331E-C0BE-3075-BCD4-62925AAA154E}"/>
+          </ac:picMkLst>
+        </pc:picChg>
+      </pc:sldChg>
+      <pc:sldChg chg="addSp modSp new mod">
+        <pc:chgData name="Sun, Steven" userId="672fd9e1-130d-4d83-bf46-4352c41140a3" providerId="ADAL" clId="{33C68A6E-30E6-4455-9392-469BFD8ACFCB}" dt="2026-03-15T15:48:09.468" v="383" actId="14100"/>
+        <pc:sldMkLst>
+          <pc:docMk/>
+          <pc:sldMk cId="3334381146" sldId="262"/>
+        </pc:sldMkLst>
+        <pc:picChg chg="add mod">
+          <ac:chgData name="Sun, Steven" userId="672fd9e1-130d-4d83-bf46-4352c41140a3" providerId="ADAL" clId="{33C68A6E-30E6-4455-9392-469BFD8ACFCB}" dt="2026-03-15T15:48:09.468" v="383" actId="14100"/>
+          <ac:picMkLst>
+            <pc:docMk/>
+            <pc:sldMk cId="3334381146" sldId="262"/>
+            <ac:picMk id="5" creationId="{298CF924-9D23-B22D-311E-BA268DA85C92}"/>
+          </ac:picMkLst>
+        </pc:picChg>
+      </pc:sldChg>
+      <pc:sldChg chg="addSp delSp modSp new mod">
+        <pc:chgData name="Sun, Steven" userId="672fd9e1-130d-4d83-bf46-4352c41140a3" providerId="ADAL" clId="{33C68A6E-30E6-4455-9392-469BFD8ACFCB}" dt="2026-03-15T15:55:09.426" v="603" actId="207"/>
+        <pc:sldMkLst>
+          <pc:docMk/>
+          <pc:sldMk cId="3269207892" sldId="263"/>
+        </pc:sldMkLst>
+        <pc:spChg chg="del">
+          <ac:chgData name="Sun, Steven" userId="672fd9e1-130d-4d83-bf46-4352c41140a3" providerId="ADAL" clId="{33C68A6E-30E6-4455-9392-469BFD8ACFCB}" dt="2026-03-15T15:49:13.008" v="412"/>
+          <ac:spMkLst>
+            <pc:docMk/>
+            <pc:sldMk cId="3269207892" sldId="263"/>
+            <ac:spMk id="3" creationId="{E920CDDD-C9B7-ECBF-EBA6-4C6FE6D3E621}"/>
+          </ac:spMkLst>
+        </pc:spChg>
+        <pc:spChg chg="add mod">
+          <ac:chgData name="Sun, Steven" userId="672fd9e1-130d-4d83-bf46-4352c41140a3" providerId="ADAL" clId="{33C68A6E-30E6-4455-9392-469BFD8ACFCB}" dt="2026-03-15T15:55:09.426" v="603" actId="207"/>
+          <ac:spMkLst>
+            <pc:docMk/>
+            <pc:sldMk cId="3269207892" sldId="263"/>
+            <ac:spMk id="6" creationId="{D159B870-DCE8-304D-A20E-26455E927ACC}"/>
+          </ac:spMkLst>
+        </pc:spChg>
+        <pc:spChg chg="add mod">
+          <ac:chgData name="Sun, Steven" userId="672fd9e1-130d-4d83-bf46-4352c41140a3" providerId="ADAL" clId="{33C68A6E-30E6-4455-9392-469BFD8ACFCB}" dt="2026-03-15T15:55:09.426" v="603" actId="207"/>
+          <ac:spMkLst>
+            <pc:docMk/>
+            <pc:sldMk cId="3269207892" sldId="263"/>
+            <ac:spMk id="7" creationId="{133386A9-765D-5237-C6DE-4EE0134D82B5}"/>
+          </ac:spMkLst>
+        </pc:spChg>
+        <pc:spChg chg="add mod">
+          <ac:chgData name="Sun, Steven" userId="672fd9e1-130d-4d83-bf46-4352c41140a3" providerId="ADAL" clId="{33C68A6E-30E6-4455-9392-469BFD8ACFCB}" dt="2026-03-15T15:55:09.426" v="603" actId="207"/>
+          <ac:spMkLst>
+            <pc:docMk/>
+            <pc:sldMk cId="3269207892" sldId="263"/>
+            <ac:spMk id="8" creationId="{E300AE15-7057-197B-4101-FB87A492DDB9}"/>
+          </ac:spMkLst>
+        </pc:spChg>
+        <pc:picChg chg="add mod ord">
+          <ac:chgData name="Sun, Steven" userId="672fd9e1-130d-4d83-bf46-4352c41140a3" providerId="ADAL" clId="{33C68A6E-30E6-4455-9392-469BFD8ACFCB}" dt="2026-03-15T15:49:21.680" v="415" actId="1076"/>
+          <ac:picMkLst>
+            <pc:docMk/>
+            <pc:sldMk cId="3269207892" sldId="263"/>
+            <ac:picMk id="5" creationId="{C4FD544F-E1DE-4B46-0489-AA1FC6B0B34E}"/>
+          </ac:picMkLst>
+        </pc:picChg>
+      </pc:sldChg>
+      <pc:sldChg chg="modSp new del mod">
+        <pc:chgData name="Sun, Steven" userId="672fd9e1-130d-4d83-bf46-4352c41140a3" providerId="ADAL" clId="{33C68A6E-30E6-4455-9392-469BFD8ACFCB}" dt="2026-03-15T15:50:46.648" v="455" actId="47"/>
+        <pc:sldMkLst>
+          <pc:docMk/>
+          <pc:sldMk cId="4189313238" sldId="264"/>
+        </pc:sldMkLst>
+        <pc:spChg chg="mod">
+          <ac:chgData name="Sun, Steven" userId="672fd9e1-130d-4d83-bf46-4352c41140a3" providerId="ADAL" clId="{33C68A6E-30E6-4455-9392-469BFD8ACFCB}" dt="2026-03-15T15:50:29.526" v="450" actId="1076"/>
+          <ac:spMkLst>
+            <pc:docMk/>
+            <pc:sldMk cId="4189313238" sldId="264"/>
+            <ac:spMk id="2" creationId="{E0201CD3-3FA1-E114-68FD-5904F87DCB76}"/>
+          </ac:spMkLst>
+        </pc:spChg>
+      </pc:sldChg>
+      <pc:sldChg chg="addSp delSp modSp add mod setBg delDesignElem">
+        <pc:chgData name="Sun, Steven" userId="672fd9e1-130d-4d83-bf46-4352c41140a3" providerId="ADAL" clId="{33C68A6E-30E6-4455-9392-469BFD8ACFCB}" dt="2026-03-15T15:54:19.970" v="567" actId="20577"/>
+        <pc:sldMkLst>
+          <pc:docMk/>
+          <pc:sldMk cId="1605906832" sldId="265"/>
+        </pc:sldMkLst>
+        <pc:spChg chg="del">
+          <ac:chgData name="Sun, Steven" userId="672fd9e1-130d-4d83-bf46-4352c41140a3" providerId="ADAL" clId="{33C68A6E-30E6-4455-9392-469BFD8ACFCB}" dt="2026-03-15T15:50:37.927" v="453" actId="478"/>
+          <ac:spMkLst>
+            <pc:docMk/>
+            <pc:sldMk cId="1605906832" sldId="265"/>
+            <ac:spMk id="7" creationId="{54994C8B-58EA-8EEA-67CA-F95440863303}"/>
+          </ac:spMkLst>
+        </pc:spChg>
+        <pc:spChg chg="del">
+          <ac:chgData name="Sun, Steven" userId="672fd9e1-130d-4d83-bf46-4352c41140a3" providerId="ADAL" clId="{33C68A6E-30E6-4455-9392-469BFD8ACFCB}" dt="2026-03-15T15:50:37.927" v="453" actId="478"/>
+          <ac:spMkLst>
+            <pc:docMk/>
+            <pc:sldMk cId="1605906832" sldId="265"/>
+            <ac:spMk id="8" creationId="{5DDD9DDA-C09A-35C7-E35B-8C2F43C1990C}"/>
+          </ac:spMkLst>
+        </pc:spChg>
+        <pc:spChg chg="del">
+          <ac:chgData name="Sun, Steven" userId="672fd9e1-130d-4d83-bf46-4352c41140a3" providerId="ADAL" clId="{33C68A6E-30E6-4455-9392-469BFD8ACFCB}" dt="2026-03-15T15:50:37.927" v="453" actId="478"/>
+          <ac:spMkLst>
+            <pc:docMk/>
+            <pc:sldMk cId="1605906832" sldId="265"/>
+            <ac:spMk id="10" creationId="{8A4474BA-CCBA-B916-E90A-AB85060B0F9D}"/>
+          </ac:spMkLst>
+        </pc:spChg>
+        <pc:spChg chg="add mod">
+          <ac:chgData name="Sun, Steven" userId="672fd9e1-130d-4d83-bf46-4352c41140a3" providerId="ADAL" clId="{33C68A6E-30E6-4455-9392-469BFD8ACFCB}" dt="2026-03-15T15:54:19.970" v="567" actId="20577"/>
+          <ac:spMkLst>
+            <pc:docMk/>
+            <pc:sldMk cId="1605906832" sldId="265"/>
+            <ac:spMk id="11" creationId="{AED28E60-4887-AC60-050A-71D5F931492F}"/>
+          </ac:spMkLst>
+        </pc:spChg>
+        <pc:spChg chg="add mod">
+          <ac:chgData name="Sun, Steven" userId="672fd9e1-130d-4d83-bf46-4352c41140a3" providerId="ADAL" clId="{33C68A6E-30E6-4455-9392-469BFD8ACFCB}" dt="2026-03-15T15:50:43.412" v="454"/>
+          <ac:spMkLst>
+            <pc:docMk/>
+            <pc:sldMk cId="1605906832" sldId="265"/>
+            <ac:spMk id="12" creationId="{A919F3B6-F696-ECAE-DD6B-FBF285AA6105}"/>
+          </ac:spMkLst>
+        </pc:spChg>
+        <pc:spChg chg="del">
+          <ac:chgData name="Sun, Steven" userId="672fd9e1-130d-4d83-bf46-4352c41140a3" providerId="ADAL" clId="{33C68A6E-30E6-4455-9392-469BFD8ACFCB}" dt="2026-03-15T15:50:34.497" v="452"/>
+          <ac:spMkLst>
+            <pc:docMk/>
+            <pc:sldMk cId="1605906832" sldId="265"/>
+            <ac:spMk id="15" creationId="{3D41B57F-083F-6797-F546-8DA9ED333F88}"/>
+          </ac:spMkLst>
+        </pc:spChg>
+        <pc:grpChg chg="del">
+          <ac:chgData name="Sun, Steven" userId="672fd9e1-130d-4d83-bf46-4352c41140a3" providerId="ADAL" clId="{33C68A6E-30E6-4455-9392-469BFD8ACFCB}" dt="2026-03-15T15:50:37.927" v="453" actId="478"/>
+          <ac:grpSpMkLst>
+            <pc:docMk/>
+            <pc:sldMk cId="1605906832" sldId="265"/>
+            <ac:grpSpMk id="2" creationId="{A8422980-33AF-424D-8565-BDE2264DF3E3}"/>
+          </ac:grpSpMkLst>
+        </pc:grpChg>
+        <pc:graphicFrameChg chg="del">
+          <ac:chgData name="Sun, Steven" userId="672fd9e1-130d-4d83-bf46-4352c41140a3" providerId="ADAL" clId="{33C68A6E-30E6-4455-9392-469BFD8ACFCB}" dt="2026-03-15T15:50:37.927" v="453" actId="478"/>
+          <ac:graphicFrameMkLst>
+            <pc:docMk/>
+            <pc:sldMk cId="1605906832" sldId="265"/>
+            <ac:graphicFrameMk id="5" creationId="{8D6EB9FE-1FD4-11D7-F770-A907271AEF14}"/>
+          </ac:graphicFrameMkLst>
+        </pc:graphicFrameChg>
+        <pc:picChg chg="add mod">
+          <ac:chgData name="Sun, Steven" userId="672fd9e1-130d-4d83-bf46-4352c41140a3" providerId="ADAL" clId="{33C68A6E-30E6-4455-9392-469BFD8ACFCB}" dt="2026-03-15T15:54:07.012" v="525" actId="1076"/>
+          <ac:picMkLst>
+            <pc:docMk/>
+            <pc:sldMk cId="1605906832" sldId="265"/>
+            <ac:picMk id="14" creationId="{A47987A3-F995-65BB-B365-823123F80020}"/>
+          </ac:picMkLst>
+        </pc:picChg>
+      </pc:sldChg>
+    </pc:docChg>
+  </pc:docChgLst>
+</pc:chgInfo>
 </file>
 
 <file path=ppt/diagrams/colors1.xml><?xml version="1.0" encoding="utf-8"?>
@@ -1828,788 +2247,6 @@
 </dgm:colorsDef>
 </file>
 
-<file path=ppt/diagrams/colors3.xml><?xml version="1.0" encoding="utf-8"?>
-<dgm:colorsDef xmlns:dgm="http://schemas.openxmlformats.org/drawingml/2006/diagram" xmlns:a="http://schemas.openxmlformats.org/drawingml/2006/main" uniqueId="urn:microsoft.com/office/officeart/2005/8/colors/colorful2">
-  <dgm:title val=""/>
-  <dgm:desc val=""/>
-  <dgm:catLst>
-    <dgm:cat type="colorful" pri="10200"/>
-  </dgm:catLst>
-  <dgm:styleLbl name="node0">
-    <dgm:fillClrLst meth="repeat">
-      <a:schemeClr val="accent1"/>
-    </dgm:fillClrLst>
-    <dgm:linClrLst meth="repeat">
-      <a:schemeClr val="lt1"/>
-    </dgm:linClrLst>
-    <dgm:effectClrLst/>
-    <dgm:txLinClrLst/>
-    <dgm:txFillClrLst/>
-    <dgm:txEffectClrLst/>
-  </dgm:styleLbl>
-  <dgm:styleLbl name="node1">
-    <dgm:fillClrLst>
-      <a:schemeClr val="accent2"/>
-      <a:schemeClr val="accent3"/>
-    </dgm:fillClrLst>
-    <dgm:linClrLst meth="repeat">
-      <a:schemeClr val="lt1"/>
-    </dgm:linClrLst>
-    <dgm:effectClrLst/>
-    <dgm:txLinClrLst/>
-    <dgm:txFillClrLst/>
-    <dgm:txEffectClrLst/>
-  </dgm:styleLbl>
-  <dgm:styleLbl name="alignNode1">
-    <dgm:fillClrLst>
-      <a:schemeClr val="accent2"/>
-      <a:schemeClr val="accent3"/>
-    </dgm:fillClrLst>
-    <dgm:linClrLst>
-      <a:schemeClr val="accent2"/>
-      <a:schemeClr val="accent3"/>
-    </dgm:linClrLst>
-    <dgm:effectClrLst/>
-    <dgm:txLinClrLst/>
-    <dgm:txFillClrLst/>
-    <dgm:txEffectClrLst/>
-  </dgm:styleLbl>
-  <dgm:styleLbl name="lnNode1">
-    <dgm:fillClrLst>
-      <a:schemeClr val="accent2"/>
-      <a:schemeClr val="accent3"/>
-    </dgm:fillClrLst>
-    <dgm:linClrLst meth="repeat">
-      <a:schemeClr val="lt1"/>
-    </dgm:linClrLst>
-    <dgm:effectClrLst/>
-    <dgm:txLinClrLst/>
-    <dgm:txFillClrLst/>
-    <dgm:txEffectClrLst/>
-  </dgm:styleLbl>
-  <dgm:styleLbl name="vennNode1">
-    <dgm:fillClrLst>
-      <a:schemeClr val="accent2">
-        <a:alpha val="50000"/>
-      </a:schemeClr>
-      <a:schemeClr val="accent3">
-        <a:alpha val="50000"/>
-      </a:schemeClr>
-    </dgm:fillClrLst>
-    <dgm:linClrLst meth="repeat">
-      <a:schemeClr val="lt1"/>
-    </dgm:linClrLst>
-    <dgm:effectClrLst/>
-    <dgm:txLinClrLst/>
-    <dgm:txFillClrLst/>
-    <dgm:txEffectClrLst/>
-  </dgm:styleLbl>
-  <dgm:styleLbl name="node2">
-    <dgm:fillClrLst>
-      <a:schemeClr val="accent3"/>
-    </dgm:fillClrLst>
-    <dgm:linClrLst meth="repeat">
-      <a:schemeClr val="lt1"/>
-    </dgm:linClrLst>
-    <dgm:effectClrLst/>
-    <dgm:txLinClrLst/>
-    <dgm:txFillClrLst/>
-    <dgm:txEffectClrLst/>
-  </dgm:styleLbl>
-  <dgm:styleLbl name="node3">
-    <dgm:fillClrLst>
-      <a:schemeClr val="accent4"/>
-    </dgm:fillClrLst>
-    <dgm:linClrLst meth="repeat">
-      <a:schemeClr val="lt1"/>
-    </dgm:linClrLst>
-    <dgm:effectClrLst/>
-    <dgm:txLinClrLst/>
-    <dgm:txFillClrLst/>
-    <dgm:txEffectClrLst/>
-  </dgm:styleLbl>
-  <dgm:styleLbl name="node4">
-    <dgm:fillClrLst>
-      <a:schemeClr val="accent5"/>
-    </dgm:fillClrLst>
-    <dgm:linClrLst meth="repeat">
-      <a:schemeClr val="lt1"/>
-    </dgm:linClrLst>
-    <dgm:effectClrLst/>
-    <dgm:txLinClrLst/>
-    <dgm:txFillClrLst/>
-    <dgm:txEffectClrLst/>
-  </dgm:styleLbl>
-  <dgm:styleLbl name="fgImgPlace1">
-    <dgm:fillClrLst>
-      <a:schemeClr val="accent2">
-        <a:tint val="50000"/>
-      </a:schemeClr>
-      <a:schemeClr val="accent3">
-        <a:tint val="50000"/>
-      </a:schemeClr>
-    </dgm:fillClrLst>
-    <dgm:linClrLst meth="repeat">
-      <a:schemeClr val="lt1"/>
-    </dgm:linClrLst>
-    <dgm:effectClrLst/>
-    <dgm:txLinClrLst/>
-    <dgm:txFillClrLst meth="repeat">
-      <a:schemeClr val="lt1"/>
-    </dgm:txFillClrLst>
-    <dgm:txEffectClrLst/>
-  </dgm:styleLbl>
-  <dgm:styleLbl name="alignImgPlace1">
-    <dgm:fillClrLst>
-      <a:schemeClr val="accent2">
-        <a:tint val="50000"/>
-      </a:schemeClr>
-      <a:schemeClr val="accent3">
-        <a:tint val="20000"/>
-      </a:schemeClr>
-    </dgm:fillClrLst>
-    <dgm:linClrLst meth="repeat">
-      <a:schemeClr val="lt1"/>
-    </dgm:linClrLst>
-    <dgm:effectClrLst/>
-    <dgm:txLinClrLst/>
-    <dgm:txFillClrLst meth="repeat">
-      <a:schemeClr val="lt1"/>
-    </dgm:txFillClrLst>
-    <dgm:txEffectClrLst/>
-  </dgm:styleLbl>
-  <dgm:styleLbl name="bgImgPlace1">
-    <dgm:fillClrLst>
-      <a:schemeClr val="accent2">
-        <a:tint val="50000"/>
-      </a:schemeClr>
-      <a:schemeClr val="accent3">
-        <a:tint val="20000"/>
-      </a:schemeClr>
-    </dgm:fillClrLst>
-    <dgm:linClrLst meth="repeat">
-      <a:schemeClr val="lt1"/>
-    </dgm:linClrLst>
-    <dgm:effectClrLst/>
-    <dgm:txLinClrLst/>
-    <dgm:txFillClrLst meth="repeat">
-      <a:schemeClr val="lt1"/>
-    </dgm:txFillClrLst>
-    <dgm:txEffectClrLst/>
-  </dgm:styleLbl>
-  <dgm:styleLbl name="sibTrans2D1">
-    <dgm:fillClrLst>
-      <a:schemeClr val="accent2"/>
-      <a:schemeClr val="accent3"/>
-    </dgm:fillClrLst>
-    <dgm:linClrLst meth="repeat">
-      <a:schemeClr val="lt1"/>
-    </dgm:linClrLst>
-    <dgm:effectClrLst/>
-    <dgm:txLinClrLst/>
-    <dgm:txFillClrLst/>
-    <dgm:txEffectClrLst/>
-  </dgm:styleLbl>
-  <dgm:styleLbl name="fgSibTrans2D1">
-    <dgm:fillClrLst>
-      <a:schemeClr val="accent2"/>
-      <a:schemeClr val="accent3"/>
-    </dgm:fillClrLst>
-    <dgm:linClrLst meth="repeat">
-      <a:schemeClr val="lt1"/>
-    </dgm:linClrLst>
-    <dgm:effectClrLst/>
-    <dgm:txLinClrLst/>
-    <dgm:txFillClrLst meth="repeat">
-      <a:schemeClr val="lt1"/>
-    </dgm:txFillClrLst>
-    <dgm:txEffectClrLst/>
-  </dgm:styleLbl>
-  <dgm:styleLbl name="bgSibTrans2D1">
-    <dgm:fillClrLst>
-      <a:schemeClr val="accent2"/>
-      <a:schemeClr val="accent3"/>
-    </dgm:fillClrLst>
-    <dgm:linClrLst meth="repeat">
-      <a:schemeClr val="lt1"/>
-    </dgm:linClrLst>
-    <dgm:effectClrLst/>
-    <dgm:txLinClrLst/>
-    <dgm:txFillClrLst meth="repeat">
-      <a:schemeClr val="lt1"/>
-    </dgm:txFillClrLst>
-    <dgm:txEffectClrLst/>
-  </dgm:styleLbl>
-  <dgm:styleLbl name="sibTrans1D1">
-    <dgm:fillClrLst/>
-    <dgm:linClrLst>
-      <a:schemeClr val="accent2"/>
-      <a:schemeClr val="accent3"/>
-    </dgm:linClrLst>
-    <dgm:effectClrLst/>
-    <dgm:txLinClrLst/>
-    <dgm:txFillClrLst meth="repeat">
-      <a:schemeClr val="tx1"/>
-    </dgm:txFillClrLst>
-    <dgm:txEffectClrLst/>
-  </dgm:styleLbl>
-  <dgm:styleLbl name="callout">
-    <dgm:fillClrLst meth="repeat">
-      <a:schemeClr val="accent2"/>
-    </dgm:fillClrLst>
-    <dgm:linClrLst meth="repeat">
-      <a:schemeClr val="accent2">
-        <a:tint val="50000"/>
-      </a:schemeClr>
-    </dgm:linClrLst>
-    <dgm:effectClrLst/>
-    <dgm:txLinClrLst/>
-    <dgm:txFillClrLst meth="repeat">
-      <a:schemeClr val="tx1"/>
-    </dgm:txFillClrLst>
-    <dgm:txEffectClrLst/>
-  </dgm:styleLbl>
-  <dgm:styleLbl name="asst0">
-    <dgm:fillClrLst meth="repeat">
-      <a:schemeClr val="accent2"/>
-    </dgm:fillClrLst>
-    <dgm:linClrLst meth="repeat">
-      <a:schemeClr val="lt1">
-        <a:shade val="80000"/>
-      </a:schemeClr>
-    </dgm:linClrLst>
-    <dgm:effectClrLst/>
-    <dgm:txLinClrLst/>
-    <dgm:txFillClrLst/>
-    <dgm:txEffectClrLst/>
-  </dgm:styleLbl>
-  <dgm:styleLbl name="asst1">
-    <dgm:fillClrLst meth="repeat">
-      <a:schemeClr val="accent3"/>
-    </dgm:fillClrLst>
-    <dgm:linClrLst meth="repeat">
-      <a:schemeClr val="lt1">
-        <a:shade val="80000"/>
-      </a:schemeClr>
-    </dgm:linClrLst>
-    <dgm:effectClrLst/>
-    <dgm:txLinClrLst/>
-    <dgm:txFillClrLst/>
-    <dgm:txEffectClrLst/>
-  </dgm:styleLbl>
-  <dgm:styleLbl name="asst2">
-    <dgm:fillClrLst>
-      <a:schemeClr val="accent4"/>
-    </dgm:fillClrLst>
-    <dgm:linClrLst meth="repeat">
-      <a:schemeClr val="lt1"/>
-    </dgm:linClrLst>
-    <dgm:effectClrLst/>
-    <dgm:txLinClrLst/>
-    <dgm:txFillClrLst/>
-    <dgm:txEffectClrLst/>
-  </dgm:styleLbl>
-  <dgm:styleLbl name="asst3">
-    <dgm:fillClrLst>
-      <a:schemeClr val="accent5"/>
-    </dgm:fillClrLst>
-    <dgm:linClrLst meth="repeat">
-      <a:schemeClr val="lt1"/>
-    </dgm:linClrLst>
-    <dgm:effectClrLst/>
-    <dgm:txLinClrLst/>
-    <dgm:txFillClrLst/>
-    <dgm:txEffectClrLst/>
-  </dgm:styleLbl>
-  <dgm:styleLbl name="asst4">
-    <dgm:fillClrLst>
-      <a:schemeClr val="accent6"/>
-    </dgm:fillClrLst>
-    <dgm:linClrLst meth="repeat">
-      <a:schemeClr val="lt1"/>
-    </dgm:linClrLst>
-    <dgm:effectClrLst/>
-    <dgm:txLinClrLst/>
-    <dgm:txFillClrLst/>
-    <dgm:txEffectClrLst/>
-  </dgm:styleLbl>
-  <dgm:styleLbl name="parChTrans2D1">
-    <dgm:fillClrLst meth="repeat">
-      <a:schemeClr val="accent2"/>
-    </dgm:fillClrLst>
-    <dgm:linClrLst meth="repeat">
-      <a:schemeClr val="lt1"/>
-    </dgm:linClrLst>
-    <dgm:effectClrLst/>
-    <dgm:txLinClrLst/>
-    <dgm:txFillClrLst meth="repeat">
-      <a:schemeClr val="lt1"/>
-    </dgm:txFillClrLst>
-    <dgm:txEffectClrLst/>
-  </dgm:styleLbl>
-  <dgm:styleLbl name="parChTrans2D2">
-    <dgm:fillClrLst meth="repeat">
-      <a:schemeClr val="accent3"/>
-    </dgm:fillClrLst>
-    <dgm:linClrLst meth="repeat">
-      <a:schemeClr val="lt1"/>
-    </dgm:linClrLst>
-    <dgm:effectClrLst/>
-    <dgm:txLinClrLst/>
-    <dgm:txFillClrLst/>
-    <dgm:txEffectClrLst/>
-  </dgm:styleLbl>
-  <dgm:styleLbl name="parChTrans2D3">
-    <dgm:fillClrLst meth="repeat">
-      <a:schemeClr val="accent4"/>
-    </dgm:fillClrLst>
-    <dgm:linClrLst meth="repeat">
-      <a:schemeClr val="lt1"/>
-    </dgm:linClrLst>
-    <dgm:effectClrLst/>
-    <dgm:txLinClrLst/>
-    <dgm:txFillClrLst/>
-    <dgm:txEffectClrLst/>
-  </dgm:styleLbl>
-  <dgm:styleLbl name="parChTrans2D4">
-    <dgm:fillClrLst meth="repeat">
-      <a:schemeClr val="accent5"/>
-    </dgm:fillClrLst>
-    <dgm:linClrLst meth="repeat">
-      <a:schemeClr val="lt1"/>
-    </dgm:linClrLst>
-    <dgm:effectClrLst/>
-    <dgm:txLinClrLst/>
-    <dgm:txFillClrLst meth="repeat">
-      <a:schemeClr val="lt1"/>
-    </dgm:txFillClrLst>
-    <dgm:txEffectClrLst/>
-  </dgm:styleLbl>
-  <dgm:styleLbl name="parChTrans1D1">
-    <dgm:fillClrLst meth="repeat">
-      <a:schemeClr val="accent2"/>
-    </dgm:fillClrLst>
-    <dgm:linClrLst meth="repeat">
-      <a:schemeClr val="accent2"/>
-    </dgm:linClrLst>
-    <dgm:effectClrLst/>
-    <dgm:txLinClrLst/>
-    <dgm:txFillClrLst meth="repeat">
-      <a:schemeClr val="tx1"/>
-    </dgm:txFillClrLst>
-    <dgm:txEffectClrLst/>
-  </dgm:styleLbl>
-  <dgm:styleLbl name="parChTrans1D2">
-    <dgm:fillClrLst meth="repeat">
-      <a:schemeClr val="accent2">
-        <a:tint val="90000"/>
-      </a:schemeClr>
-    </dgm:fillClrLst>
-    <dgm:linClrLst meth="repeat">
-      <a:schemeClr val="accent3"/>
-    </dgm:linClrLst>
-    <dgm:effectClrLst/>
-    <dgm:txLinClrLst/>
-    <dgm:txFillClrLst meth="repeat">
-      <a:schemeClr val="tx1"/>
-    </dgm:txFillClrLst>
-    <dgm:txEffectClrLst/>
-  </dgm:styleLbl>
-  <dgm:styleLbl name="parChTrans1D3">
-    <dgm:fillClrLst meth="repeat">
-      <a:schemeClr val="accent2">
-        <a:tint val="70000"/>
-      </a:schemeClr>
-    </dgm:fillClrLst>
-    <dgm:linClrLst meth="repeat">
-      <a:schemeClr val="accent4"/>
-    </dgm:linClrLst>
-    <dgm:effectClrLst/>
-    <dgm:txLinClrLst/>
-    <dgm:txFillClrLst meth="repeat">
-      <a:schemeClr val="tx1"/>
-    </dgm:txFillClrLst>
-    <dgm:txEffectClrLst/>
-  </dgm:styleLbl>
-  <dgm:styleLbl name="parChTrans1D4">
-    <dgm:fillClrLst meth="repeat">
-      <a:schemeClr val="accent2">
-        <a:tint val="50000"/>
-      </a:schemeClr>
-    </dgm:fillClrLst>
-    <dgm:linClrLst meth="repeat">
-      <a:schemeClr val="accent5"/>
-    </dgm:linClrLst>
-    <dgm:effectClrLst/>
-    <dgm:txLinClrLst/>
-    <dgm:txFillClrLst meth="repeat">
-      <a:schemeClr val="tx1"/>
-    </dgm:txFillClrLst>
-    <dgm:txEffectClrLst/>
-  </dgm:styleLbl>
-  <dgm:styleLbl name="fgAcc1">
-    <dgm:fillClrLst meth="repeat">
-      <a:schemeClr val="lt1">
-        <a:alpha val="90000"/>
-      </a:schemeClr>
-    </dgm:fillClrLst>
-    <dgm:linClrLst>
-      <a:schemeClr val="accent2"/>
-      <a:schemeClr val="accent3"/>
-    </dgm:linClrLst>
-    <dgm:effectClrLst/>
-    <dgm:txLinClrLst/>
-    <dgm:txFillClrLst meth="repeat">
-      <a:schemeClr val="dk1"/>
-    </dgm:txFillClrLst>
-    <dgm:txEffectClrLst/>
-  </dgm:styleLbl>
-  <dgm:styleLbl name="conFgAcc1">
-    <dgm:fillClrLst meth="repeat">
-      <a:schemeClr val="lt1">
-        <a:alpha val="90000"/>
-      </a:schemeClr>
-    </dgm:fillClrLst>
-    <dgm:linClrLst>
-      <a:schemeClr val="accent2"/>
-      <a:schemeClr val="accent3"/>
-    </dgm:linClrLst>
-    <dgm:effectClrLst/>
-    <dgm:txLinClrLst/>
-    <dgm:txFillClrLst meth="repeat">
-      <a:schemeClr val="dk1"/>
-    </dgm:txFillClrLst>
-    <dgm:txEffectClrLst/>
-  </dgm:styleLbl>
-  <dgm:styleLbl name="alignAcc1">
-    <dgm:fillClrLst meth="repeat">
-      <a:schemeClr val="lt1">
-        <a:alpha val="90000"/>
-      </a:schemeClr>
-    </dgm:fillClrLst>
-    <dgm:linClrLst>
-      <a:schemeClr val="accent2"/>
-      <a:schemeClr val="accent3"/>
-    </dgm:linClrLst>
-    <dgm:effectClrLst/>
-    <dgm:txLinClrLst/>
-    <dgm:txFillClrLst meth="repeat">
-      <a:schemeClr val="dk1"/>
-    </dgm:txFillClrLst>
-    <dgm:txEffectClrLst/>
-  </dgm:styleLbl>
-  <dgm:styleLbl name="trAlignAcc1">
-    <dgm:fillClrLst meth="repeat">
-      <a:schemeClr val="lt1">
-        <a:alpha val="40000"/>
-      </a:schemeClr>
-    </dgm:fillClrLst>
-    <dgm:linClrLst meth="repeat">
-      <a:schemeClr val="accent2"/>
-    </dgm:linClrLst>
-    <dgm:effectClrLst/>
-    <dgm:txLinClrLst/>
-    <dgm:txFillClrLst meth="repeat">
-      <a:schemeClr val="dk1"/>
-    </dgm:txFillClrLst>
-    <dgm:txEffectClrLst/>
-  </dgm:styleLbl>
-  <dgm:styleLbl name="bgAcc1">
-    <dgm:fillClrLst meth="repeat">
-      <a:schemeClr val="lt1">
-        <a:alpha val="90000"/>
-      </a:schemeClr>
-    </dgm:fillClrLst>
-    <dgm:linClrLst>
-      <a:schemeClr val="accent2"/>
-      <a:schemeClr val="accent3"/>
-    </dgm:linClrLst>
-    <dgm:effectClrLst/>
-    <dgm:txLinClrLst/>
-    <dgm:txFillClrLst meth="repeat">
-      <a:schemeClr val="dk1"/>
-    </dgm:txFillClrLst>
-    <dgm:txEffectClrLst/>
-  </dgm:styleLbl>
-  <dgm:styleLbl name="solidFgAcc1">
-    <dgm:fillClrLst meth="repeat">
-      <a:schemeClr val="lt1"/>
-    </dgm:fillClrLst>
-    <dgm:linClrLst>
-      <a:schemeClr val="accent2"/>
-      <a:schemeClr val="accent3"/>
-    </dgm:linClrLst>
-    <dgm:effectClrLst/>
-    <dgm:txLinClrLst/>
-    <dgm:txFillClrLst meth="repeat">
-      <a:schemeClr val="dk1"/>
-    </dgm:txFillClrLst>
-    <dgm:txEffectClrLst/>
-  </dgm:styleLbl>
-  <dgm:styleLbl name="solidAlignAcc1">
-    <dgm:fillClrLst meth="repeat">
-      <a:schemeClr val="lt1"/>
-    </dgm:fillClrLst>
-    <dgm:linClrLst>
-      <a:schemeClr val="accent2"/>
-      <a:schemeClr val="accent3"/>
-    </dgm:linClrLst>
-    <dgm:effectClrLst/>
-    <dgm:txLinClrLst/>
-    <dgm:txFillClrLst meth="repeat">
-      <a:schemeClr val="dk1"/>
-    </dgm:txFillClrLst>
-    <dgm:txEffectClrLst/>
-  </dgm:styleLbl>
-  <dgm:styleLbl name="solidBgAcc1">
-    <dgm:fillClrLst meth="repeat">
-      <a:schemeClr val="lt1"/>
-    </dgm:fillClrLst>
-    <dgm:linClrLst>
-      <a:schemeClr val="accent2"/>
-      <a:schemeClr val="accent3"/>
-    </dgm:linClrLst>
-    <dgm:effectClrLst/>
-    <dgm:txLinClrLst/>
-    <dgm:txFillClrLst meth="repeat">
-      <a:schemeClr val="dk1"/>
-    </dgm:txFillClrLst>
-    <dgm:txEffectClrLst/>
-  </dgm:styleLbl>
-  <dgm:styleLbl name="fgAccFollowNode1">
-    <dgm:fillClrLst>
-      <a:schemeClr val="accent2">
-        <a:tint val="40000"/>
-        <a:alpha val="90000"/>
-      </a:schemeClr>
-      <a:schemeClr val="accent3">
-        <a:tint val="40000"/>
-        <a:alpha val="90000"/>
-      </a:schemeClr>
-    </dgm:fillClrLst>
-    <dgm:linClrLst>
-      <a:schemeClr val="accent2">
-        <a:tint val="40000"/>
-        <a:alpha val="90000"/>
-      </a:schemeClr>
-      <a:schemeClr val="accent3">
-        <a:tint val="40000"/>
-        <a:alpha val="90000"/>
-      </a:schemeClr>
-    </dgm:linClrLst>
-    <dgm:effectClrLst/>
-    <dgm:txLinClrLst/>
-    <dgm:txFillClrLst meth="repeat">
-      <a:schemeClr val="dk1"/>
-    </dgm:txFillClrLst>
-    <dgm:txEffectClrLst/>
-  </dgm:styleLbl>
-  <dgm:styleLbl name="alignAccFollowNode1">
-    <dgm:fillClrLst>
-      <a:schemeClr val="accent2">
-        <a:tint val="40000"/>
-        <a:alpha val="90000"/>
-      </a:schemeClr>
-      <a:schemeClr val="accent3">
-        <a:tint val="40000"/>
-        <a:alpha val="90000"/>
-      </a:schemeClr>
-    </dgm:fillClrLst>
-    <dgm:linClrLst>
-      <a:schemeClr val="accent2">
-        <a:tint val="40000"/>
-        <a:alpha val="90000"/>
-      </a:schemeClr>
-      <a:schemeClr val="accent3">
-        <a:tint val="40000"/>
-        <a:alpha val="90000"/>
-      </a:schemeClr>
-    </dgm:linClrLst>
-    <dgm:effectClrLst/>
-    <dgm:txLinClrLst/>
-    <dgm:txFillClrLst meth="repeat">
-      <a:schemeClr val="dk1"/>
-    </dgm:txFillClrLst>
-    <dgm:txEffectClrLst/>
-  </dgm:styleLbl>
-  <dgm:styleLbl name="bgAccFollowNode1">
-    <dgm:fillClrLst>
-      <a:schemeClr val="accent2">
-        <a:tint val="40000"/>
-        <a:alpha val="90000"/>
-      </a:schemeClr>
-      <a:schemeClr val="accent3">
-        <a:tint val="40000"/>
-        <a:alpha val="90000"/>
-      </a:schemeClr>
-    </dgm:fillClrLst>
-    <dgm:linClrLst>
-      <a:schemeClr val="accent2">
-        <a:tint val="40000"/>
-        <a:alpha val="90000"/>
-      </a:schemeClr>
-      <a:schemeClr val="accent3">
-        <a:tint val="40000"/>
-        <a:alpha val="90000"/>
-      </a:schemeClr>
-    </dgm:linClrLst>
-    <dgm:effectClrLst/>
-    <dgm:txLinClrLst/>
-    <dgm:txFillClrLst meth="repeat">
-      <a:schemeClr val="dk1"/>
-    </dgm:txFillClrLst>
-    <dgm:txEffectClrLst/>
-  </dgm:styleLbl>
-  <dgm:styleLbl name="fgAcc0">
-    <dgm:fillClrLst meth="repeat">
-      <a:schemeClr val="lt1">
-        <a:alpha val="90000"/>
-      </a:schemeClr>
-    </dgm:fillClrLst>
-    <dgm:linClrLst>
-      <a:schemeClr val="accent1"/>
-    </dgm:linClrLst>
-    <dgm:effectClrLst/>
-    <dgm:txLinClrLst/>
-    <dgm:txFillClrLst meth="repeat">
-      <a:schemeClr val="dk1"/>
-    </dgm:txFillClrLst>
-    <dgm:txEffectClrLst/>
-  </dgm:styleLbl>
-  <dgm:styleLbl name="fgAcc2">
-    <dgm:fillClrLst meth="repeat">
-      <a:schemeClr val="lt1">
-        <a:alpha val="90000"/>
-      </a:schemeClr>
-    </dgm:fillClrLst>
-    <dgm:linClrLst>
-      <a:schemeClr val="accent3"/>
-    </dgm:linClrLst>
-    <dgm:effectClrLst/>
-    <dgm:txLinClrLst/>
-    <dgm:txFillClrLst meth="repeat">
-      <a:schemeClr val="dk1"/>
-    </dgm:txFillClrLst>
-    <dgm:txEffectClrLst/>
-  </dgm:styleLbl>
-  <dgm:styleLbl name="fgAcc3">
-    <dgm:fillClrLst meth="repeat">
-      <a:schemeClr val="lt1">
-        <a:alpha val="90000"/>
-      </a:schemeClr>
-    </dgm:fillClrLst>
-    <dgm:linClrLst>
-      <a:schemeClr val="accent4"/>
-    </dgm:linClrLst>
-    <dgm:effectClrLst/>
-    <dgm:txLinClrLst/>
-    <dgm:txFillClrLst meth="repeat">
-      <a:schemeClr val="dk1"/>
-    </dgm:txFillClrLst>
-    <dgm:txEffectClrLst/>
-  </dgm:styleLbl>
-  <dgm:styleLbl name="fgAcc4">
-    <dgm:fillClrLst meth="repeat">
-      <a:schemeClr val="lt1">
-        <a:alpha val="90000"/>
-      </a:schemeClr>
-    </dgm:fillClrLst>
-    <dgm:linClrLst>
-      <a:schemeClr val="accent5"/>
-    </dgm:linClrLst>
-    <dgm:effectClrLst/>
-    <dgm:txLinClrLst/>
-    <dgm:txFillClrLst meth="repeat">
-      <a:schemeClr val="dk1"/>
-    </dgm:txFillClrLst>
-    <dgm:txEffectClrLst/>
-  </dgm:styleLbl>
-  <dgm:styleLbl name="bgShp">
-    <dgm:fillClrLst meth="repeat">
-      <a:schemeClr val="accent2">
-        <a:tint val="40000"/>
-      </a:schemeClr>
-    </dgm:fillClrLst>
-    <dgm:linClrLst meth="repeat">
-      <a:schemeClr val="dk1"/>
-    </dgm:linClrLst>
-    <dgm:effectClrLst/>
-    <dgm:txLinClrLst/>
-    <dgm:txFillClrLst meth="repeat">
-      <a:schemeClr val="dk1"/>
-    </dgm:txFillClrLst>
-    <dgm:txEffectClrLst/>
-  </dgm:styleLbl>
-  <dgm:styleLbl name="dkBgShp">
-    <dgm:fillClrLst meth="repeat">
-      <a:schemeClr val="accent2">
-        <a:shade val="90000"/>
-      </a:schemeClr>
-    </dgm:fillClrLst>
-    <dgm:linClrLst meth="repeat">
-      <a:schemeClr val="dk1"/>
-    </dgm:linClrLst>
-    <dgm:effectClrLst/>
-    <dgm:txLinClrLst/>
-    <dgm:txFillClrLst meth="repeat">
-      <a:schemeClr val="lt1"/>
-    </dgm:txFillClrLst>
-    <dgm:txEffectClrLst/>
-  </dgm:styleLbl>
-  <dgm:styleLbl name="trBgShp">
-    <dgm:fillClrLst meth="repeat">
-      <a:schemeClr val="accent2">
-        <a:tint val="50000"/>
-        <a:alpha val="40000"/>
-      </a:schemeClr>
-    </dgm:fillClrLst>
-    <dgm:linClrLst meth="repeat">
-      <a:schemeClr val="accent2"/>
-    </dgm:linClrLst>
-    <dgm:effectClrLst/>
-    <dgm:txLinClrLst/>
-    <dgm:txFillClrLst meth="repeat">
-      <a:schemeClr val="lt1"/>
-    </dgm:txFillClrLst>
-    <dgm:txEffectClrLst/>
-  </dgm:styleLbl>
-  <dgm:styleLbl name="fgShp">
-    <dgm:fillClrLst meth="repeat">
-      <a:schemeClr val="accent2">
-        <a:tint val="40000"/>
-      </a:schemeClr>
-    </dgm:fillClrLst>
-    <dgm:linClrLst meth="repeat">
-      <a:schemeClr val="lt1"/>
-    </dgm:linClrLst>
-    <dgm:effectClrLst/>
-    <dgm:txLinClrLst/>
-    <dgm:txFillClrLst meth="repeat">
-      <a:schemeClr val="dk1"/>
-    </dgm:txFillClrLst>
-    <dgm:txEffectClrLst/>
-  </dgm:styleLbl>
-  <dgm:styleLbl name="revTx">
-    <dgm:fillClrLst meth="repeat">
-      <a:schemeClr val="lt1">
-        <a:alpha val="0"/>
-      </a:schemeClr>
-    </dgm:fillClrLst>
-    <dgm:linClrLst meth="repeat">
-      <a:schemeClr val="dk1">
-        <a:alpha val="0"/>
-      </a:schemeClr>
-    </dgm:linClrLst>
-    <dgm:effectClrLst/>
-    <dgm:txLinClrLst/>
-    <dgm:txFillClrLst meth="repeat">
-      <a:schemeClr val="tx1"/>
-    </dgm:txFillClrLst>
-    <dgm:txEffectClrLst/>
-  </dgm:styleLbl>
-</dgm:colorsDef>
-</file>
-
 <file path=ppt/diagrams/data1.xml><?xml version="1.0" encoding="utf-8"?>
 <dgm:dataModel xmlns:dgm="http://schemas.openxmlformats.org/drawingml/2006/diagram" xmlns:a="http://schemas.openxmlformats.org/drawingml/2006/main">
   <dgm:ptLst>
@@ -2625,17 +2262,21 @@
       </dgm:t>
     </dgm:pt>
     <dgm:pt modelId="{75BF08B6-EAE8-4CFD-AEAB-B36590F12549}">
-      <dgm:prSet/>
+      <dgm:prSet custT="1"/>
       <dgm:spPr/>
       <dgm:t>
         <a:bodyPr/>
         <a:lstStyle/>
         <a:p>
           <a:r>
-            <a:rPr lang="en-GB" dirty="0"/>
-            <a:t>Device that is attached to the back of your phone, using MagSafe (ideally)</a:t>
+            <a:rPr lang="en-GB" sz="3200"/>
+            <a:t>MagSafe</a:t>
           </a:r>
-          <a:endParaRPr lang="en-US" dirty="0"/>
+          <a:r>
+            <a:rPr lang="en-GB" sz="2000"/>
+            <a:t> </a:t>
+          </a:r>
+          <a:endParaRPr lang="en-US" sz="2000"/>
         </a:p>
       </dgm:t>
     </dgm:pt>
@@ -2662,17 +2303,23 @@
       </dgm:t>
     </dgm:pt>
     <dgm:pt modelId="{541EFC17-7A39-4141-8137-C3C2573FC183}">
-      <dgm:prSet/>
+      <dgm:prSet custT="1"/>
       <dgm:spPr/>
       <dgm:t>
         <a:bodyPr/>
         <a:lstStyle/>
         <a:p>
           <a:r>
-            <a:rPr lang="en-GB"/>
-            <a:t>Has several system that detect movements of your phone directly, using sensors in the device and the camera on your laptop.</a:t>
+            <a:rPr lang="en-GB" sz="2800"/>
+            <a:t>Movements of phone </a:t>
           </a:r>
-          <a:endParaRPr lang="en-US"/>
+        </a:p>
+        <a:p>
+          <a:r>
+            <a:rPr lang="en-GB" sz="2800"/>
+            <a:t>AI analyse laptop cam.</a:t>
+          </a:r>
+          <a:endParaRPr lang="en-US" sz="2000"/>
         </a:p>
       </dgm:t>
     </dgm:pt>
@@ -2706,10 +2353,10 @@
         <a:lstStyle/>
         <a:p>
           <a:r>
-            <a:rPr lang="en-GB" dirty="0"/>
-            <a:t>If you are on your laptop initially doing your work and you decide to utilise your phone, the device and the system will detect these movements and record it. There would be different outputs, as described in the next couple slides.</a:t>
+            <a:rPr lang="en-GB"/>
+            <a:t>RESPONSE</a:t>
           </a:r>
-          <a:endParaRPr lang="en-US" dirty="0"/>
+          <a:endParaRPr lang="en-US"/>
         </a:p>
       </dgm:t>
     </dgm:pt>
@@ -2958,10 +2605,10 @@
         <a:lstStyle/>
         <a:p>
           <a:r>
-            <a:rPr lang="en-GB" sz="2800" dirty="0"/>
-            <a:t>Detects if phone is on table using  ultrasonic sensor in the device</a:t>
+            <a:rPr lang="en-GB" sz="3200"/>
+            <a:t>Ultrasonic sensor in the device</a:t>
           </a:r>
-          <a:endParaRPr lang="en-US" sz="2800" dirty="0"/>
+          <a:endParaRPr lang="en-US" sz="3200"/>
         </a:p>
       </dgm:t>
     </dgm:pt>
@@ -2995,10 +2642,10 @@
         <a:lstStyle/>
         <a:p>
           <a:r>
-            <a:rPr lang="en-GB" sz="2000" dirty="0"/>
-            <a:t>Detects if phone is in the user’s hand if it is in the frame of the camera on laptop with a YOLO phone and person detection system using a one pass neural network </a:t>
+            <a:rPr lang="en-GB" sz="2800"/>
+            <a:t>INCLINATION on phone streams to MATLAB app</a:t>
           </a:r>
-          <a:endParaRPr lang="en-US" sz="2000" dirty="0"/>
+          <a:endParaRPr lang="en-US" sz="2800"/>
         </a:p>
       </dgm:t>
     </dgm:pt>
@@ -3032,10 +2679,10 @@
         <a:lstStyle/>
         <a:p>
           <a:r>
-            <a:rPr lang="en-GB" sz="2400" dirty="0"/>
-            <a:t>Detection of inclination on phone using gyroscope sensor on MATLAB app</a:t>
+            <a:rPr lang="en-GB" sz="2400"/>
+            <a:t>PRESENTS OF PHONE - YOLO one pass neural network </a:t>
           </a:r>
-          <a:endParaRPr lang="en-US" sz="2400" dirty="0"/>
+          <a:endParaRPr lang="en-US" sz="2400"/>
         </a:p>
       </dgm:t>
     </dgm:pt>
@@ -3069,16 +2716,16 @@
         <a:lstStyle/>
         <a:p>
           <a:r>
-            <a:rPr lang="en-US" dirty="0"/>
-            <a:t>Uses </a:t>
+            <a:rPr lang="en-US"/>
+            <a:t>head and eye tracker -</a:t>
           </a:r>
           <a:r>
-            <a:rPr lang="en-US" dirty="0" err="1"/>
-            <a:t>mediapipe</a:t>
+            <a:rPr lang="en-US" err="1"/>
+            <a:t>MediaPipe</a:t>
           </a:r>
           <a:r>
-            <a:rPr lang="en-US" dirty="0"/>
-            <a:t> (a head and eye tracker) using a neutral network on certain points on the face, like chin, eyes, nose and more to see where someone is looking</a:t>
+            <a:rPr lang="en-US"/>
+            <a:t> (neutral network on certain points on the face)</a:t>
           </a:r>
         </a:p>
       </dgm:t>
@@ -3105,42 +2752,6 @@
         </a:p>
       </dgm:t>
     </dgm:pt>
-    <dgm:pt modelId="{6FFF44C0-80AE-4B7A-8A1C-B8F81CCF9A9A}">
-      <dgm:prSet/>
-      <dgm:spPr/>
-      <dgm:t>
-        <a:bodyPr/>
-        <a:lstStyle/>
-        <a:p>
-          <a:r>
-            <a:rPr lang="en-GB" dirty="0"/>
-            <a:t>There are 3 states the system has, as described on the next slide.</a:t>
-          </a:r>
-        </a:p>
-      </dgm:t>
-    </dgm:pt>
-    <dgm:pt modelId="{D8BC65DC-5402-476F-B1C6-BEE421BCE788}" type="parTrans" cxnId="{5B91A2E5-7757-4955-B952-9B55BEAE9B7F}">
-      <dgm:prSet/>
-      <dgm:spPr/>
-      <dgm:t>
-        <a:bodyPr/>
-        <a:lstStyle/>
-        <a:p>
-          <a:endParaRPr lang="en-GB"/>
-        </a:p>
-      </dgm:t>
-    </dgm:pt>
-    <dgm:pt modelId="{14C752A6-A8D8-4FE2-948C-65DBB2ACB54E}" type="sibTrans" cxnId="{5B91A2E5-7757-4955-B952-9B55BEAE9B7F}">
-      <dgm:prSet/>
-      <dgm:spPr/>
-      <dgm:t>
-        <a:bodyPr/>
-        <a:lstStyle/>
-        <a:p>
-          <a:endParaRPr lang="en-GB"/>
-        </a:p>
-      </dgm:t>
-    </dgm:pt>
     <dgm:pt modelId="{1D78F77A-18C0-49F4-8E7C-E701F43BD2BC}" type="pres">
       <dgm:prSet presAssocID="{411AF103-0BE7-4550-8427-5C3F73C1FE97}" presName="diagram" presStyleCnt="0">
         <dgm:presLayoutVars>
@@ -3151,7 +2762,7 @@
       <dgm:spPr/>
     </dgm:pt>
     <dgm:pt modelId="{8D7AF450-85A0-4872-8570-3AFBF8322E8F}" type="pres">
-      <dgm:prSet presAssocID="{DE519C75-36C8-4692-8B38-C5C0D7B643B2}" presName="node" presStyleLbl="node1" presStyleIdx="0" presStyleCnt="5">
+      <dgm:prSet presAssocID="{DE519C75-36C8-4692-8B38-C5C0D7B643B2}" presName="node" presStyleLbl="node1" presStyleIdx="0" presStyleCnt="4" custLinFactNeighborX="-1200" custLinFactNeighborY="-9414">
         <dgm:presLayoutVars>
           <dgm:bulletEnabled val="1"/>
         </dgm:presLayoutVars>
@@ -3163,7 +2774,7 @@
       <dgm:spPr/>
     </dgm:pt>
     <dgm:pt modelId="{7E5AE839-E617-4A6B-B769-91EFD64551A0}" type="pres">
-      <dgm:prSet presAssocID="{4A42339C-734F-48D0-9DFB-4896EE913779}" presName="node" presStyleLbl="node1" presStyleIdx="1" presStyleCnt="5">
+      <dgm:prSet presAssocID="{4A42339C-734F-48D0-9DFB-4896EE913779}" presName="node" presStyleLbl="node1" presStyleIdx="1" presStyleCnt="4" custLinFactNeighborX="-1241" custLinFactNeighborY="-9414">
         <dgm:presLayoutVars>
           <dgm:bulletEnabled val="1"/>
         </dgm:presLayoutVars>
@@ -3175,7 +2786,7 @@
       <dgm:spPr/>
     </dgm:pt>
     <dgm:pt modelId="{A6ED68CC-4D39-4E4D-82B9-8D708B1E3512}" type="pres">
-      <dgm:prSet presAssocID="{9CBD1385-9C54-478B-A161-FB7FE56E3452}" presName="node" presStyleLbl="node1" presStyleIdx="2" presStyleCnt="5" custLinFactNeighborX="863" custLinFactNeighborY="5750">
+      <dgm:prSet presAssocID="{9CBD1385-9C54-478B-A161-FB7FE56E3452}" presName="node" presStyleLbl="node1" presStyleIdx="2" presStyleCnt="4" custLinFactNeighborX="1241" custLinFactNeighborY="22290">
         <dgm:presLayoutVars>
           <dgm:bulletEnabled val="1"/>
         </dgm:presLayoutVars>
@@ -3187,19 +2798,7 @@
       <dgm:spPr/>
     </dgm:pt>
     <dgm:pt modelId="{FD8EFCE9-2EFF-4A46-97BD-D68334D8D1A6}" type="pres">
-      <dgm:prSet presAssocID="{4562108C-B49E-40E3-9598-2C91160074EA}" presName="node" presStyleLbl="node1" presStyleIdx="3" presStyleCnt="5" custLinFactNeighborX="-258">
-        <dgm:presLayoutVars>
-          <dgm:bulletEnabled val="1"/>
-        </dgm:presLayoutVars>
-      </dgm:prSet>
-      <dgm:spPr/>
-    </dgm:pt>
-    <dgm:pt modelId="{2F492441-6256-40B1-AFDA-EF4084A03181}" type="pres">
-      <dgm:prSet presAssocID="{FF81E9DB-7F9A-48CE-B507-345B9B47D668}" presName="sibTrans" presStyleCnt="0"/>
-      <dgm:spPr/>
-    </dgm:pt>
-    <dgm:pt modelId="{1AB37B74-DC70-4345-B1CA-0B9E4F4D0BB0}" type="pres">
-      <dgm:prSet presAssocID="{6FFF44C0-80AE-4B7A-8A1C-B8F81CCF9A9A}" presName="node" presStyleLbl="node1" presStyleIdx="4" presStyleCnt="5">
+      <dgm:prSet presAssocID="{4562108C-B49E-40E3-9598-2C91160074EA}" presName="node" presStyleLbl="node1" presStyleIdx="3" presStyleCnt="4" custLinFactNeighborX="-1241" custLinFactNeighborY="19293">
         <dgm:presLayoutVars>
           <dgm:bulletEnabled val="1"/>
         </dgm:presLayoutVars>
@@ -3208,7 +2807,6 @@
     </dgm:pt>
   </dgm:ptLst>
   <dgm:cxnLst>
-    <dgm:cxn modelId="{FB78B705-18BB-4C8E-9994-ADAE5077ADF1}" type="presOf" srcId="{6FFF44C0-80AE-4B7A-8A1C-B8F81CCF9A9A}" destId="{1AB37B74-DC70-4345-B1CA-0B9E4F4D0BB0}" srcOrd="0" destOrd="0" presId="urn:microsoft.com/office/officeart/2005/8/layout/default"/>
     <dgm:cxn modelId="{2219B258-C16A-4AE1-A8C1-140D35B33004}" type="presOf" srcId="{4A42339C-734F-48D0-9DFB-4896EE913779}" destId="{7E5AE839-E617-4A6B-B769-91EFD64551A0}" srcOrd="0" destOrd="0" presId="urn:microsoft.com/office/officeart/2005/8/layout/default"/>
     <dgm:cxn modelId="{DF142293-6AD5-425E-A160-06C0CBBCCA20}" type="presOf" srcId="{9CBD1385-9C54-478B-A161-FB7FE56E3452}" destId="{A6ED68CC-4D39-4E4D-82B9-8D708B1E3512}" srcOrd="0" destOrd="0" presId="urn:microsoft.com/office/officeart/2005/8/layout/default"/>
     <dgm:cxn modelId="{C7C996AC-00A6-498C-8271-F2D02BA314F9}" type="presOf" srcId="{DE519C75-36C8-4692-8B38-C5C0D7B643B2}" destId="{8D7AF450-85A0-4872-8570-3AFBF8322E8F}" srcOrd="0" destOrd="0" presId="urn:microsoft.com/office/officeart/2005/8/layout/default"/>
@@ -3216,7 +2814,6 @@
     <dgm:cxn modelId="{B17423B6-0AD9-4783-8FF2-86916595AC87}" srcId="{411AF103-0BE7-4550-8427-5C3F73C1FE97}" destId="{DE519C75-36C8-4692-8B38-C5C0D7B643B2}" srcOrd="0" destOrd="0" parTransId="{47A6F431-A797-4E03-BF39-CC496DA72B06}" sibTransId="{F9EB81E8-BCF3-4188-BDE2-AE05AB392A30}"/>
     <dgm:cxn modelId="{AA105FDF-63E8-405D-A74E-7DA1CE7C57FE}" srcId="{411AF103-0BE7-4550-8427-5C3F73C1FE97}" destId="{9CBD1385-9C54-478B-A161-FB7FE56E3452}" srcOrd="2" destOrd="0" parTransId="{286D7AC3-C4AE-4F02-AC17-9AB63B0EA795}" sibTransId="{1BC3DA8D-7FFD-40A8-859F-C9867C81E066}"/>
     <dgm:cxn modelId="{8D0894E5-17BF-4134-B97E-5527D3BEE314}" type="presOf" srcId="{411AF103-0BE7-4550-8427-5C3F73C1FE97}" destId="{1D78F77A-18C0-49F4-8E7C-E701F43BD2BC}" srcOrd="0" destOrd="0" presId="urn:microsoft.com/office/officeart/2005/8/layout/default"/>
-    <dgm:cxn modelId="{5B91A2E5-7757-4955-B952-9B55BEAE9B7F}" srcId="{411AF103-0BE7-4550-8427-5C3F73C1FE97}" destId="{6FFF44C0-80AE-4B7A-8A1C-B8F81CCF9A9A}" srcOrd="4" destOrd="0" parTransId="{D8BC65DC-5402-476F-B1C6-BEE421BCE788}" sibTransId="{14C752A6-A8D8-4FE2-948C-65DBB2ACB54E}"/>
     <dgm:cxn modelId="{875EBAF2-8313-4B70-BF46-AED197875C84}" type="presOf" srcId="{4562108C-B49E-40E3-9598-2C91160074EA}" destId="{FD8EFCE9-2EFF-4A46-97BD-D68334D8D1A6}" srcOrd="0" destOrd="0" presId="urn:microsoft.com/office/officeart/2005/8/layout/default"/>
     <dgm:cxn modelId="{BF267DF5-3B60-41FF-987B-58F597F89D13}" srcId="{411AF103-0BE7-4550-8427-5C3F73C1FE97}" destId="{4562108C-B49E-40E3-9598-2C91160074EA}" srcOrd="3" destOrd="0" parTransId="{56446683-E71F-4700-B3F5-8EF40683E19A}" sibTransId="{FF81E9DB-7F9A-48CE-B507-345B9B47D668}"/>
     <dgm:cxn modelId="{1D85DF26-8336-4387-8273-50952B66C5BC}" type="presParOf" srcId="{1D78F77A-18C0-49F4-8E7C-E701F43BD2BC}" destId="{8D7AF450-85A0-4872-8570-3AFBF8322E8F}" srcOrd="0" destOrd="0" presId="urn:microsoft.com/office/officeart/2005/8/layout/default"/>
@@ -3226,263 +2823,6 @@
     <dgm:cxn modelId="{9FB5E46A-FFFF-4737-8499-FD2B6B81BD18}" type="presParOf" srcId="{1D78F77A-18C0-49F4-8E7C-E701F43BD2BC}" destId="{A6ED68CC-4D39-4E4D-82B9-8D708B1E3512}" srcOrd="4" destOrd="0" presId="urn:microsoft.com/office/officeart/2005/8/layout/default"/>
     <dgm:cxn modelId="{2B4AE4A8-B3F7-43D0-9874-E3FE6B86C588}" type="presParOf" srcId="{1D78F77A-18C0-49F4-8E7C-E701F43BD2BC}" destId="{4DAC7A1E-F0F9-4A93-9076-3B92359EE659}" srcOrd="5" destOrd="0" presId="urn:microsoft.com/office/officeart/2005/8/layout/default"/>
     <dgm:cxn modelId="{DFE1F8C6-091E-451E-BDF7-816AF541C9D6}" type="presParOf" srcId="{1D78F77A-18C0-49F4-8E7C-E701F43BD2BC}" destId="{FD8EFCE9-2EFF-4A46-97BD-D68334D8D1A6}" srcOrd="6" destOrd="0" presId="urn:microsoft.com/office/officeart/2005/8/layout/default"/>
-    <dgm:cxn modelId="{73EFF267-31AC-4F60-A0BB-8934CD56521C}" type="presParOf" srcId="{1D78F77A-18C0-49F4-8E7C-E701F43BD2BC}" destId="{2F492441-6256-40B1-AFDA-EF4084A03181}" srcOrd="7" destOrd="0" presId="urn:microsoft.com/office/officeart/2005/8/layout/default"/>
-    <dgm:cxn modelId="{6839F371-E6C6-4342-BB1E-665BDF49A710}" type="presParOf" srcId="{1D78F77A-18C0-49F4-8E7C-E701F43BD2BC}" destId="{1AB37B74-DC70-4345-B1CA-0B9E4F4D0BB0}" srcOrd="8" destOrd="0" presId="urn:microsoft.com/office/officeart/2005/8/layout/default"/>
-  </dgm:cxnLst>
-  <dgm:bg/>
-  <dgm:whole/>
-  <dgm:extLst>
-    <a:ext uri="http://schemas.microsoft.com/office/drawing/2008/diagram">
-      <dsp:dataModelExt xmlns:dsp="http://schemas.microsoft.com/office/drawing/2008/diagram" relId="rId7" minVer="http://schemas.openxmlformats.org/drawingml/2006/diagram"/>
-    </a:ext>
-  </dgm:extLst>
-</dgm:dataModel>
-</file>
-
-<file path=ppt/diagrams/data3.xml><?xml version="1.0" encoding="utf-8"?>
-<dgm:dataModel xmlns:dgm="http://schemas.openxmlformats.org/drawingml/2006/diagram" xmlns:a="http://schemas.openxmlformats.org/drawingml/2006/main">
-  <dgm:ptLst>
-    <dgm:pt modelId="{8403E9A1-4D82-4EE8-8AA1-00F957F4D98A}" type="doc">
-      <dgm:prSet loTypeId="urn:microsoft.com/office/officeart/2005/8/layout/vList5" loCatId="list" qsTypeId="urn:microsoft.com/office/officeart/2005/8/quickstyle/simple1" qsCatId="simple" csTypeId="urn:microsoft.com/office/officeart/2005/8/colors/colorful2" csCatId="colorful" phldr="1"/>
-      <dgm:spPr/>
-      <dgm:t>
-        <a:bodyPr/>
-        <a:lstStyle/>
-        <a:p>
-          <a:endParaRPr lang="en-US"/>
-        </a:p>
-      </dgm:t>
-    </dgm:pt>
-    <dgm:pt modelId="{378B77F5-F5EC-459F-B171-C3634E84934C}">
-      <dgm:prSet/>
-      <dgm:spPr>
-        <a:solidFill>
-          <a:srgbClr val="00B050"/>
-        </a:solidFill>
-      </dgm:spPr>
-      <dgm:t>
-        <a:bodyPr/>
-        <a:lstStyle/>
-        <a:p>
-          <a:pPr>
-            <a:defRPr cap="all"/>
-          </a:pPr>
-          <a:r>
-            <a:rPr lang="en-GB" dirty="0">
-              <a:solidFill>
-                <a:schemeClr val="tx1"/>
-              </a:solidFill>
-            </a:rPr>
-            <a:t>Locked-in </a:t>
-          </a:r>
-          <a:endParaRPr lang="en-US" dirty="0">
-            <a:solidFill>
-              <a:schemeClr val="tx1"/>
-            </a:solidFill>
-          </a:endParaRPr>
-        </a:p>
-      </dgm:t>
-    </dgm:pt>
-    <dgm:pt modelId="{7EC340BA-2C3B-4BB5-AECB-A881DBAED326}" type="parTrans" cxnId="{CD2098B5-B86E-4066-A69B-22E3728BC557}">
-      <dgm:prSet/>
-      <dgm:spPr/>
-      <dgm:t>
-        <a:bodyPr/>
-        <a:lstStyle/>
-        <a:p>
-          <a:endParaRPr lang="en-US"/>
-        </a:p>
-      </dgm:t>
-    </dgm:pt>
-    <dgm:pt modelId="{CA2A20A0-6B5F-425C-AB84-06FFB5DAC7EF}" type="sibTrans" cxnId="{CD2098B5-B86E-4066-A69B-22E3728BC557}">
-      <dgm:prSet/>
-      <dgm:spPr/>
-      <dgm:t>
-        <a:bodyPr/>
-        <a:lstStyle/>
-        <a:p>
-          <a:endParaRPr lang="en-US"/>
-        </a:p>
-      </dgm:t>
-    </dgm:pt>
-    <dgm:pt modelId="{CB5A30C6-1B99-4DC2-A571-A2B060AC3E75}">
-      <dgm:prSet/>
-      <dgm:spPr>
-        <a:solidFill>
-          <a:srgbClr val="FFFF00"/>
-        </a:solidFill>
-      </dgm:spPr>
-      <dgm:t>
-        <a:bodyPr/>
-        <a:lstStyle/>
-        <a:p>
-          <a:pPr>
-            <a:defRPr cap="all"/>
-          </a:pPr>
-          <a:r>
-            <a:rPr lang="en-GB" dirty="0">
-              <a:solidFill>
-                <a:schemeClr val="tx1"/>
-              </a:solidFill>
-            </a:rPr>
-            <a:t>Distracted</a:t>
-          </a:r>
-          <a:r>
-            <a:rPr lang="en-GB" dirty="0"/>
-            <a:t> </a:t>
-          </a:r>
-          <a:endParaRPr lang="en-US" dirty="0"/>
-        </a:p>
-      </dgm:t>
-    </dgm:pt>
-    <dgm:pt modelId="{67B25526-A828-430C-B8B8-AC94019630EA}" type="parTrans" cxnId="{EA278CBC-E70F-4CF2-BA2C-45C4CC536958}">
-      <dgm:prSet/>
-      <dgm:spPr/>
-      <dgm:t>
-        <a:bodyPr/>
-        <a:lstStyle/>
-        <a:p>
-          <a:endParaRPr lang="en-US"/>
-        </a:p>
-      </dgm:t>
-    </dgm:pt>
-    <dgm:pt modelId="{EDD6A47D-B245-49E3-92FE-0408D27DCA80}" type="sibTrans" cxnId="{EA278CBC-E70F-4CF2-BA2C-45C4CC536958}">
-      <dgm:prSet/>
-      <dgm:spPr/>
-      <dgm:t>
-        <a:bodyPr/>
-        <a:lstStyle/>
-        <a:p>
-          <a:endParaRPr lang="en-US"/>
-        </a:p>
-      </dgm:t>
-    </dgm:pt>
-    <dgm:pt modelId="{AA61EB64-4EB9-4629-87FA-298DF4F88EA1}">
-      <dgm:prSet/>
-      <dgm:spPr>
-        <a:solidFill>
-          <a:srgbClr val="FF0000"/>
-        </a:solidFill>
-      </dgm:spPr>
-      <dgm:t>
-        <a:bodyPr/>
-        <a:lstStyle/>
-        <a:p>
-          <a:pPr>
-            <a:defRPr cap="all"/>
-          </a:pPr>
-          <a:r>
-            <a:rPr lang="en-GB" dirty="0">
-              <a:solidFill>
-                <a:schemeClr val="tx1"/>
-              </a:solidFill>
-            </a:rPr>
-            <a:t>Distracted for more than a certain amount of time (5 mins for example)</a:t>
-          </a:r>
-          <a:endParaRPr lang="en-US" dirty="0">
-            <a:solidFill>
-              <a:schemeClr val="tx1"/>
-            </a:solidFill>
-          </a:endParaRPr>
-        </a:p>
-      </dgm:t>
-    </dgm:pt>
-    <dgm:pt modelId="{331055EE-1102-4325-84F1-570C6EF754DF}" type="parTrans" cxnId="{CE7B00E0-BBFB-46E3-89A2-30E922B9C0C9}">
-      <dgm:prSet/>
-      <dgm:spPr/>
-      <dgm:t>
-        <a:bodyPr/>
-        <a:lstStyle/>
-        <a:p>
-          <a:endParaRPr lang="en-US"/>
-        </a:p>
-      </dgm:t>
-    </dgm:pt>
-    <dgm:pt modelId="{D034638D-E6E9-4E1B-BED6-F7A9571E518B}" type="sibTrans" cxnId="{CE7B00E0-BBFB-46E3-89A2-30E922B9C0C9}">
-      <dgm:prSet/>
-      <dgm:spPr/>
-      <dgm:t>
-        <a:bodyPr/>
-        <a:lstStyle/>
-        <a:p>
-          <a:endParaRPr lang="en-US"/>
-        </a:p>
-      </dgm:t>
-    </dgm:pt>
-    <dgm:pt modelId="{075CAA9B-88FD-4409-9AFA-E3F66A3E9524}" type="pres">
-      <dgm:prSet presAssocID="{8403E9A1-4D82-4EE8-8AA1-00F957F4D98A}" presName="Name0" presStyleCnt="0">
-        <dgm:presLayoutVars>
-          <dgm:dir/>
-          <dgm:animLvl val="lvl"/>
-          <dgm:resizeHandles val="exact"/>
-        </dgm:presLayoutVars>
-      </dgm:prSet>
-      <dgm:spPr/>
-    </dgm:pt>
-    <dgm:pt modelId="{6D96EC5E-FBE4-4375-A15A-0374509611ED}" type="pres">
-      <dgm:prSet presAssocID="{378B77F5-F5EC-459F-B171-C3634E84934C}" presName="linNode" presStyleCnt="0"/>
-      <dgm:spPr/>
-    </dgm:pt>
-    <dgm:pt modelId="{535BEED7-3AF2-4E61-AB66-DA5676B09A5B}" type="pres">
-      <dgm:prSet presAssocID="{378B77F5-F5EC-459F-B171-C3634E84934C}" presName="parentText" presStyleLbl="node1" presStyleIdx="0" presStyleCnt="3" custLinFactNeighborY="-604">
-        <dgm:presLayoutVars>
-          <dgm:chMax val="1"/>
-          <dgm:bulletEnabled val="1"/>
-        </dgm:presLayoutVars>
-      </dgm:prSet>
-      <dgm:spPr/>
-    </dgm:pt>
-    <dgm:pt modelId="{3AB45372-71BE-4EB1-98DF-8F2EBDF5D52B}" type="pres">
-      <dgm:prSet presAssocID="{CA2A20A0-6B5F-425C-AB84-06FFB5DAC7EF}" presName="sp" presStyleCnt="0"/>
-      <dgm:spPr/>
-    </dgm:pt>
-    <dgm:pt modelId="{81F6C56F-00C6-4D03-9A93-242AA791C689}" type="pres">
-      <dgm:prSet presAssocID="{CB5A30C6-1B99-4DC2-A571-A2B060AC3E75}" presName="linNode" presStyleCnt="0"/>
-      <dgm:spPr/>
-    </dgm:pt>
-    <dgm:pt modelId="{C90B2C43-E0D4-40F8-924E-A75537EE8201}" type="pres">
-      <dgm:prSet presAssocID="{CB5A30C6-1B99-4DC2-A571-A2B060AC3E75}" presName="parentText" presStyleLbl="node1" presStyleIdx="1" presStyleCnt="3">
-        <dgm:presLayoutVars>
-          <dgm:chMax val="1"/>
-          <dgm:bulletEnabled val="1"/>
-        </dgm:presLayoutVars>
-      </dgm:prSet>
-      <dgm:spPr/>
-    </dgm:pt>
-    <dgm:pt modelId="{D08E34C3-7A12-4282-9E48-322FC7B3B147}" type="pres">
-      <dgm:prSet presAssocID="{EDD6A47D-B245-49E3-92FE-0408D27DCA80}" presName="sp" presStyleCnt="0"/>
-      <dgm:spPr/>
-    </dgm:pt>
-    <dgm:pt modelId="{7F8EA1A2-AF21-46E8-97ED-E01F3E676CC0}" type="pres">
-      <dgm:prSet presAssocID="{AA61EB64-4EB9-4629-87FA-298DF4F88EA1}" presName="linNode" presStyleCnt="0"/>
-      <dgm:spPr/>
-    </dgm:pt>
-    <dgm:pt modelId="{E25260D8-B08F-4C03-9797-0BE27723D1D0}" type="pres">
-      <dgm:prSet presAssocID="{AA61EB64-4EB9-4629-87FA-298DF4F88EA1}" presName="parentText" presStyleLbl="node1" presStyleIdx="2" presStyleCnt="3">
-        <dgm:presLayoutVars>
-          <dgm:chMax val="1"/>
-          <dgm:bulletEnabled val="1"/>
-        </dgm:presLayoutVars>
-      </dgm:prSet>
-      <dgm:spPr/>
-    </dgm:pt>
-  </dgm:ptLst>
-  <dgm:cxnLst>
-    <dgm:cxn modelId="{9D7DF03F-BC79-49F7-903D-19AA914BA1F5}" type="presOf" srcId="{8403E9A1-4D82-4EE8-8AA1-00F957F4D98A}" destId="{075CAA9B-88FD-4409-9AFA-E3F66A3E9524}" srcOrd="0" destOrd="0" presId="urn:microsoft.com/office/officeart/2005/8/layout/vList5"/>
-    <dgm:cxn modelId="{FA001A99-A44E-4F6C-AB31-9B2802990B24}" type="presOf" srcId="{AA61EB64-4EB9-4629-87FA-298DF4F88EA1}" destId="{E25260D8-B08F-4C03-9797-0BE27723D1D0}" srcOrd="0" destOrd="0" presId="urn:microsoft.com/office/officeart/2005/8/layout/vList5"/>
-    <dgm:cxn modelId="{CD2098B5-B86E-4066-A69B-22E3728BC557}" srcId="{8403E9A1-4D82-4EE8-8AA1-00F957F4D98A}" destId="{378B77F5-F5EC-459F-B171-C3634E84934C}" srcOrd="0" destOrd="0" parTransId="{7EC340BA-2C3B-4BB5-AECB-A881DBAED326}" sibTransId="{CA2A20A0-6B5F-425C-AB84-06FFB5DAC7EF}"/>
-    <dgm:cxn modelId="{EA278CBC-E70F-4CF2-BA2C-45C4CC536958}" srcId="{8403E9A1-4D82-4EE8-8AA1-00F957F4D98A}" destId="{CB5A30C6-1B99-4DC2-A571-A2B060AC3E75}" srcOrd="1" destOrd="0" parTransId="{67B25526-A828-430C-B8B8-AC94019630EA}" sibTransId="{EDD6A47D-B245-49E3-92FE-0408D27DCA80}"/>
-    <dgm:cxn modelId="{CE7B00E0-BBFB-46E3-89A2-30E922B9C0C9}" srcId="{8403E9A1-4D82-4EE8-8AA1-00F957F4D98A}" destId="{AA61EB64-4EB9-4629-87FA-298DF4F88EA1}" srcOrd="2" destOrd="0" parTransId="{331055EE-1102-4325-84F1-570C6EF754DF}" sibTransId="{D034638D-E6E9-4E1B-BED6-F7A9571E518B}"/>
-    <dgm:cxn modelId="{62AA47EB-41DE-4FAB-89B9-E3F0BA67F5A2}" type="presOf" srcId="{CB5A30C6-1B99-4DC2-A571-A2B060AC3E75}" destId="{C90B2C43-E0D4-40F8-924E-A75537EE8201}" srcOrd="0" destOrd="0" presId="urn:microsoft.com/office/officeart/2005/8/layout/vList5"/>
-    <dgm:cxn modelId="{6CAAB0FA-FC12-4955-AC6D-1BD493B13520}" type="presOf" srcId="{378B77F5-F5EC-459F-B171-C3634E84934C}" destId="{535BEED7-3AF2-4E61-AB66-DA5676B09A5B}" srcOrd="0" destOrd="0" presId="urn:microsoft.com/office/officeart/2005/8/layout/vList5"/>
-    <dgm:cxn modelId="{E45FD6FB-D78F-425B-96C1-7079A8F53183}" type="presParOf" srcId="{075CAA9B-88FD-4409-9AFA-E3F66A3E9524}" destId="{6D96EC5E-FBE4-4375-A15A-0374509611ED}" srcOrd="0" destOrd="0" presId="urn:microsoft.com/office/officeart/2005/8/layout/vList5"/>
-    <dgm:cxn modelId="{BA36050C-F79D-47A7-BE3C-E56F6157C42A}" type="presParOf" srcId="{6D96EC5E-FBE4-4375-A15A-0374509611ED}" destId="{535BEED7-3AF2-4E61-AB66-DA5676B09A5B}" srcOrd="0" destOrd="0" presId="urn:microsoft.com/office/officeart/2005/8/layout/vList5"/>
-    <dgm:cxn modelId="{F4187827-2746-44FF-9DF4-C5100533902A}" type="presParOf" srcId="{075CAA9B-88FD-4409-9AFA-E3F66A3E9524}" destId="{3AB45372-71BE-4EB1-98DF-8F2EBDF5D52B}" srcOrd="1" destOrd="0" presId="urn:microsoft.com/office/officeart/2005/8/layout/vList5"/>
-    <dgm:cxn modelId="{6988572C-CD50-411F-A819-44192BE6F332}" type="presParOf" srcId="{075CAA9B-88FD-4409-9AFA-E3F66A3E9524}" destId="{81F6C56F-00C6-4D03-9A93-242AA791C689}" srcOrd="2" destOrd="0" presId="urn:microsoft.com/office/officeart/2005/8/layout/vList5"/>
-    <dgm:cxn modelId="{72B4BD85-9FD7-4B88-BF5B-A6C9683CECBC}" type="presParOf" srcId="{81F6C56F-00C6-4D03-9A93-242AA791C689}" destId="{C90B2C43-E0D4-40F8-924E-A75537EE8201}" srcOrd="0" destOrd="0" presId="urn:microsoft.com/office/officeart/2005/8/layout/vList5"/>
-    <dgm:cxn modelId="{1495C991-3FE4-412C-B95D-4A5428306119}" type="presParOf" srcId="{075CAA9B-88FD-4409-9AFA-E3F66A3E9524}" destId="{D08E34C3-7A12-4282-9E48-322FC7B3B147}" srcOrd="3" destOrd="0" presId="urn:microsoft.com/office/officeart/2005/8/layout/vList5"/>
-    <dgm:cxn modelId="{EF8138ED-009B-4D23-BBC3-790CCC72DA7B}" type="presParOf" srcId="{075CAA9B-88FD-4409-9AFA-E3F66A3E9524}" destId="{7F8EA1A2-AF21-46E8-97ED-E01F3E676CC0}" srcOrd="4" destOrd="0" presId="urn:microsoft.com/office/officeart/2005/8/layout/vList5"/>
-    <dgm:cxn modelId="{B3A2B211-EC27-46FD-8468-9C0E6D7F79EE}" type="presParOf" srcId="{7F8EA1A2-AF21-46E8-97ED-E01F3E676CC0}" destId="{E25260D8-B08F-4C03-9797-0BE27723D1D0}" srcOrd="0" destOrd="0" presId="urn:microsoft.com/office/officeart/2005/8/layout/vList5"/>
   </dgm:cxnLst>
   <dgm:bg/>
   <dgm:whole/>
@@ -3630,7 +2970,7 @@
         </a:bodyPr>
         <a:lstStyle/>
         <a:p>
-          <a:pPr marL="0" lvl="0" indent="0" algn="l" defTabSz="889000">
+          <a:pPr marL="0" lvl="0" indent="0" algn="l" defTabSz="1422400">
             <a:lnSpc>
               <a:spcPct val="90000"/>
             </a:lnSpc>
@@ -3643,10 +2983,14 @@
             <a:buNone/>
           </a:pPr>
           <a:r>
-            <a:rPr lang="en-GB" sz="2000" kern="1200" dirty="0"/>
-            <a:t>Device that is attached to the back of your phone, using MagSafe (ideally)</a:t>
+            <a:rPr lang="en-GB" sz="3200" kern="1200"/>
+            <a:t>MagSafe</a:t>
           </a:r>
-          <a:endParaRPr lang="en-US" sz="2000" kern="1200" dirty="0"/>
+          <a:r>
+            <a:rPr lang="en-GB" sz="2000" kern="1200"/>
+            <a:t> </a:t>
+          </a:r>
+          <a:endParaRPr lang="en-US" sz="2000" kern="1200"/>
         </a:p>
       </dsp:txBody>
       <dsp:txXfrm>
@@ -3782,7 +3126,7 @@
         </a:bodyPr>
         <a:lstStyle/>
         <a:p>
-          <a:pPr marL="0" lvl="0" indent="0" algn="l" defTabSz="889000">
+          <a:pPr marL="0" lvl="0" indent="0" algn="l" defTabSz="1244600">
             <a:lnSpc>
               <a:spcPct val="90000"/>
             </a:lnSpc>
@@ -3795,8 +3139,26 @@
             <a:buNone/>
           </a:pPr>
           <a:r>
-            <a:rPr lang="en-GB" sz="2000" kern="1200"/>
-            <a:t>Has several system that detect movements of your phone directly, using sensors in the device and the camera on your laptop.</a:t>
+            <a:rPr lang="en-GB" sz="2800" kern="1200"/>
+            <a:t>Movements of phone </a:t>
+          </a:r>
+        </a:p>
+        <a:p>
+          <a:pPr marL="0" lvl="0" indent="0" algn="l" defTabSz="1244600">
+            <a:lnSpc>
+              <a:spcPct val="90000"/>
+            </a:lnSpc>
+            <a:spcBef>
+              <a:spcPct val="0"/>
+            </a:spcBef>
+            <a:spcAft>
+              <a:spcPct val="35000"/>
+            </a:spcAft>
+            <a:buNone/>
+          </a:pPr>
+          <a:r>
+            <a:rPr lang="en-GB" sz="2800" kern="1200"/>
+            <a:t>AI analyse laptop cam.</a:t>
           </a:r>
           <a:endParaRPr lang="en-US" sz="2000" kern="1200"/>
         </a:p>
@@ -3934,7 +3296,7 @@
         </a:bodyPr>
         <a:lstStyle/>
         <a:p>
-          <a:pPr marL="0" lvl="0" indent="0" algn="l" defTabSz="889000">
+          <a:pPr marL="0" lvl="0" indent="0" algn="l" defTabSz="1111250">
             <a:lnSpc>
               <a:spcPct val="90000"/>
             </a:lnSpc>
@@ -3947,10 +3309,10 @@
             <a:buNone/>
           </a:pPr>
           <a:r>
-            <a:rPr lang="en-GB" sz="2000" kern="1200" dirty="0"/>
-            <a:t>If you are on your laptop initially doing your work and you decide to utilise your phone, the device and the system will detect these movements and record it. There would be different outputs, as described in the next couple slides.</a:t>
+            <a:rPr lang="en-GB" sz="2500" kern="1200"/>
+            <a:t>RESPONSE</a:t>
           </a:r>
-          <a:endParaRPr lang="en-US" sz="2000" kern="1200" dirty="0"/>
+          <a:endParaRPr lang="en-US" sz="2500" kern="1200"/>
         </a:p>
       </dsp:txBody>
       <dsp:txXfrm>
@@ -3977,8 +3339,8 @@
       </dsp:nvSpPr>
       <dsp:spPr>
         <a:xfrm>
-          <a:off x="0" y="230849"/>
-          <a:ext cx="3574520" cy="2144712"/>
+          <a:off x="0" y="523210"/>
+          <a:ext cx="3669188" cy="2201512"/>
         </a:xfrm>
         <a:prstGeom prst="rect">
           <a:avLst/>
@@ -3988,6 +3350,85 @@
             <a:hueOff val="0"/>
             <a:satOff val="0"/>
             <a:lumOff val="0"/>
+            <a:alphaOff val="0"/>
+          </a:schemeClr>
+        </a:solidFill>
+        <a:ln w="25400" cap="flat" cmpd="sng" algn="ctr">
+          <a:solidFill>
+            <a:schemeClr val="lt1">
+              <a:hueOff val="0"/>
+              <a:satOff val="0"/>
+              <a:lumOff val="0"/>
+              <a:alphaOff val="0"/>
+            </a:schemeClr>
+          </a:solidFill>
+          <a:prstDash val="solid"/>
+          <a:miter lim="800000"/>
+        </a:ln>
+        <a:effectLst/>
+      </dsp:spPr>
+      <dsp:style>
+        <a:lnRef idx="3">
+          <a:scrgbClr r="0" g="0" b="0"/>
+        </a:lnRef>
+        <a:fillRef idx="1">
+          <a:scrgbClr r="0" g="0" b="0"/>
+        </a:fillRef>
+        <a:effectRef idx="1">
+          <a:scrgbClr r="0" g="0" b="0"/>
+        </a:effectRef>
+        <a:fontRef idx="minor">
+          <a:schemeClr val="lt1"/>
+        </a:fontRef>
+      </dsp:style>
+      <dsp:txBody>
+        <a:bodyPr spcFirstLastPara="0" vert="horz" wrap="square" lIns="121920" tIns="121920" rIns="121920" bIns="121920" numCol="1" spcCol="1270" anchor="ctr" anchorCtr="0">
+          <a:noAutofit/>
+        </a:bodyPr>
+        <a:lstStyle/>
+        <a:p>
+          <a:pPr marL="0" lvl="0" indent="0" algn="ctr" defTabSz="1422400">
+            <a:lnSpc>
+              <a:spcPct val="90000"/>
+            </a:lnSpc>
+            <a:spcBef>
+              <a:spcPct val="0"/>
+            </a:spcBef>
+            <a:spcAft>
+              <a:spcPct val="35000"/>
+            </a:spcAft>
+            <a:buNone/>
+          </a:pPr>
+          <a:r>
+            <a:rPr lang="en-GB" sz="3200" kern="1200"/>
+            <a:t>Ultrasonic sensor in the device</a:t>
+          </a:r>
+          <a:endParaRPr lang="en-US" sz="3200" kern="1200"/>
+        </a:p>
+      </dsp:txBody>
+      <dsp:txXfrm>
+        <a:off x="0" y="523210"/>
+        <a:ext cx="3669188" cy="2201512"/>
+      </dsp:txXfrm>
+    </dsp:sp>
+    <dsp:sp modelId="{7E5AE839-E617-4A6B-B769-91EFD64551A0}">
+      <dsp:nvSpPr>
+        <dsp:cNvPr id="0" name=""/>
+        <dsp:cNvSpPr/>
+      </dsp:nvSpPr>
+      <dsp:spPr>
+        <a:xfrm>
+          <a:off x="3991513" y="523210"/>
+          <a:ext cx="3669188" cy="2201512"/>
+        </a:xfrm>
+        <a:prstGeom prst="rect">
+          <a:avLst/>
+        </a:prstGeom>
+        <a:solidFill>
+          <a:schemeClr val="accent2">
+            <a:hueOff val="2147871"/>
+            <a:satOff val="-6164"/>
+            <a:lumOff val="-9870"/>
             <a:alphaOff val="0"/>
           </a:schemeClr>
         </a:solidFill>
@@ -4038,94 +3479,15 @@
             <a:buNone/>
           </a:pPr>
           <a:r>
-            <a:rPr lang="en-GB" sz="2800" kern="1200" dirty="0"/>
-            <a:t>Detects if phone is on table using  ultrasonic sensor in the device</a:t>
+            <a:rPr lang="en-GB" sz="2800" kern="1200"/>
+            <a:t>INCLINATION on phone streams to MATLAB app</a:t>
           </a:r>
-          <a:endParaRPr lang="en-US" sz="2800" kern="1200" dirty="0"/>
+          <a:endParaRPr lang="en-US" sz="2800" kern="1200"/>
         </a:p>
       </dsp:txBody>
       <dsp:txXfrm>
-        <a:off x="0" y="230849"/>
-        <a:ext cx="3574520" cy="2144712"/>
-      </dsp:txXfrm>
-    </dsp:sp>
-    <dsp:sp modelId="{7E5AE839-E617-4A6B-B769-91EFD64551A0}">
-      <dsp:nvSpPr>
-        <dsp:cNvPr id="0" name=""/>
-        <dsp:cNvSpPr/>
-      </dsp:nvSpPr>
-      <dsp:spPr>
-        <a:xfrm>
-          <a:off x="3931973" y="230849"/>
-          <a:ext cx="3574520" cy="2144712"/>
-        </a:xfrm>
-        <a:prstGeom prst="rect">
-          <a:avLst/>
-        </a:prstGeom>
-        <a:solidFill>
-          <a:schemeClr val="accent2">
-            <a:hueOff val="1610903"/>
-            <a:satOff val="-4623"/>
-            <a:lumOff val="-7402"/>
-            <a:alphaOff val="0"/>
-          </a:schemeClr>
-        </a:solidFill>
-        <a:ln w="25400" cap="flat" cmpd="sng" algn="ctr">
-          <a:solidFill>
-            <a:schemeClr val="lt1">
-              <a:hueOff val="0"/>
-              <a:satOff val="0"/>
-              <a:lumOff val="0"/>
-              <a:alphaOff val="0"/>
-            </a:schemeClr>
-          </a:solidFill>
-          <a:prstDash val="solid"/>
-          <a:miter lim="800000"/>
-        </a:ln>
-        <a:effectLst/>
-      </dsp:spPr>
-      <dsp:style>
-        <a:lnRef idx="3">
-          <a:scrgbClr r="0" g="0" b="0"/>
-        </a:lnRef>
-        <a:fillRef idx="1">
-          <a:scrgbClr r="0" g="0" b="0"/>
-        </a:fillRef>
-        <a:effectRef idx="1">
-          <a:scrgbClr r="0" g="0" b="0"/>
-        </a:effectRef>
-        <a:fontRef idx="minor">
-          <a:schemeClr val="lt1"/>
-        </a:fontRef>
-      </dsp:style>
-      <dsp:txBody>
-        <a:bodyPr spcFirstLastPara="0" vert="horz" wrap="square" lIns="76200" tIns="76200" rIns="76200" bIns="76200" numCol="1" spcCol="1270" anchor="ctr" anchorCtr="0">
-          <a:noAutofit/>
-        </a:bodyPr>
-        <a:lstStyle/>
-        <a:p>
-          <a:pPr marL="0" lvl="0" indent="0" algn="ctr" defTabSz="889000">
-            <a:lnSpc>
-              <a:spcPct val="90000"/>
-            </a:lnSpc>
-            <a:spcBef>
-              <a:spcPct val="0"/>
-            </a:spcBef>
-            <a:spcAft>
-              <a:spcPct val="35000"/>
-            </a:spcAft>
-            <a:buNone/>
-          </a:pPr>
-          <a:r>
-            <a:rPr lang="en-GB" sz="2000" kern="1200" dirty="0"/>
-            <a:t>Detects if phone is in the user’s hand if it is in the frame of the camera on laptop with a YOLO phone and person detection system using a one pass neural network </a:t>
-          </a:r>
-          <a:endParaRPr lang="en-US" sz="2000" kern="1200" dirty="0"/>
-        </a:p>
-      </dsp:txBody>
-      <dsp:txXfrm>
-        <a:off x="3931973" y="230849"/>
-        <a:ext cx="3574520" cy="2144712"/>
+        <a:off x="3991513" y="523210"/>
+        <a:ext cx="3669188" cy="2201512"/>
       </dsp:txXfrm>
     </dsp:sp>
     <dsp:sp modelId="{A6ED68CC-4D39-4E4D-82B9-8D708B1E3512}">
@@ -4135,17 +3497,17 @@
       </dsp:nvSpPr>
       <dsp:spPr>
         <a:xfrm>
-          <a:off x="7863946" y="354170"/>
-          <a:ext cx="3574520" cy="2144712"/>
+          <a:off x="46475" y="3789610"/>
+          <a:ext cx="3669188" cy="2201512"/>
         </a:xfrm>
         <a:prstGeom prst="rect">
           <a:avLst/>
         </a:prstGeom>
         <a:solidFill>
           <a:schemeClr val="accent2">
-            <a:hueOff val="3221807"/>
-            <a:satOff val="-9246"/>
-            <a:lumOff val="-14805"/>
+            <a:hueOff val="4295743"/>
+            <a:satOff val="-12329"/>
+            <a:lumOff val="-19739"/>
             <a:alphaOff val="0"/>
           </a:schemeClr>
         </a:solidFill>
@@ -4196,15 +3558,15 @@
             <a:buNone/>
           </a:pPr>
           <a:r>
-            <a:rPr lang="en-GB" sz="2400" kern="1200" dirty="0"/>
-            <a:t>Detection of inclination on phone using gyroscope sensor on MATLAB app</a:t>
+            <a:rPr lang="en-GB" sz="2400" kern="1200"/>
+            <a:t>PRESENTS OF PHONE - YOLO one pass neural network </a:t>
           </a:r>
-          <a:endParaRPr lang="en-US" sz="2400" kern="1200" dirty="0"/>
+          <a:endParaRPr lang="en-US" sz="2400" kern="1200"/>
         </a:p>
       </dsp:txBody>
       <dsp:txXfrm>
-        <a:off x="7863946" y="354170"/>
-        <a:ext cx="3574520" cy="2144712"/>
+        <a:off x="46475" y="3789610"/>
+        <a:ext cx="3669188" cy="2201512"/>
       </dsp:txXfrm>
     </dsp:sp>
     <dsp:sp modelId="{FD8EFCE9-2EFF-4A46-97BD-D68334D8D1A6}">
@@ -4214,94 +3576,8 @@
       </dsp:nvSpPr>
       <dsp:spPr>
         <a:xfrm>
-          <a:off x="1956764" y="2733014"/>
-          <a:ext cx="3574520" cy="2144712"/>
-        </a:xfrm>
-        <a:prstGeom prst="rect">
-          <a:avLst/>
-        </a:prstGeom>
-        <a:solidFill>
-          <a:schemeClr val="accent2">
-            <a:hueOff val="4832710"/>
-            <a:satOff val="-13870"/>
-            <a:lumOff val="-22207"/>
-            <a:alphaOff val="0"/>
-          </a:schemeClr>
-        </a:solidFill>
-        <a:ln w="25400" cap="flat" cmpd="sng" algn="ctr">
-          <a:solidFill>
-            <a:schemeClr val="lt1">
-              <a:hueOff val="0"/>
-              <a:satOff val="0"/>
-              <a:lumOff val="0"/>
-              <a:alphaOff val="0"/>
-            </a:schemeClr>
-          </a:solidFill>
-          <a:prstDash val="solid"/>
-          <a:miter lim="800000"/>
-        </a:ln>
-        <a:effectLst/>
-      </dsp:spPr>
-      <dsp:style>
-        <a:lnRef idx="3">
-          <a:scrgbClr r="0" g="0" b="0"/>
-        </a:lnRef>
-        <a:fillRef idx="1">
-          <a:scrgbClr r="0" g="0" b="0"/>
-        </a:fillRef>
-        <a:effectRef idx="1">
-          <a:scrgbClr r="0" g="0" b="0"/>
-        </a:effectRef>
-        <a:fontRef idx="minor">
-          <a:schemeClr val="lt1"/>
-        </a:fontRef>
-      </dsp:style>
-      <dsp:txBody>
-        <a:bodyPr spcFirstLastPara="0" vert="horz" wrap="square" lIns="83820" tIns="83820" rIns="83820" bIns="83820" numCol="1" spcCol="1270" anchor="ctr" anchorCtr="0">
-          <a:noAutofit/>
-        </a:bodyPr>
-        <a:lstStyle/>
-        <a:p>
-          <a:pPr marL="0" lvl="0" indent="0" algn="ctr" defTabSz="977900">
-            <a:lnSpc>
-              <a:spcPct val="90000"/>
-            </a:lnSpc>
-            <a:spcBef>
-              <a:spcPct val="0"/>
-            </a:spcBef>
-            <a:spcAft>
-              <a:spcPct val="35000"/>
-            </a:spcAft>
-            <a:buNone/>
-          </a:pPr>
-          <a:r>
-            <a:rPr lang="en-US" sz="2200" kern="1200" dirty="0"/>
-            <a:t>Uses </a:t>
-          </a:r>
-          <a:r>
-            <a:rPr lang="en-US" sz="2200" kern="1200" dirty="0" err="1"/>
-            <a:t>mediapipe</a:t>
-          </a:r>
-          <a:r>
-            <a:rPr lang="en-US" sz="2200" kern="1200" dirty="0"/>
-            <a:t> (a head and eye tracker) using a neutral network on certain points on the face, like chin, eyes, nose and more to see where someone is looking</a:t>
-          </a:r>
-        </a:p>
-      </dsp:txBody>
-      <dsp:txXfrm>
-        <a:off x="1956764" y="2733014"/>
-        <a:ext cx="3574520" cy="2144712"/>
-      </dsp:txXfrm>
-    </dsp:sp>
-    <dsp:sp modelId="{1AB37B74-DC70-4345-B1CA-0B9E4F4D0BB0}">
-      <dsp:nvSpPr>
-        <dsp:cNvPr id="0" name=""/>
-        <dsp:cNvSpPr/>
-      </dsp:nvSpPr>
-      <dsp:spPr>
-        <a:xfrm>
-          <a:off x="5897959" y="2733014"/>
-          <a:ext cx="3574520" cy="2144712"/>
+          <a:off x="3991513" y="3723630"/>
+          <a:ext cx="3669188" cy="2201512"/>
         </a:xfrm>
         <a:prstGeom prst="rect">
           <a:avLst/>
@@ -4343,12 +3619,12 @@
         </a:fontRef>
       </dsp:style>
       <dsp:txBody>
-        <a:bodyPr spcFirstLastPara="0" vert="horz" wrap="square" lIns="83820" tIns="83820" rIns="83820" bIns="83820" numCol="1" spcCol="1270" anchor="ctr" anchorCtr="0">
+        <a:bodyPr spcFirstLastPara="0" vert="horz" wrap="square" lIns="114300" tIns="114300" rIns="114300" bIns="114300" numCol="1" spcCol="1270" anchor="ctr" anchorCtr="0">
           <a:noAutofit/>
         </a:bodyPr>
         <a:lstStyle/>
         <a:p>
-          <a:pPr marL="0" lvl="0" indent="0" algn="ctr" defTabSz="977900">
+          <a:pPr marL="0" lvl="0" indent="0" algn="ctr" defTabSz="1333500">
             <a:lnSpc>
               <a:spcPct val="90000"/>
             </a:lnSpc>
@@ -4361,275 +3637,22 @@
             <a:buNone/>
           </a:pPr>
           <a:r>
-            <a:rPr lang="en-GB" sz="2200" kern="1200" dirty="0"/>
-            <a:t>There are 3 states the system has, as described on the next slide.</a:t>
+            <a:rPr lang="en-US" sz="3000" kern="1200"/>
+            <a:t>head and eye tracker -</a:t>
+          </a:r>
+          <a:r>
+            <a:rPr lang="en-US" sz="3000" kern="1200" err="1"/>
+            <a:t>MediaPipe</a:t>
+          </a:r>
+          <a:r>
+            <a:rPr lang="en-US" sz="3000" kern="1200"/>
+            <a:t> (neutral network on certain points on the face)</a:t>
           </a:r>
         </a:p>
       </dsp:txBody>
       <dsp:txXfrm>
-        <a:off x="5897959" y="2733014"/>
-        <a:ext cx="3574520" cy="2144712"/>
-      </dsp:txXfrm>
-    </dsp:sp>
-  </dsp:spTree>
-</dsp:drawing>
-</file>
-
-<file path=ppt/diagrams/drawing3.xml><?xml version="1.0" encoding="utf-8"?>
-<dsp:drawing xmlns:dgm="http://schemas.openxmlformats.org/drawingml/2006/diagram" xmlns:dsp="http://schemas.microsoft.com/office/drawing/2008/diagram" xmlns:a="http://schemas.openxmlformats.org/drawingml/2006/main">
-  <dsp:spTree>
-    <dsp:nvGrpSpPr>
-      <dsp:cNvPr id="0" name=""/>
-      <dsp:cNvGrpSpPr/>
-    </dsp:nvGrpSpPr>
-    <dsp:grpSpPr/>
-    <dsp:sp modelId="{535BEED7-3AF2-4E61-AB66-DA5676B09A5B}">
-      <dsp:nvSpPr>
-        <dsp:cNvPr id="0" name=""/>
-        <dsp:cNvSpPr/>
-      </dsp:nvSpPr>
-      <dsp:spPr>
-        <a:xfrm>
-          <a:off x="3364992" y="0"/>
-          <a:ext cx="3785616" cy="1402286"/>
-        </a:xfrm>
-        <a:prstGeom prst="roundRect">
-          <a:avLst/>
-        </a:prstGeom>
-        <a:solidFill>
-          <a:srgbClr val="00B050"/>
-        </a:solidFill>
-        <a:ln w="19050" cap="flat" cmpd="sng" algn="ctr">
-          <a:solidFill>
-            <a:schemeClr val="lt1">
-              <a:hueOff val="0"/>
-              <a:satOff val="0"/>
-              <a:lumOff val="0"/>
-              <a:alphaOff val="0"/>
-            </a:schemeClr>
-          </a:solidFill>
-          <a:prstDash val="solid"/>
-          <a:miter lim="800000"/>
-        </a:ln>
-        <a:effectLst/>
-      </dsp:spPr>
-      <dsp:style>
-        <a:lnRef idx="2">
-          <a:scrgbClr r="0" g="0" b="0"/>
-        </a:lnRef>
-        <a:fillRef idx="1">
-          <a:scrgbClr r="0" g="0" b="0"/>
-        </a:fillRef>
-        <a:effectRef idx="0">
-          <a:scrgbClr r="0" g="0" b="0"/>
-        </a:effectRef>
-        <a:fontRef idx="minor">
-          <a:schemeClr val="lt1"/>
-        </a:fontRef>
-      </dsp:style>
-      <dsp:txBody>
-        <a:bodyPr spcFirstLastPara="0" vert="horz" wrap="square" lIns="80010" tIns="40005" rIns="80010" bIns="40005" numCol="1" spcCol="1270" anchor="ctr" anchorCtr="0">
-          <a:noAutofit/>
-        </a:bodyPr>
-        <a:lstStyle/>
-        <a:p>
-          <a:pPr marL="0" lvl="0" indent="0" algn="ctr" defTabSz="933450">
-            <a:lnSpc>
-              <a:spcPct val="90000"/>
-            </a:lnSpc>
-            <a:spcBef>
-              <a:spcPct val="0"/>
-            </a:spcBef>
-            <a:spcAft>
-              <a:spcPct val="35000"/>
-            </a:spcAft>
-            <a:buNone/>
-            <a:defRPr cap="all"/>
-          </a:pPr>
-          <a:r>
-            <a:rPr lang="en-GB" sz="2100" kern="1200" dirty="0">
-              <a:solidFill>
-                <a:schemeClr val="tx1"/>
-              </a:solidFill>
-            </a:rPr>
-            <a:t>Locked-in </a:t>
-          </a:r>
-          <a:endParaRPr lang="en-US" sz="2100" kern="1200" dirty="0">
-            <a:solidFill>
-              <a:schemeClr val="tx1"/>
-            </a:solidFill>
-          </a:endParaRPr>
-        </a:p>
-      </dsp:txBody>
-      <dsp:txXfrm>
-        <a:off x="3433446" y="68454"/>
-        <a:ext cx="3648708" cy="1265378"/>
-      </dsp:txXfrm>
-    </dsp:sp>
-    <dsp:sp modelId="{C90B2C43-E0D4-40F8-924E-A75537EE8201}">
-      <dsp:nvSpPr>
-        <dsp:cNvPr id="0" name=""/>
-        <dsp:cNvSpPr/>
-      </dsp:nvSpPr>
-      <dsp:spPr>
-        <a:xfrm>
-          <a:off x="3364992" y="1474525"/>
-          <a:ext cx="3785616" cy="1402286"/>
-        </a:xfrm>
-        <a:prstGeom prst="roundRect">
-          <a:avLst/>
-        </a:prstGeom>
-        <a:solidFill>
-          <a:srgbClr val="FFFF00"/>
-        </a:solidFill>
-        <a:ln w="19050" cap="flat" cmpd="sng" algn="ctr">
-          <a:solidFill>
-            <a:schemeClr val="lt1">
-              <a:hueOff val="0"/>
-              <a:satOff val="0"/>
-              <a:lumOff val="0"/>
-              <a:alphaOff val="0"/>
-            </a:schemeClr>
-          </a:solidFill>
-          <a:prstDash val="solid"/>
-          <a:miter lim="800000"/>
-        </a:ln>
-        <a:effectLst/>
-      </dsp:spPr>
-      <dsp:style>
-        <a:lnRef idx="2">
-          <a:scrgbClr r="0" g="0" b="0"/>
-        </a:lnRef>
-        <a:fillRef idx="1">
-          <a:scrgbClr r="0" g="0" b="0"/>
-        </a:fillRef>
-        <a:effectRef idx="0">
-          <a:scrgbClr r="0" g="0" b="0"/>
-        </a:effectRef>
-        <a:fontRef idx="minor">
-          <a:schemeClr val="lt1"/>
-        </a:fontRef>
-      </dsp:style>
-      <dsp:txBody>
-        <a:bodyPr spcFirstLastPara="0" vert="horz" wrap="square" lIns="80010" tIns="40005" rIns="80010" bIns="40005" numCol="1" spcCol="1270" anchor="ctr" anchorCtr="0">
-          <a:noAutofit/>
-        </a:bodyPr>
-        <a:lstStyle/>
-        <a:p>
-          <a:pPr marL="0" lvl="0" indent="0" algn="ctr" defTabSz="933450">
-            <a:lnSpc>
-              <a:spcPct val="90000"/>
-            </a:lnSpc>
-            <a:spcBef>
-              <a:spcPct val="0"/>
-            </a:spcBef>
-            <a:spcAft>
-              <a:spcPct val="35000"/>
-            </a:spcAft>
-            <a:buNone/>
-            <a:defRPr cap="all"/>
-          </a:pPr>
-          <a:r>
-            <a:rPr lang="en-GB" sz="2100" kern="1200" dirty="0">
-              <a:solidFill>
-                <a:schemeClr val="tx1"/>
-              </a:solidFill>
-            </a:rPr>
-            <a:t>Distracted</a:t>
-          </a:r>
-          <a:r>
-            <a:rPr lang="en-GB" sz="2100" kern="1200" dirty="0"/>
-            <a:t> </a:t>
-          </a:r>
-          <a:endParaRPr lang="en-US" sz="2100" kern="1200" dirty="0"/>
-        </a:p>
-      </dsp:txBody>
-      <dsp:txXfrm>
-        <a:off x="3433446" y="1542979"/>
-        <a:ext cx="3648708" cy="1265378"/>
-      </dsp:txXfrm>
-    </dsp:sp>
-    <dsp:sp modelId="{E25260D8-B08F-4C03-9797-0BE27723D1D0}">
-      <dsp:nvSpPr>
-        <dsp:cNvPr id="0" name=""/>
-        <dsp:cNvSpPr/>
-      </dsp:nvSpPr>
-      <dsp:spPr>
-        <a:xfrm>
-          <a:off x="3364992" y="2946926"/>
-          <a:ext cx="3785616" cy="1402286"/>
-        </a:xfrm>
-        <a:prstGeom prst="roundRect">
-          <a:avLst/>
-        </a:prstGeom>
-        <a:solidFill>
-          <a:srgbClr val="FF0000"/>
-        </a:solidFill>
-        <a:ln w="19050" cap="flat" cmpd="sng" algn="ctr">
-          <a:solidFill>
-            <a:schemeClr val="lt1">
-              <a:hueOff val="0"/>
-              <a:satOff val="0"/>
-              <a:lumOff val="0"/>
-              <a:alphaOff val="0"/>
-            </a:schemeClr>
-          </a:solidFill>
-          <a:prstDash val="solid"/>
-          <a:miter lim="800000"/>
-        </a:ln>
-        <a:effectLst/>
-      </dsp:spPr>
-      <dsp:style>
-        <a:lnRef idx="2">
-          <a:scrgbClr r="0" g="0" b="0"/>
-        </a:lnRef>
-        <a:fillRef idx="1">
-          <a:scrgbClr r="0" g="0" b="0"/>
-        </a:fillRef>
-        <a:effectRef idx="0">
-          <a:scrgbClr r="0" g="0" b="0"/>
-        </a:effectRef>
-        <a:fontRef idx="minor">
-          <a:schemeClr val="lt1"/>
-        </a:fontRef>
-      </dsp:style>
-      <dsp:txBody>
-        <a:bodyPr spcFirstLastPara="0" vert="horz" wrap="square" lIns="80010" tIns="40005" rIns="80010" bIns="40005" numCol="1" spcCol="1270" anchor="ctr" anchorCtr="0">
-          <a:noAutofit/>
-        </a:bodyPr>
-        <a:lstStyle/>
-        <a:p>
-          <a:pPr marL="0" lvl="0" indent="0" algn="ctr" defTabSz="933450">
-            <a:lnSpc>
-              <a:spcPct val="90000"/>
-            </a:lnSpc>
-            <a:spcBef>
-              <a:spcPct val="0"/>
-            </a:spcBef>
-            <a:spcAft>
-              <a:spcPct val="35000"/>
-            </a:spcAft>
-            <a:buNone/>
-            <a:defRPr cap="all"/>
-          </a:pPr>
-          <a:r>
-            <a:rPr lang="en-GB" sz="2100" kern="1200" dirty="0">
-              <a:solidFill>
-                <a:schemeClr val="tx1"/>
-              </a:solidFill>
-            </a:rPr>
-            <a:t>Distracted for more than a certain amount of time (5 mins for example)</a:t>
-          </a:r>
-          <a:endParaRPr lang="en-US" sz="2100" kern="1200" dirty="0">
-            <a:solidFill>
-              <a:schemeClr val="tx1"/>
-            </a:solidFill>
-          </a:endParaRPr>
-        </a:p>
-      </dsp:txBody>
-      <dsp:txXfrm>
-        <a:off x="3433446" y="3015380"/>
-        <a:ext cx="3648708" cy="1265378"/>
+        <a:off x="3991513" y="3723630"/>
+        <a:ext cx="3669188" cy="2201512"/>
       </dsp:txXfrm>
     </dsp:sp>
   </dsp:spTree>
@@ -5077,239 +4100,6 @@
 </dgm:layoutDef>
 </file>
 
-<file path=ppt/diagrams/layout3.xml><?xml version="1.0" encoding="utf-8"?>
-<dgm:layoutDef xmlns:dgm="http://schemas.openxmlformats.org/drawingml/2006/diagram" xmlns:a="http://schemas.openxmlformats.org/drawingml/2006/main" uniqueId="urn:microsoft.com/office/officeart/2005/8/layout/vList5">
-  <dgm:title val=""/>
-  <dgm:desc val=""/>
-  <dgm:catLst>
-    <dgm:cat type="list" pri="15000"/>
-    <dgm:cat type="convert" pri="2000"/>
-  </dgm:catLst>
-  <dgm:sampData>
-    <dgm:dataModel>
-      <dgm:ptLst>
-        <dgm:pt modelId="0" type="doc"/>
-        <dgm:pt modelId="1">
-          <dgm:prSet phldr="1"/>
-        </dgm:pt>
-        <dgm:pt modelId="11">
-          <dgm:prSet phldr="1"/>
-        </dgm:pt>
-        <dgm:pt modelId="12">
-          <dgm:prSet phldr="1"/>
-        </dgm:pt>
-        <dgm:pt modelId="2">
-          <dgm:prSet phldr="1"/>
-        </dgm:pt>
-        <dgm:pt modelId="21">
-          <dgm:prSet phldr="1"/>
-        </dgm:pt>
-        <dgm:pt modelId="22">
-          <dgm:prSet phldr="1"/>
-        </dgm:pt>
-        <dgm:pt modelId="3">
-          <dgm:prSet phldr="1"/>
-        </dgm:pt>
-        <dgm:pt modelId="31">
-          <dgm:prSet phldr="1"/>
-        </dgm:pt>
-        <dgm:pt modelId="32">
-          <dgm:prSet phldr="1"/>
-        </dgm:pt>
-      </dgm:ptLst>
-      <dgm:cxnLst>
-        <dgm:cxn modelId="4" srcId="0" destId="1" srcOrd="0" destOrd="0"/>
-        <dgm:cxn modelId="5" srcId="0" destId="2" srcOrd="1" destOrd="0"/>
-        <dgm:cxn modelId="6" srcId="0" destId="3" srcOrd="2" destOrd="0"/>
-        <dgm:cxn modelId="13" srcId="1" destId="11" srcOrd="0" destOrd="0"/>
-        <dgm:cxn modelId="14" srcId="1" destId="12" srcOrd="1" destOrd="0"/>
-        <dgm:cxn modelId="23" srcId="2" destId="21" srcOrd="0" destOrd="0"/>
-        <dgm:cxn modelId="24" srcId="2" destId="22" srcOrd="1" destOrd="0"/>
-        <dgm:cxn modelId="33" srcId="3" destId="31" srcOrd="0" destOrd="0"/>
-        <dgm:cxn modelId="34" srcId="3" destId="32" srcOrd="1" destOrd="0"/>
-      </dgm:cxnLst>
-      <dgm:bg/>
-      <dgm:whole/>
-    </dgm:dataModel>
-  </dgm:sampData>
-  <dgm:styleData>
-    <dgm:dataModel>
-      <dgm:ptLst>
-        <dgm:pt modelId="0" type="doc"/>
-        <dgm:pt modelId="1"/>
-        <dgm:pt modelId="11"/>
-        <dgm:pt modelId="2"/>
-        <dgm:pt modelId="21"/>
-      </dgm:ptLst>
-      <dgm:cxnLst>
-        <dgm:cxn modelId="4" srcId="0" destId="1" srcOrd="0" destOrd="0"/>
-        <dgm:cxn modelId="5" srcId="0" destId="2" srcOrd="1" destOrd="0"/>
-        <dgm:cxn modelId="13" srcId="1" destId="11" srcOrd="0" destOrd="0"/>
-        <dgm:cxn modelId="23" srcId="2" destId="21" srcOrd="0" destOrd="0"/>
-      </dgm:cxnLst>
-      <dgm:bg/>
-      <dgm:whole/>
-    </dgm:dataModel>
-  </dgm:styleData>
-  <dgm:clrData>
-    <dgm:dataModel>
-      <dgm:ptLst>
-        <dgm:pt modelId="0" type="doc"/>
-        <dgm:pt modelId="1"/>
-        <dgm:pt modelId="11"/>
-        <dgm:pt modelId="2"/>
-        <dgm:pt modelId="21"/>
-        <dgm:pt modelId="3"/>
-        <dgm:pt modelId="31"/>
-        <dgm:pt modelId="4"/>
-        <dgm:pt modelId="41"/>
-      </dgm:ptLst>
-      <dgm:cxnLst>
-        <dgm:cxn modelId="5" srcId="0" destId="1" srcOrd="0" destOrd="0"/>
-        <dgm:cxn modelId="6" srcId="0" destId="2" srcOrd="1" destOrd="0"/>
-        <dgm:cxn modelId="7" srcId="0" destId="3" srcOrd="2" destOrd="0"/>
-        <dgm:cxn modelId="8" srcId="0" destId="4" srcOrd="3" destOrd="0"/>
-        <dgm:cxn modelId="13" srcId="1" destId="11" srcOrd="0" destOrd="0"/>
-        <dgm:cxn modelId="23" srcId="2" destId="21" srcOrd="0" destOrd="0"/>
-        <dgm:cxn modelId="33" srcId="3" destId="31" srcOrd="0" destOrd="0"/>
-        <dgm:cxn modelId="43" srcId="4" destId="41" srcOrd="0" destOrd="0"/>
-      </dgm:cxnLst>
-      <dgm:bg/>
-      <dgm:whole/>
-    </dgm:dataModel>
-  </dgm:clrData>
-  <dgm:layoutNode name="Name0">
-    <dgm:varLst>
-      <dgm:dir/>
-      <dgm:animLvl val="lvl"/>
-      <dgm:resizeHandles val="exact"/>
-    </dgm:varLst>
-    <dgm:choose name="Name1">
-      <dgm:if name="Name2" func="var" arg="dir" op="equ" val="norm">
-        <dgm:alg type="lin">
-          <dgm:param type="linDir" val="fromT"/>
-          <dgm:param type="nodeHorzAlign" val="l"/>
-        </dgm:alg>
-      </dgm:if>
-      <dgm:else name="Name3">
-        <dgm:alg type="lin">
-          <dgm:param type="linDir" val="fromT"/>
-          <dgm:param type="nodeHorzAlign" val="r"/>
-        </dgm:alg>
-      </dgm:else>
-    </dgm:choose>
-    <dgm:shape xmlns:r="http://schemas.openxmlformats.org/officeDocument/2006/relationships" r:blip="">
-      <dgm:adjLst/>
-    </dgm:shape>
-    <dgm:presOf/>
-    <dgm:constrLst>
-      <dgm:constr type="h" for="ch" forName="linNode" refType="h"/>
-      <dgm:constr type="w" for="ch" forName="linNode" refType="w"/>
-      <dgm:constr type="h" for="ch" forName="sp" refType="h" fact="0.05"/>
-      <dgm:constr type="primFontSz" for="des" forName="parentText" op="equ" val="65"/>
-      <dgm:constr type="secFontSz" for="des" forName="descendantText" op="equ"/>
-    </dgm:constrLst>
-    <dgm:ruleLst/>
-    <dgm:forEach name="Name4" axis="ch" ptType="node">
-      <dgm:layoutNode name="linNode">
-        <dgm:choose name="Name5">
-          <dgm:if name="Name6" func="var" arg="dir" op="equ" val="norm">
-            <dgm:alg type="lin">
-              <dgm:param type="linDir" val="fromL"/>
-            </dgm:alg>
-          </dgm:if>
-          <dgm:else name="Name7">
-            <dgm:alg type="lin">
-              <dgm:param type="linDir" val="fromR"/>
-            </dgm:alg>
-          </dgm:else>
-        </dgm:choose>
-        <dgm:shape xmlns:r="http://schemas.openxmlformats.org/officeDocument/2006/relationships" r:blip="">
-          <dgm:adjLst/>
-        </dgm:shape>
-        <dgm:presOf/>
-        <dgm:constrLst>
-          <dgm:constr type="w" for="ch" forName="parentText" refType="w" fact="0.36"/>
-          <dgm:constr type="w" for="ch" forName="descendantText" refType="w" fact="0.64"/>
-          <dgm:constr type="h" for="ch" forName="parentText" refType="h"/>
-          <dgm:constr type="h" for="ch" forName="descendantText" refType="h" refFor="ch" refForName="parentText" fact="0.8"/>
-        </dgm:constrLst>
-        <dgm:ruleLst/>
-        <dgm:layoutNode name="parentText">
-          <dgm:varLst>
-            <dgm:chMax val="1"/>
-            <dgm:bulletEnabled val="1"/>
-          </dgm:varLst>
-          <dgm:alg type="tx"/>
-          <dgm:shape xmlns:r="http://schemas.openxmlformats.org/officeDocument/2006/relationships" type="roundRect" r:blip="" zOrderOff="3">
-            <dgm:adjLst/>
-          </dgm:shape>
-          <dgm:presOf axis="self" ptType="node"/>
-          <dgm:constrLst>
-            <dgm:constr type="tMarg" refType="primFontSz" fact="0.15"/>
-            <dgm:constr type="bMarg" refType="primFontSz" fact="0.15"/>
-            <dgm:constr type="lMarg" refType="primFontSz" fact="0.3"/>
-            <dgm:constr type="rMarg" refType="primFontSz" fact="0.3"/>
-          </dgm:constrLst>
-          <dgm:ruleLst>
-            <dgm:rule type="primFontSz" val="5" fact="NaN" max="NaN"/>
-          </dgm:ruleLst>
-        </dgm:layoutNode>
-        <dgm:choose name="Name8">
-          <dgm:if name="Name9" axis="ch" ptType="node" func="cnt" op="gte" val="1">
-            <dgm:layoutNode name="descendantText" styleLbl="alignAccFollowNode1">
-              <dgm:varLst>
-                <dgm:bulletEnabled val="1"/>
-              </dgm:varLst>
-              <dgm:alg type="tx">
-                <dgm:param type="stBulletLvl" val="1"/>
-                <dgm:param type="txAnchorVertCh" val="mid"/>
-              </dgm:alg>
-              <dgm:choose name="Name10">
-                <dgm:if name="Name11" func="var" arg="dir" op="equ" val="norm">
-                  <dgm:shape xmlns:r="http://schemas.openxmlformats.org/officeDocument/2006/relationships" rot="90" type="round2SameRect" r:blip="">
-                    <dgm:adjLst/>
-                  </dgm:shape>
-                </dgm:if>
-                <dgm:else name="Name12">
-                  <dgm:shape xmlns:r="http://schemas.openxmlformats.org/officeDocument/2006/relationships" rot="-90" type="round2SameRect" r:blip="">
-                    <dgm:adjLst/>
-                  </dgm:shape>
-                </dgm:else>
-              </dgm:choose>
-              <dgm:presOf axis="des" ptType="node"/>
-              <dgm:constrLst>
-                <dgm:constr type="secFontSz" val="65"/>
-                <dgm:constr type="primFontSz" refType="secFontSz"/>
-                <dgm:constr type="lMarg" refType="secFontSz" fact="0.3"/>
-                <dgm:constr type="rMarg" refType="secFontSz" fact="0.3"/>
-                <dgm:constr type="tMarg" refType="secFontSz" fact="0.15"/>
-                <dgm:constr type="bMarg" refType="secFontSz" fact="0.15"/>
-              </dgm:constrLst>
-              <dgm:ruleLst>
-                <dgm:rule type="secFontSz" val="5" fact="NaN" max="NaN"/>
-              </dgm:ruleLst>
-            </dgm:layoutNode>
-          </dgm:if>
-          <dgm:else name="Name13"/>
-        </dgm:choose>
-      </dgm:layoutNode>
-      <dgm:forEach name="Name14" axis="followSib" ptType="sibTrans" cnt="1">
-        <dgm:layoutNode name="sp">
-          <dgm:alg type="sp"/>
-          <dgm:shape xmlns:r="http://schemas.openxmlformats.org/officeDocument/2006/relationships" r:blip="">
-            <dgm:adjLst/>
-          </dgm:shape>
-          <dgm:presOf/>
-          <dgm:constrLst/>
-          <dgm:ruleLst/>
-        </dgm:layoutNode>
-      </dgm:forEach>
-    </dgm:forEach>
-  </dgm:layoutNode>
-</dgm:layoutDef>
-</file>
-
 <file path=ppt/diagrams/quickStyle1.xml><?xml version="1.0" encoding="utf-8"?>
 <dgm:styleDef xmlns:dgm="http://schemas.openxmlformats.org/drawingml/2006/diagram" xmlns:a="http://schemas.openxmlformats.org/drawingml/2006/main" uniqueId="urn:microsoft.com/office/officeart/2005/8/quickstyle/simple1">
   <dgm:title val=""/>
@@ -7350,1040 +6140,6 @@
         <a:scrgbClr r="0" g="0" b="0"/>
       </a:fillRef>
       <a:effectRef idx="1">
-        <a:scrgbClr r="0" g="0" b="0"/>
-      </a:effectRef>
-      <a:fontRef idx="minor"/>
-    </dgm:style>
-  </dgm:styleLbl>
-  <dgm:styleLbl name="revTx">
-    <dgm:scene3d>
-      <a:camera prst="orthographicFront"/>
-      <a:lightRig rig="threePt" dir="t"/>
-    </dgm:scene3d>
-    <dgm:sp3d/>
-    <dgm:txPr/>
-    <dgm:style>
-      <a:lnRef idx="0">
-        <a:scrgbClr r="0" g="0" b="0"/>
-      </a:lnRef>
-      <a:fillRef idx="0">
-        <a:scrgbClr r="0" g="0" b="0"/>
-      </a:fillRef>
-      <a:effectRef idx="0">
-        <a:scrgbClr r="0" g="0" b="0"/>
-      </a:effectRef>
-      <a:fontRef idx="minor"/>
-    </dgm:style>
-  </dgm:styleLbl>
-</dgm:styleDef>
-</file>
-
-<file path=ppt/diagrams/quickStyle3.xml><?xml version="1.0" encoding="utf-8"?>
-<dgm:styleDef xmlns:dgm="http://schemas.openxmlformats.org/drawingml/2006/diagram" xmlns:a="http://schemas.openxmlformats.org/drawingml/2006/main" uniqueId="urn:microsoft.com/office/officeart/2005/8/quickstyle/simple1">
-  <dgm:title val=""/>
-  <dgm:desc val=""/>
-  <dgm:catLst>
-    <dgm:cat type="simple" pri="10100"/>
-  </dgm:catLst>
-  <dgm:scene3d>
-    <a:camera prst="orthographicFront"/>
-    <a:lightRig rig="threePt" dir="t"/>
-  </dgm:scene3d>
-  <dgm:styleLbl name="node0">
-    <dgm:scene3d>
-      <a:camera prst="orthographicFront"/>
-      <a:lightRig rig="threePt" dir="t"/>
-    </dgm:scene3d>
-    <dgm:sp3d/>
-    <dgm:txPr/>
-    <dgm:style>
-      <a:lnRef idx="2">
-        <a:scrgbClr r="0" g="0" b="0"/>
-      </a:lnRef>
-      <a:fillRef idx="1">
-        <a:scrgbClr r="0" g="0" b="0"/>
-      </a:fillRef>
-      <a:effectRef idx="0">
-        <a:scrgbClr r="0" g="0" b="0"/>
-      </a:effectRef>
-      <a:fontRef idx="minor">
-        <a:schemeClr val="lt1"/>
-      </a:fontRef>
-    </dgm:style>
-  </dgm:styleLbl>
-  <dgm:styleLbl name="lnNode1">
-    <dgm:scene3d>
-      <a:camera prst="orthographicFront"/>
-      <a:lightRig rig="threePt" dir="t"/>
-    </dgm:scene3d>
-    <dgm:sp3d/>
-    <dgm:txPr/>
-    <dgm:style>
-      <a:lnRef idx="2">
-        <a:scrgbClr r="0" g="0" b="0"/>
-      </a:lnRef>
-      <a:fillRef idx="1">
-        <a:scrgbClr r="0" g="0" b="0"/>
-      </a:fillRef>
-      <a:effectRef idx="0">
-        <a:scrgbClr r="0" g="0" b="0"/>
-      </a:effectRef>
-      <a:fontRef idx="minor">
-        <a:schemeClr val="lt1"/>
-      </a:fontRef>
-    </dgm:style>
-  </dgm:styleLbl>
-  <dgm:styleLbl name="vennNode1">
-    <dgm:scene3d>
-      <a:camera prst="orthographicFront"/>
-      <a:lightRig rig="threePt" dir="t"/>
-    </dgm:scene3d>
-    <dgm:sp3d/>
-    <dgm:txPr/>
-    <dgm:style>
-      <a:lnRef idx="2">
-        <a:scrgbClr r="0" g="0" b="0"/>
-      </a:lnRef>
-      <a:fillRef idx="1">
-        <a:scrgbClr r="0" g="0" b="0"/>
-      </a:fillRef>
-      <a:effectRef idx="0">
-        <a:scrgbClr r="0" g="0" b="0"/>
-      </a:effectRef>
-      <a:fontRef idx="minor">
-        <a:schemeClr val="tx1"/>
-      </a:fontRef>
-    </dgm:style>
-  </dgm:styleLbl>
-  <dgm:styleLbl name="alignNode1">
-    <dgm:scene3d>
-      <a:camera prst="orthographicFront"/>
-      <a:lightRig rig="threePt" dir="t"/>
-    </dgm:scene3d>
-    <dgm:sp3d/>
-    <dgm:txPr/>
-    <dgm:style>
-      <a:lnRef idx="2">
-        <a:scrgbClr r="0" g="0" b="0"/>
-      </a:lnRef>
-      <a:fillRef idx="1">
-        <a:scrgbClr r="0" g="0" b="0"/>
-      </a:fillRef>
-      <a:effectRef idx="0">
-        <a:scrgbClr r="0" g="0" b="0"/>
-      </a:effectRef>
-      <a:fontRef idx="minor">
-        <a:schemeClr val="lt1"/>
-      </a:fontRef>
-    </dgm:style>
-  </dgm:styleLbl>
-  <dgm:styleLbl name="node1">
-    <dgm:scene3d>
-      <a:camera prst="orthographicFront"/>
-      <a:lightRig rig="threePt" dir="t"/>
-    </dgm:scene3d>
-    <dgm:sp3d/>
-    <dgm:txPr/>
-    <dgm:style>
-      <a:lnRef idx="2">
-        <a:scrgbClr r="0" g="0" b="0"/>
-      </a:lnRef>
-      <a:fillRef idx="1">
-        <a:scrgbClr r="0" g="0" b="0"/>
-      </a:fillRef>
-      <a:effectRef idx="0">
-        <a:scrgbClr r="0" g="0" b="0"/>
-      </a:effectRef>
-      <a:fontRef idx="minor">
-        <a:schemeClr val="lt1"/>
-      </a:fontRef>
-    </dgm:style>
-  </dgm:styleLbl>
-  <dgm:styleLbl name="node2">
-    <dgm:scene3d>
-      <a:camera prst="orthographicFront"/>
-      <a:lightRig rig="threePt" dir="t"/>
-    </dgm:scene3d>
-    <dgm:sp3d/>
-    <dgm:txPr/>
-    <dgm:style>
-      <a:lnRef idx="2">
-        <a:scrgbClr r="0" g="0" b="0"/>
-      </a:lnRef>
-      <a:fillRef idx="1">
-        <a:scrgbClr r="0" g="0" b="0"/>
-      </a:fillRef>
-      <a:effectRef idx="0">
-        <a:scrgbClr r="0" g="0" b="0"/>
-      </a:effectRef>
-      <a:fontRef idx="minor">
-        <a:schemeClr val="lt1"/>
-      </a:fontRef>
-    </dgm:style>
-  </dgm:styleLbl>
-  <dgm:styleLbl name="node3">
-    <dgm:scene3d>
-      <a:camera prst="orthographicFront"/>
-      <a:lightRig rig="threePt" dir="t"/>
-    </dgm:scene3d>
-    <dgm:sp3d/>
-    <dgm:txPr/>
-    <dgm:style>
-      <a:lnRef idx="2">
-        <a:scrgbClr r="0" g="0" b="0"/>
-      </a:lnRef>
-      <a:fillRef idx="1">
-        <a:scrgbClr r="0" g="0" b="0"/>
-      </a:fillRef>
-      <a:effectRef idx="0">
-        <a:scrgbClr r="0" g="0" b="0"/>
-      </a:effectRef>
-      <a:fontRef idx="minor">
-        <a:schemeClr val="lt1"/>
-      </a:fontRef>
-    </dgm:style>
-  </dgm:styleLbl>
-  <dgm:styleLbl name="node4">
-    <dgm:scene3d>
-      <a:camera prst="orthographicFront"/>
-      <a:lightRig rig="threePt" dir="t"/>
-    </dgm:scene3d>
-    <dgm:sp3d/>
-    <dgm:txPr/>
-    <dgm:style>
-      <a:lnRef idx="2">
-        <a:scrgbClr r="0" g="0" b="0"/>
-      </a:lnRef>
-      <a:fillRef idx="1">
-        <a:scrgbClr r="0" g="0" b="0"/>
-      </a:fillRef>
-      <a:effectRef idx="0">
-        <a:scrgbClr r="0" g="0" b="0"/>
-      </a:effectRef>
-      <a:fontRef idx="minor">
-        <a:schemeClr val="lt1"/>
-      </a:fontRef>
-    </dgm:style>
-  </dgm:styleLbl>
-  <dgm:styleLbl name="fgImgPlace1">
-    <dgm:scene3d>
-      <a:camera prst="orthographicFront"/>
-      <a:lightRig rig="threePt" dir="t"/>
-    </dgm:scene3d>
-    <dgm:sp3d/>
-    <dgm:txPr/>
-    <dgm:style>
-      <a:lnRef idx="2">
-        <a:scrgbClr r="0" g="0" b="0"/>
-      </a:lnRef>
-      <a:fillRef idx="1">
-        <a:scrgbClr r="0" g="0" b="0"/>
-      </a:fillRef>
-      <a:effectRef idx="0">
-        <a:scrgbClr r="0" g="0" b="0"/>
-      </a:effectRef>
-      <a:fontRef idx="minor"/>
-    </dgm:style>
-  </dgm:styleLbl>
-  <dgm:styleLbl name="alignImgPlace1">
-    <dgm:scene3d>
-      <a:camera prst="orthographicFront"/>
-      <a:lightRig rig="threePt" dir="t"/>
-    </dgm:scene3d>
-    <dgm:sp3d/>
-    <dgm:txPr/>
-    <dgm:style>
-      <a:lnRef idx="2">
-        <a:scrgbClr r="0" g="0" b="0"/>
-      </a:lnRef>
-      <a:fillRef idx="1">
-        <a:scrgbClr r="0" g="0" b="0"/>
-      </a:fillRef>
-      <a:effectRef idx="0">
-        <a:scrgbClr r="0" g="0" b="0"/>
-      </a:effectRef>
-      <a:fontRef idx="minor"/>
-    </dgm:style>
-  </dgm:styleLbl>
-  <dgm:styleLbl name="bgImgPlace1">
-    <dgm:scene3d>
-      <a:camera prst="orthographicFront"/>
-      <a:lightRig rig="threePt" dir="t"/>
-    </dgm:scene3d>
-    <dgm:sp3d/>
-    <dgm:txPr/>
-    <dgm:style>
-      <a:lnRef idx="2">
-        <a:scrgbClr r="0" g="0" b="0"/>
-      </a:lnRef>
-      <a:fillRef idx="1">
-        <a:scrgbClr r="0" g="0" b="0"/>
-      </a:fillRef>
-      <a:effectRef idx="0">
-        <a:scrgbClr r="0" g="0" b="0"/>
-      </a:effectRef>
-      <a:fontRef idx="minor"/>
-    </dgm:style>
-  </dgm:styleLbl>
-  <dgm:styleLbl name="sibTrans2D1">
-    <dgm:scene3d>
-      <a:camera prst="orthographicFront"/>
-      <a:lightRig rig="threePt" dir="t"/>
-    </dgm:scene3d>
-    <dgm:sp3d/>
-    <dgm:txPr/>
-    <dgm:style>
-      <a:lnRef idx="0">
-        <a:scrgbClr r="0" g="0" b="0"/>
-      </a:lnRef>
-      <a:fillRef idx="1">
-        <a:scrgbClr r="0" g="0" b="0"/>
-      </a:fillRef>
-      <a:effectRef idx="0">
-        <a:scrgbClr r="0" g="0" b="0"/>
-      </a:effectRef>
-      <a:fontRef idx="minor">
-        <a:schemeClr val="lt1"/>
-      </a:fontRef>
-    </dgm:style>
-  </dgm:styleLbl>
-  <dgm:styleLbl name="fgSibTrans2D1">
-    <dgm:scene3d>
-      <a:camera prst="orthographicFront"/>
-      <a:lightRig rig="threePt" dir="t"/>
-    </dgm:scene3d>
-    <dgm:sp3d/>
-    <dgm:txPr/>
-    <dgm:style>
-      <a:lnRef idx="0">
-        <a:scrgbClr r="0" g="0" b="0"/>
-      </a:lnRef>
-      <a:fillRef idx="1">
-        <a:scrgbClr r="0" g="0" b="0"/>
-      </a:fillRef>
-      <a:effectRef idx="0">
-        <a:scrgbClr r="0" g="0" b="0"/>
-      </a:effectRef>
-      <a:fontRef idx="minor">
-        <a:schemeClr val="lt1"/>
-      </a:fontRef>
-    </dgm:style>
-  </dgm:styleLbl>
-  <dgm:styleLbl name="bgSibTrans2D1">
-    <dgm:scene3d>
-      <a:camera prst="orthographicFront"/>
-      <a:lightRig rig="threePt" dir="t"/>
-    </dgm:scene3d>
-    <dgm:sp3d/>
-    <dgm:txPr/>
-    <dgm:style>
-      <a:lnRef idx="0">
-        <a:scrgbClr r="0" g="0" b="0"/>
-      </a:lnRef>
-      <a:fillRef idx="1">
-        <a:scrgbClr r="0" g="0" b="0"/>
-      </a:fillRef>
-      <a:effectRef idx="0">
-        <a:scrgbClr r="0" g="0" b="0"/>
-      </a:effectRef>
-      <a:fontRef idx="minor">
-        <a:schemeClr val="lt1"/>
-      </a:fontRef>
-    </dgm:style>
-  </dgm:styleLbl>
-  <dgm:styleLbl name="sibTrans1D1">
-    <dgm:scene3d>
-      <a:camera prst="orthographicFront"/>
-      <a:lightRig rig="threePt" dir="t"/>
-    </dgm:scene3d>
-    <dgm:sp3d/>
-    <dgm:txPr/>
-    <dgm:style>
-      <a:lnRef idx="1">
-        <a:scrgbClr r="0" g="0" b="0"/>
-      </a:lnRef>
-      <a:fillRef idx="0">
-        <a:scrgbClr r="0" g="0" b="0"/>
-      </a:fillRef>
-      <a:effectRef idx="0">
-        <a:scrgbClr r="0" g="0" b="0"/>
-      </a:effectRef>
-      <a:fontRef idx="minor"/>
-    </dgm:style>
-  </dgm:styleLbl>
-  <dgm:styleLbl name="callout">
-    <dgm:scene3d>
-      <a:camera prst="orthographicFront"/>
-      <a:lightRig rig="threePt" dir="t"/>
-    </dgm:scene3d>
-    <dgm:sp3d/>
-    <dgm:txPr/>
-    <dgm:style>
-      <a:lnRef idx="2">
-        <a:scrgbClr r="0" g="0" b="0"/>
-      </a:lnRef>
-      <a:fillRef idx="1">
-        <a:scrgbClr r="0" g="0" b="0"/>
-      </a:fillRef>
-      <a:effectRef idx="0">
-        <a:scrgbClr r="0" g="0" b="0"/>
-      </a:effectRef>
-      <a:fontRef idx="minor"/>
-    </dgm:style>
-  </dgm:styleLbl>
-  <dgm:styleLbl name="asst0">
-    <dgm:scene3d>
-      <a:camera prst="orthographicFront"/>
-      <a:lightRig rig="threePt" dir="t"/>
-    </dgm:scene3d>
-    <dgm:sp3d/>
-    <dgm:txPr/>
-    <dgm:style>
-      <a:lnRef idx="2">
-        <a:scrgbClr r="0" g="0" b="0"/>
-      </a:lnRef>
-      <a:fillRef idx="1">
-        <a:scrgbClr r="0" g="0" b="0"/>
-      </a:fillRef>
-      <a:effectRef idx="0">
-        <a:scrgbClr r="0" g="0" b="0"/>
-      </a:effectRef>
-      <a:fontRef idx="minor">
-        <a:schemeClr val="lt1"/>
-      </a:fontRef>
-    </dgm:style>
-  </dgm:styleLbl>
-  <dgm:styleLbl name="asst1">
-    <dgm:scene3d>
-      <a:camera prst="orthographicFront"/>
-      <a:lightRig rig="threePt" dir="t"/>
-    </dgm:scene3d>
-    <dgm:sp3d/>
-    <dgm:txPr/>
-    <dgm:style>
-      <a:lnRef idx="2">
-        <a:scrgbClr r="0" g="0" b="0"/>
-      </a:lnRef>
-      <a:fillRef idx="1">
-        <a:scrgbClr r="0" g="0" b="0"/>
-      </a:fillRef>
-      <a:effectRef idx="0">
-        <a:scrgbClr r="0" g="0" b="0"/>
-      </a:effectRef>
-      <a:fontRef idx="minor">
-        <a:schemeClr val="lt1"/>
-      </a:fontRef>
-    </dgm:style>
-  </dgm:styleLbl>
-  <dgm:styleLbl name="asst2">
-    <dgm:scene3d>
-      <a:camera prst="orthographicFront"/>
-      <a:lightRig rig="threePt" dir="t"/>
-    </dgm:scene3d>
-    <dgm:sp3d/>
-    <dgm:txPr/>
-    <dgm:style>
-      <a:lnRef idx="2">
-        <a:scrgbClr r="0" g="0" b="0"/>
-      </a:lnRef>
-      <a:fillRef idx="1">
-        <a:scrgbClr r="0" g="0" b="0"/>
-      </a:fillRef>
-      <a:effectRef idx="0">
-        <a:scrgbClr r="0" g="0" b="0"/>
-      </a:effectRef>
-      <a:fontRef idx="minor">
-        <a:schemeClr val="lt1"/>
-      </a:fontRef>
-    </dgm:style>
-  </dgm:styleLbl>
-  <dgm:styleLbl name="asst3">
-    <dgm:scene3d>
-      <a:camera prst="orthographicFront"/>
-      <a:lightRig rig="threePt" dir="t"/>
-    </dgm:scene3d>
-    <dgm:sp3d/>
-    <dgm:txPr/>
-    <dgm:style>
-      <a:lnRef idx="2">
-        <a:scrgbClr r="0" g="0" b="0"/>
-      </a:lnRef>
-      <a:fillRef idx="1">
-        <a:scrgbClr r="0" g="0" b="0"/>
-      </a:fillRef>
-      <a:effectRef idx="0">
-        <a:scrgbClr r="0" g="0" b="0"/>
-      </a:effectRef>
-      <a:fontRef idx="minor">
-        <a:schemeClr val="lt1"/>
-      </a:fontRef>
-    </dgm:style>
-  </dgm:styleLbl>
-  <dgm:styleLbl name="asst4">
-    <dgm:scene3d>
-      <a:camera prst="orthographicFront"/>
-      <a:lightRig rig="threePt" dir="t"/>
-    </dgm:scene3d>
-    <dgm:sp3d/>
-    <dgm:txPr/>
-    <dgm:style>
-      <a:lnRef idx="2">
-        <a:scrgbClr r="0" g="0" b="0"/>
-      </a:lnRef>
-      <a:fillRef idx="1">
-        <a:scrgbClr r="0" g="0" b="0"/>
-      </a:fillRef>
-      <a:effectRef idx="0">
-        <a:scrgbClr r="0" g="0" b="0"/>
-      </a:effectRef>
-      <a:fontRef idx="minor">
-        <a:schemeClr val="lt1"/>
-      </a:fontRef>
-    </dgm:style>
-  </dgm:styleLbl>
-  <dgm:styleLbl name="parChTrans2D1">
-    <dgm:scene3d>
-      <a:camera prst="orthographicFront"/>
-      <a:lightRig rig="threePt" dir="t"/>
-    </dgm:scene3d>
-    <dgm:sp3d/>
-    <dgm:txPr/>
-    <dgm:style>
-      <a:lnRef idx="2">
-        <a:scrgbClr r="0" g="0" b="0"/>
-      </a:lnRef>
-      <a:fillRef idx="1">
-        <a:scrgbClr r="0" g="0" b="0"/>
-      </a:fillRef>
-      <a:effectRef idx="0">
-        <a:scrgbClr r="0" g="0" b="0"/>
-      </a:effectRef>
-      <a:fontRef idx="minor">
-        <a:schemeClr val="lt1"/>
-      </a:fontRef>
-    </dgm:style>
-  </dgm:styleLbl>
-  <dgm:styleLbl name="parChTrans2D2">
-    <dgm:scene3d>
-      <a:camera prst="orthographicFront"/>
-      <a:lightRig rig="threePt" dir="t"/>
-    </dgm:scene3d>
-    <dgm:sp3d/>
-    <dgm:txPr/>
-    <dgm:style>
-      <a:lnRef idx="2">
-        <a:scrgbClr r="0" g="0" b="0"/>
-      </a:lnRef>
-      <a:fillRef idx="1">
-        <a:scrgbClr r="0" g="0" b="0"/>
-      </a:fillRef>
-      <a:effectRef idx="0">
-        <a:scrgbClr r="0" g="0" b="0"/>
-      </a:effectRef>
-      <a:fontRef idx="minor">
-        <a:schemeClr val="lt1"/>
-      </a:fontRef>
-    </dgm:style>
-  </dgm:styleLbl>
-  <dgm:styleLbl name="parChTrans2D3">
-    <dgm:scene3d>
-      <a:camera prst="orthographicFront"/>
-      <a:lightRig rig="threePt" dir="t"/>
-    </dgm:scene3d>
-    <dgm:sp3d/>
-    <dgm:txPr/>
-    <dgm:style>
-      <a:lnRef idx="2">
-        <a:scrgbClr r="0" g="0" b="0"/>
-      </a:lnRef>
-      <a:fillRef idx="1">
-        <a:scrgbClr r="0" g="0" b="0"/>
-      </a:fillRef>
-      <a:effectRef idx="0">
-        <a:scrgbClr r="0" g="0" b="0"/>
-      </a:effectRef>
-      <a:fontRef idx="minor">
-        <a:schemeClr val="lt1"/>
-      </a:fontRef>
-    </dgm:style>
-  </dgm:styleLbl>
-  <dgm:styleLbl name="parChTrans2D4">
-    <dgm:scene3d>
-      <a:camera prst="orthographicFront"/>
-      <a:lightRig rig="threePt" dir="t"/>
-    </dgm:scene3d>
-    <dgm:sp3d/>
-    <dgm:txPr/>
-    <dgm:style>
-      <a:lnRef idx="2">
-        <a:scrgbClr r="0" g="0" b="0"/>
-      </a:lnRef>
-      <a:fillRef idx="1">
-        <a:scrgbClr r="0" g="0" b="0"/>
-      </a:fillRef>
-      <a:effectRef idx="0">
-        <a:scrgbClr r="0" g="0" b="0"/>
-      </a:effectRef>
-      <a:fontRef idx="minor">
-        <a:schemeClr val="lt1"/>
-      </a:fontRef>
-    </dgm:style>
-  </dgm:styleLbl>
-  <dgm:styleLbl name="parChTrans1D1">
-    <dgm:scene3d>
-      <a:camera prst="orthographicFront"/>
-      <a:lightRig rig="threePt" dir="t"/>
-    </dgm:scene3d>
-    <dgm:sp3d/>
-    <dgm:txPr/>
-    <dgm:style>
-      <a:lnRef idx="2">
-        <a:scrgbClr r="0" g="0" b="0"/>
-      </a:lnRef>
-      <a:fillRef idx="0">
-        <a:scrgbClr r="0" g="0" b="0"/>
-      </a:fillRef>
-      <a:effectRef idx="0">
-        <a:scrgbClr r="0" g="0" b="0"/>
-      </a:effectRef>
-      <a:fontRef idx="minor"/>
-    </dgm:style>
-  </dgm:styleLbl>
-  <dgm:styleLbl name="parChTrans1D2">
-    <dgm:scene3d>
-      <a:camera prst="orthographicFront"/>
-      <a:lightRig rig="threePt" dir="t"/>
-    </dgm:scene3d>
-    <dgm:sp3d/>
-    <dgm:txPr/>
-    <dgm:style>
-      <a:lnRef idx="2">
-        <a:scrgbClr r="0" g="0" b="0"/>
-      </a:lnRef>
-      <a:fillRef idx="0">
-        <a:scrgbClr r="0" g="0" b="0"/>
-      </a:fillRef>
-      <a:effectRef idx="0">
-        <a:scrgbClr r="0" g="0" b="0"/>
-      </a:effectRef>
-      <a:fontRef idx="minor"/>
-    </dgm:style>
-  </dgm:styleLbl>
-  <dgm:styleLbl name="parChTrans1D3">
-    <dgm:scene3d>
-      <a:camera prst="orthographicFront"/>
-      <a:lightRig rig="threePt" dir="t"/>
-    </dgm:scene3d>
-    <dgm:sp3d/>
-    <dgm:txPr/>
-    <dgm:style>
-      <a:lnRef idx="2">
-        <a:scrgbClr r="0" g="0" b="0"/>
-      </a:lnRef>
-      <a:fillRef idx="0">
-        <a:scrgbClr r="0" g="0" b="0"/>
-      </a:fillRef>
-      <a:effectRef idx="0">
-        <a:scrgbClr r="0" g="0" b="0"/>
-      </a:effectRef>
-      <a:fontRef idx="minor"/>
-    </dgm:style>
-  </dgm:styleLbl>
-  <dgm:styleLbl name="parChTrans1D4">
-    <dgm:scene3d>
-      <a:camera prst="orthographicFront"/>
-      <a:lightRig rig="threePt" dir="t"/>
-    </dgm:scene3d>
-    <dgm:sp3d/>
-    <dgm:txPr/>
-    <dgm:style>
-      <a:lnRef idx="2">
-        <a:scrgbClr r="0" g="0" b="0"/>
-      </a:lnRef>
-      <a:fillRef idx="0">
-        <a:scrgbClr r="0" g="0" b="0"/>
-      </a:fillRef>
-      <a:effectRef idx="0">
-        <a:scrgbClr r="0" g="0" b="0"/>
-      </a:effectRef>
-      <a:fontRef idx="minor"/>
-    </dgm:style>
-  </dgm:styleLbl>
-  <dgm:styleLbl name="fgAcc1">
-    <dgm:scene3d>
-      <a:camera prst="orthographicFront"/>
-      <a:lightRig rig="threePt" dir="t"/>
-    </dgm:scene3d>
-    <dgm:sp3d/>
-    <dgm:txPr/>
-    <dgm:style>
-      <a:lnRef idx="2">
-        <a:scrgbClr r="0" g="0" b="0"/>
-      </a:lnRef>
-      <a:fillRef idx="1">
-        <a:scrgbClr r="0" g="0" b="0"/>
-      </a:fillRef>
-      <a:effectRef idx="0">
-        <a:scrgbClr r="0" g="0" b="0"/>
-      </a:effectRef>
-      <a:fontRef idx="minor"/>
-    </dgm:style>
-  </dgm:styleLbl>
-  <dgm:styleLbl name="conFgAcc1">
-    <dgm:scene3d>
-      <a:camera prst="orthographicFront"/>
-      <a:lightRig rig="threePt" dir="t"/>
-    </dgm:scene3d>
-    <dgm:sp3d/>
-    <dgm:txPr/>
-    <dgm:style>
-      <a:lnRef idx="2">
-        <a:scrgbClr r="0" g="0" b="0"/>
-      </a:lnRef>
-      <a:fillRef idx="1">
-        <a:scrgbClr r="0" g="0" b="0"/>
-      </a:fillRef>
-      <a:effectRef idx="0">
-        <a:scrgbClr r="0" g="0" b="0"/>
-      </a:effectRef>
-      <a:fontRef idx="minor"/>
-    </dgm:style>
-  </dgm:styleLbl>
-  <dgm:styleLbl name="alignAcc1">
-    <dgm:scene3d>
-      <a:camera prst="orthographicFront"/>
-      <a:lightRig rig="threePt" dir="t"/>
-    </dgm:scene3d>
-    <dgm:sp3d/>
-    <dgm:txPr/>
-    <dgm:style>
-      <a:lnRef idx="2">
-        <a:scrgbClr r="0" g="0" b="0"/>
-      </a:lnRef>
-      <a:fillRef idx="1">
-        <a:scrgbClr r="0" g="0" b="0"/>
-      </a:fillRef>
-      <a:effectRef idx="0">
-        <a:scrgbClr r="0" g="0" b="0"/>
-      </a:effectRef>
-      <a:fontRef idx="minor"/>
-    </dgm:style>
-  </dgm:styleLbl>
-  <dgm:styleLbl name="trAlignAcc1">
-    <dgm:scene3d>
-      <a:camera prst="orthographicFront"/>
-      <a:lightRig rig="threePt" dir="t"/>
-    </dgm:scene3d>
-    <dgm:sp3d/>
-    <dgm:txPr/>
-    <dgm:style>
-      <a:lnRef idx="1">
-        <a:scrgbClr r="0" g="0" b="0"/>
-      </a:lnRef>
-      <a:fillRef idx="1">
-        <a:scrgbClr r="0" g="0" b="0"/>
-      </a:fillRef>
-      <a:effectRef idx="0">
-        <a:scrgbClr r="0" g="0" b="0"/>
-      </a:effectRef>
-      <a:fontRef idx="minor"/>
-    </dgm:style>
-  </dgm:styleLbl>
-  <dgm:styleLbl name="bgAcc1">
-    <dgm:scene3d>
-      <a:camera prst="orthographicFront"/>
-      <a:lightRig rig="threePt" dir="t"/>
-    </dgm:scene3d>
-    <dgm:sp3d/>
-    <dgm:txPr/>
-    <dgm:style>
-      <a:lnRef idx="2">
-        <a:scrgbClr r="0" g="0" b="0"/>
-      </a:lnRef>
-      <a:fillRef idx="1">
-        <a:scrgbClr r="0" g="0" b="0"/>
-      </a:fillRef>
-      <a:effectRef idx="0">
-        <a:scrgbClr r="0" g="0" b="0"/>
-      </a:effectRef>
-      <a:fontRef idx="minor"/>
-    </dgm:style>
-  </dgm:styleLbl>
-  <dgm:styleLbl name="solidFgAcc1">
-    <dgm:scene3d>
-      <a:camera prst="orthographicFront"/>
-      <a:lightRig rig="threePt" dir="t"/>
-    </dgm:scene3d>
-    <dgm:sp3d/>
-    <dgm:txPr/>
-    <dgm:style>
-      <a:lnRef idx="2">
-        <a:scrgbClr r="0" g="0" b="0"/>
-      </a:lnRef>
-      <a:fillRef idx="1">
-        <a:scrgbClr r="0" g="0" b="0"/>
-      </a:fillRef>
-      <a:effectRef idx="0">
-        <a:scrgbClr r="0" g="0" b="0"/>
-      </a:effectRef>
-      <a:fontRef idx="minor"/>
-    </dgm:style>
-  </dgm:styleLbl>
-  <dgm:styleLbl name="solidAlignAcc1">
-    <dgm:scene3d>
-      <a:camera prst="orthographicFront"/>
-      <a:lightRig rig="threePt" dir="t"/>
-    </dgm:scene3d>
-    <dgm:sp3d/>
-    <dgm:txPr/>
-    <dgm:style>
-      <a:lnRef idx="2">
-        <a:scrgbClr r="0" g="0" b="0"/>
-      </a:lnRef>
-      <a:fillRef idx="1">
-        <a:scrgbClr r="0" g="0" b="0"/>
-      </a:fillRef>
-      <a:effectRef idx="0">
-        <a:scrgbClr r="0" g="0" b="0"/>
-      </a:effectRef>
-      <a:fontRef idx="minor"/>
-    </dgm:style>
-  </dgm:styleLbl>
-  <dgm:styleLbl name="solidBgAcc1">
-    <dgm:scene3d>
-      <a:camera prst="orthographicFront"/>
-      <a:lightRig rig="threePt" dir="t"/>
-    </dgm:scene3d>
-    <dgm:sp3d/>
-    <dgm:txPr/>
-    <dgm:style>
-      <a:lnRef idx="2">
-        <a:scrgbClr r="0" g="0" b="0"/>
-      </a:lnRef>
-      <a:fillRef idx="1">
-        <a:scrgbClr r="0" g="0" b="0"/>
-      </a:fillRef>
-      <a:effectRef idx="0">
-        <a:scrgbClr r="0" g="0" b="0"/>
-      </a:effectRef>
-      <a:fontRef idx="minor"/>
-    </dgm:style>
-  </dgm:styleLbl>
-  <dgm:styleLbl name="fgAccFollowNode1">
-    <dgm:scene3d>
-      <a:camera prst="orthographicFront"/>
-      <a:lightRig rig="threePt" dir="t"/>
-    </dgm:scene3d>
-    <dgm:sp3d/>
-    <dgm:txPr/>
-    <dgm:style>
-      <a:lnRef idx="2">
-        <a:scrgbClr r="0" g="0" b="0"/>
-      </a:lnRef>
-      <a:fillRef idx="1">
-        <a:scrgbClr r="0" g="0" b="0"/>
-      </a:fillRef>
-      <a:effectRef idx="0">
-        <a:scrgbClr r="0" g="0" b="0"/>
-      </a:effectRef>
-      <a:fontRef idx="minor"/>
-    </dgm:style>
-  </dgm:styleLbl>
-  <dgm:styleLbl name="alignAccFollowNode1">
-    <dgm:scene3d>
-      <a:camera prst="orthographicFront"/>
-      <a:lightRig rig="threePt" dir="t"/>
-    </dgm:scene3d>
-    <dgm:sp3d/>
-    <dgm:txPr/>
-    <dgm:style>
-      <a:lnRef idx="2">
-        <a:scrgbClr r="0" g="0" b="0"/>
-      </a:lnRef>
-      <a:fillRef idx="1">
-        <a:scrgbClr r="0" g="0" b="0"/>
-      </a:fillRef>
-      <a:effectRef idx="0">
-        <a:scrgbClr r="0" g="0" b="0"/>
-      </a:effectRef>
-      <a:fontRef idx="minor"/>
-    </dgm:style>
-  </dgm:styleLbl>
-  <dgm:styleLbl name="bgAccFollowNode1">
-    <dgm:scene3d>
-      <a:camera prst="orthographicFront"/>
-      <a:lightRig rig="threePt" dir="t"/>
-    </dgm:scene3d>
-    <dgm:sp3d/>
-    <dgm:txPr/>
-    <dgm:style>
-      <a:lnRef idx="2">
-        <a:scrgbClr r="0" g="0" b="0"/>
-      </a:lnRef>
-      <a:fillRef idx="1">
-        <a:scrgbClr r="0" g="0" b="0"/>
-      </a:fillRef>
-      <a:effectRef idx="0">
-        <a:scrgbClr r="0" g="0" b="0"/>
-      </a:effectRef>
-      <a:fontRef idx="minor"/>
-    </dgm:style>
-  </dgm:styleLbl>
-  <dgm:styleLbl name="fgAcc0">
-    <dgm:scene3d>
-      <a:camera prst="orthographicFront"/>
-      <a:lightRig rig="threePt" dir="t"/>
-    </dgm:scene3d>
-    <dgm:sp3d/>
-    <dgm:txPr/>
-    <dgm:style>
-      <a:lnRef idx="2">
-        <a:scrgbClr r="0" g="0" b="0"/>
-      </a:lnRef>
-      <a:fillRef idx="1">
-        <a:scrgbClr r="0" g="0" b="0"/>
-      </a:fillRef>
-      <a:effectRef idx="0">
-        <a:scrgbClr r="0" g="0" b="0"/>
-      </a:effectRef>
-      <a:fontRef idx="minor"/>
-    </dgm:style>
-  </dgm:styleLbl>
-  <dgm:styleLbl name="fgAcc2">
-    <dgm:scene3d>
-      <a:camera prst="orthographicFront"/>
-      <a:lightRig rig="threePt" dir="t"/>
-    </dgm:scene3d>
-    <dgm:sp3d/>
-    <dgm:txPr/>
-    <dgm:style>
-      <a:lnRef idx="2">
-        <a:scrgbClr r="0" g="0" b="0"/>
-      </a:lnRef>
-      <a:fillRef idx="1">
-        <a:scrgbClr r="0" g="0" b="0"/>
-      </a:fillRef>
-      <a:effectRef idx="0">
-        <a:scrgbClr r="0" g="0" b="0"/>
-      </a:effectRef>
-      <a:fontRef idx="minor"/>
-    </dgm:style>
-  </dgm:styleLbl>
-  <dgm:styleLbl name="fgAcc3">
-    <dgm:scene3d>
-      <a:camera prst="orthographicFront"/>
-      <a:lightRig rig="threePt" dir="t"/>
-    </dgm:scene3d>
-    <dgm:sp3d/>
-    <dgm:txPr/>
-    <dgm:style>
-      <a:lnRef idx="2">
-        <a:scrgbClr r="0" g="0" b="0"/>
-      </a:lnRef>
-      <a:fillRef idx="1">
-        <a:scrgbClr r="0" g="0" b="0"/>
-      </a:fillRef>
-      <a:effectRef idx="0">
-        <a:scrgbClr r="0" g="0" b="0"/>
-      </a:effectRef>
-      <a:fontRef idx="minor"/>
-    </dgm:style>
-  </dgm:styleLbl>
-  <dgm:styleLbl name="fgAcc4">
-    <dgm:scene3d>
-      <a:camera prst="orthographicFront"/>
-      <a:lightRig rig="threePt" dir="t"/>
-    </dgm:scene3d>
-    <dgm:sp3d/>
-    <dgm:txPr/>
-    <dgm:style>
-      <a:lnRef idx="2">
-        <a:scrgbClr r="0" g="0" b="0"/>
-      </a:lnRef>
-      <a:fillRef idx="1">
-        <a:scrgbClr r="0" g="0" b="0"/>
-      </a:fillRef>
-      <a:effectRef idx="0">
-        <a:scrgbClr r="0" g="0" b="0"/>
-      </a:effectRef>
-      <a:fontRef idx="minor"/>
-    </dgm:style>
-  </dgm:styleLbl>
-  <dgm:styleLbl name="bgShp">
-    <dgm:scene3d>
-      <a:camera prst="orthographicFront"/>
-      <a:lightRig rig="threePt" dir="t"/>
-    </dgm:scene3d>
-    <dgm:sp3d/>
-    <dgm:txPr/>
-    <dgm:style>
-      <a:lnRef idx="0">
-        <a:scrgbClr r="0" g="0" b="0"/>
-      </a:lnRef>
-      <a:fillRef idx="1">
-        <a:scrgbClr r="0" g="0" b="0"/>
-      </a:fillRef>
-      <a:effectRef idx="0">
-        <a:scrgbClr r="0" g="0" b="0"/>
-      </a:effectRef>
-      <a:fontRef idx="minor"/>
-    </dgm:style>
-  </dgm:styleLbl>
-  <dgm:styleLbl name="dkBgShp">
-    <dgm:scene3d>
-      <a:camera prst="orthographicFront"/>
-      <a:lightRig rig="threePt" dir="t"/>
-    </dgm:scene3d>
-    <dgm:sp3d/>
-    <dgm:txPr/>
-    <dgm:style>
-      <a:lnRef idx="0">
-        <a:scrgbClr r="0" g="0" b="0"/>
-      </a:lnRef>
-      <a:fillRef idx="1">
-        <a:scrgbClr r="0" g="0" b="0"/>
-      </a:fillRef>
-      <a:effectRef idx="0">
-        <a:scrgbClr r="0" g="0" b="0"/>
-      </a:effectRef>
-      <a:fontRef idx="minor"/>
-    </dgm:style>
-  </dgm:styleLbl>
-  <dgm:styleLbl name="trBgShp">
-    <dgm:scene3d>
-      <a:camera prst="orthographicFront"/>
-      <a:lightRig rig="threePt" dir="t"/>
-    </dgm:scene3d>
-    <dgm:sp3d/>
-    <dgm:txPr/>
-    <dgm:style>
-      <a:lnRef idx="0">
-        <a:scrgbClr r="0" g="0" b="0"/>
-      </a:lnRef>
-      <a:fillRef idx="1">
-        <a:scrgbClr r="0" g="0" b="0"/>
-      </a:fillRef>
-      <a:effectRef idx="0">
-        <a:scrgbClr r="0" g="0" b="0"/>
-      </a:effectRef>
-      <a:fontRef idx="minor"/>
-    </dgm:style>
-  </dgm:styleLbl>
-  <dgm:styleLbl name="fgShp">
-    <dgm:scene3d>
-      <a:camera prst="orthographicFront"/>
-      <a:lightRig rig="threePt" dir="t"/>
-    </dgm:scene3d>
-    <dgm:sp3d/>
-    <dgm:txPr/>
-    <dgm:style>
-      <a:lnRef idx="2">
-        <a:scrgbClr r="0" g="0" b="0"/>
-      </a:lnRef>
-      <a:fillRef idx="1">
-        <a:scrgbClr r="0" g="0" b="0"/>
-      </a:fillRef>
-      <a:effectRef idx="0">
         <a:scrgbClr r="0" g="0" b="0"/>
       </a:effectRef>
       <a:fontRef idx="minor"/>
@@ -11669,7 +9425,7 @@
           <a:lstStyle/>
           <a:p>
             <a:r>
-              <a:rPr lang="en-GB" sz="9600" dirty="0">
+              <a:rPr lang="en-GB" sz="9600">
                 <a:latin typeface="Aptos Slab ExtraBold" panose="020B0004020202020204" pitchFamily="34" charset="0"/>
               </a:rPr>
               <a:t>Locked</a:t>
@@ -11704,18 +9460,18 @@
           <a:lstStyle/>
           <a:p>
             <a:r>
-              <a:rPr lang="en-GB" dirty="0">
+              <a:rPr lang="en-GB">
                 <a:latin typeface="Aptos Slab ExtraBold" panose="020F0502020204030204" pitchFamily="34" charset="0"/>
               </a:rPr>
               <a:t>By The </a:t>
             </a:r>
             <a:r>
-              <a:rPr lang="en-GB" dirty="0" err="1">
+              <a:rPr lang="en-GB" err="1">
                 <a:latin typeface="Aptos Slab ExtraBold" panose="020F0502020204030204" pitchFamily="34" charset="0"/>
               </a:rPr>
               <a:t>Doomscrollers</a:t>
             </a:r>
-            <a:endParaRPr lang="en-GB" dirty="0">
+            <a:endParaRPr lang="en-GB">
               <a:latin typeface="Aptos Slab ExtraBold" panose="020F0502020204030204" pitchFamily="34" charset="0"/>
             </a:endParaRPr>
           </a:p>
@@ -11735,6 +9491,122 @@
 </file>
 
 <file path=ppt/slides/slide2.xml><?xml version="1.0" encoding="utf-8"?>
+<p:sld xmlns:a="http://schemas.openxmlformats.org/drawingml/2006/main" xmlns:r="http://schemas.openxmlformats.org/officeDocument/2006/relationships" xmlns:p="http://schemas.openxmlformats.org/presentationml/2006/main">
+  <p:cSld>
+    <p:spTree>
+      <p:nvGrpSpPr>
+        <p:cNvPr id="1" name=""/>
+        <p:cNvGrpSpPr/>
+        <p:nvPr/>
+      </p:nvGrpSpPr>
+      <p:grpSpPr>
+        <a:xfrm>
+          <a:off x="0" y="0"/>
+          <a:ext cx="0" cy="0"/>
+          <a:chOff x="0" y="0"/>
+          <a:chExt cx="0" cy="0"/>
+        </a:xfrm>
+      </p:grpSpPr>
+      <p:sp>
+        <p:nvSpPr>
+          <p:cNvPr id="2" name="标题 1">
+            <a:extLst>
+              <a:ext uri="{FF2B5EF4-FFF2-40B4-BE49-F238E27FC236}">
+                <a16:creationId xmlns:a16="http://schemas.microsoft.com/office/drawing/2014/main" id="{6D0A5DA4-0D1C-A011-A971-2BFB0944346F}"/>
+              </a:ext>
+            </a:extLst>
+          </p:cNvPr>
+          <p:cNvSpPr>
+            <a:spLocks noGrp="1"/>
+          </p:cNvSpPr>
+          <p:nvPr>
+            <p:ph type="title"/>
+          </p:nvPr>
+        </p:nvSpPr>
+        <p:spPr/>
+        <p:txBody>
+          <a:bodyPr/>
+          <a:lstStyle/>
+          <a:p>
+            <a:endParaRPr lang="zh-CN" altLang="en-US"/>
+          </a:p>
+        </p:txBody>
+      </p:sp>
+      <p:sp>
+        <p:nvSpPr>
+          <p:cNvPr id="3" name="内容占位符 2">
+            <a:extLst>
+              <a:ext uri="{FF2B5EF4-FFF2-40B4-BE49-F238E27FC236}">
+                <a16:creationId xmlns:a16="http://schemas.microsoft.com/office/drawing/2014/main" id="{97175DC6-2634-7B7B-95C6-823918867729}"/>
+              </a:ext>
+            </a:extLst>
+          </p:cNvPr>
+          <p:cNvSpPr>
+            <a:spLocks noGrp="1"/>
+          </p:cNvSpPr>
+          <p:nvPr>
+            <p:ph idx="1"/>
+          </p:nvPr>
+        </p:nvSpPr>
+        <p:spPr/>
+        <p:txBody>
+          <a:bodyPr/>
+          <a:lstStyle/>
+          <a:p>
+            <a:endParaRPr lang="zh-CN" altLang="en-US"/>
+          </a:p>
+        </p:txBody>
+      </p:sp>
+      <p:pic>
+        <p:nvPicPr>
+          <p:cNvPr id="5" name="图片 4">
+            <a:extLst>
+              <a:ext uri="{FF2B5EF4-FFF2-40B4-BE49-F238E27FC236}">
+                <a16:creationId xmlns:a16="http://schemas.microsoft.com/office/drawing/2014/main" id="{298CF924-9D23-B22D-311E-BA268DA85C92}"/>
+              </a:ext>
+            </a:extLst>
+          </p:cNvPr>
+          <p:cNvPicPr>
+            <a:picLocks noChangeAspect="1"/>
+          </p:cNvPicPr>
+          <p:nvPr/>
+        </p:nvPicPr>
+        <p:blipFill>
+          <a:blip r:embed="rId2">
+            <a:extLst>
+              <a:ext uri="{28A0092B-C50C-407E-A947-70E740481C1C}">
+                <a14:useLocalDpi xmlns:a14="http://schemas.microsoft.com/office/drawing/2010/main" val="0"/>
+              </a:ext>
+            </a:extLst>
+          </a:blip>
+          <a:stretch>
+            <a:fillRect/>
+          </a:stretch>
+        </p:blipFill>
+        <p:spPr>
+          <a:xfrm>
+            <a:off x="0" y="10986"/>
+            <a:ext cx="12251342" cy="6891380"/>
+          </a:xfrm>
+          <a:prstGeom prst="rect">
+            <a:avLst/>
+          </a:prstGeom>
+        </p:spPr>
+      </p:pic>
+    </p:spTree>
+    <p:extLst>
+      <p:ext uri="{BB962C8B-B14F-4D97-AF65-F5344CB8AC3E}">
+        <p14:creationId xmlns:p14="http://schemas.microsoft.com/office/powerpoint/2010/main" val="3334381146"/>
+      </p:ext>
+    </p:extLst>
+  </p:cSld>
+  <p:clrMapOvr>
+    <a:masterClrMapping/>
+  </p:clrMapOvr>
+</p:sld>
+</file>
+
+<file path=ppt/slides/slide3.xml><?xml version="1.0" encoding="utf-8"?>
 <p:sld xmlns:a="http://schemas.openxmlformats.org/drawingml/2006/main" xmlns:r="http://schemas.openxmlformats.org/officeDocument/2006/relationships" xmlns:p="http://schemas.openxmlformats.org/presentationml/2006/main">
   <p:cSld>
     <p:bg>
@@ -11900,7 +9772,7 @@
         </p:nvSpPr>
         <p:spPr>
           <a:xfrm>
-            <a:off x="804672" y="802955"/>
+            <a:off x="222046" y="0"/>
             <a:ext cx="4977976" cy="1454051"/>
           </a:xfrm>
         </p:spPr>
@@ -11911,12 +9783,12 @@
           <a:lstStyle/>
           <a:p>
             <a:r>
-              <a:rPr lang="en-GB" sz="3600">
+              <a:rPr lang="en-GB" sz="3600" b="1">
                 <a:solidFill>
                   <a:schemeClr val="tx2"/>
                 </a:solidFill>
               </a:rPr>
-              <a:t>Problem</a:t>
+              <a:t>PROBLEM</a:t>
             </a:r>
           </a:p>
         </p:txBody>
@@ -11939,8 +9811,8 @@
         </p:nvSpPr>
         <p:spPr>
           <a:xfrm>
-            <a:off x="804672" y="2421682"/>
-            <a:ext cx="4977578" cy="3639289"/>
+            <a:off x="804671" y="1629090"/>
+            <a:ext cx="7101247" cy="4431882"/>
           </a:xfrm>
         </p:spPr>
         <p:txBody>
@@ -11950,36 +9822,40 @@
           <a:lstStyle/>
           <a:p>
             <a:r>
-              <a:rPr lang="en-GB" sz="1800" dirty="0">
+              <a:rPr lang="en-GB" sz="4400" b="1">
                 <a:solidFill>
                   <a:schemeClr val="tx2"/>
                 </a:solidFill>
               </a:rPr>
-              <a:t>Students often struggle with concentration and focus, as there are distractions, like phones</a:t>
+              <a:t>concentration and focus</a:t>
             </a:r>
           </a:p>
           <a:p>
+            <a:endParaRPr lang="en-GB" sz="4400" b="1">
+              <a:solidFill>
+                <a:schemeClr val="tx2"/>
+              </a:solidFill>
+            </a:endParaRPr>
+          </a:p>
+          <a:p>
             <a:r>
-              <a:rPr lang="en-GB" sz="1800" dirty="0">
+              <a:rPr lang="en-GB" sz="4400" b="1">
                 <a:solidFill>
                   <a:schemeClr val="tx2"/>
                 </a:solidFill>
               </a:rPr>
-              <a:t>Poor focus can increase stress and mental wellbeing, as a student might have a deadline or their work may force them to work at very late hours.</a:t>
+              <a:t>stress and mental wellbeing</a:t>
             </a:r>
           </a:p>
           <a:p>
-            <a:r>
-              <a:rPr lang="en-GB" sz="1800" dirty="0">
-                <a:solidFill>
-                  <a:schemeClr val="tx2"/>
-                </a:solidFill>
-              </a:rPr>
-              <a:t>Students can also suffer from burnout, which causes mental fatigue</a:t>
-            </a:r>
+            <a:endParaRPr lang="en-GB" sz="4400" b="1">
+              <a:solidFill>
+                <a:schemeClr val="tx2"/>
+              </a:solidFill>
+            </a:endParaRPr>
           </a:p>
           <a:p>
-            <a:endParaRPr lang="en-GB" sz="1800" dirty="0">
+            <a:endParaRPr lang="en-GB" sz="4400" b="1">
               <a:solidFill>
                 <a:schemeClr val="tx2"/>
               </a:solidFill>
@@ -14821,7 +12697,7 @@
 </p:sld>
 </file>
 
-<file path=ppt/slides/slide3.xml><?xml version="1.0" encoding="utf-8"?>
+<file path=ppt/slides/slide4.xml><?xml version="1.0" encoding="utf-8"?>
 <p:sld xmlns:a="http://schemas.openxmlformats.org/drawingml/2006/main" xmlns:r="http://schemas.openxmlformats.org/officeDocument/2006/relationships" xmlns:p="http://schemas.openxmlformats.org/presentationml/2006/main">
   <p:cSld>
     <p:bg>
@@ -14938,7 +12814,6 @@
               <a:rPr lang="en-GB"/>
               <a:t>Solution: Locked</a:t>
             </a:r>
-            <a:endParaRPr lang="en-GB" dirty="0"/>
           </a:p>
         </p:txBody>
       </p:sp>
@@ -15095,7 +12970,7 @@
             <p:ph idx="1"/>
             <p:extLst>
               <p:ext uri="{D42A27DB-BD31-4B8C-83A1-F6EECF244321}">
-                <p14:modId xmlns:p14="http://schemas.microsoft.com/office/powerpoint/2010/main" val="4028490461"/>
+                <p14:modId xmlns:p14="http://schemas.microsoft.com/office/powerpoint/2010/main" val="1772680677"/>
               </p:ext>
             </p:extLst>
           </p:nvPr>
@@ -15123,7 +12998,268 @@
 </p:sld>
 </file>
 
-<file path=ppt/slides/slide4.xml><?xml version="1.0" encoding="utf-8"?>
+<file path=ppt/slides/slide5.xml><?xml version="1.0" encoding="utf-8"?>
+<p:sld xmlns:a="http://schemas.openxmlformats.org/drawingml/2006/main" xmlns:r="http://schemas.openxmlformats.org/officeDocument/2006/relationships" xmlns:p="http://schemas.openxmlformats.org/presentationml/2006/main">
+  <p:cSld>
+    <p:spTree>
+      <p:nvGrpSpPr>
+        <p:cNvPr id="1" name=""/>
+        <p:cNvGrpSpPr/>
+        <p:nvPr/>
+      </p:nvGrpSpPr>
+      <p:grpSpPr>
+        <a:xfrm>
+          <a:off x="0" y="0"/>
+          <a:ext cx="0" cy="0"/>
+          <a:chOff x="0" y="0"/>
+          <a:chExt cx="0" cy="0"/>
+        </a:xfrm>
+      </p:grpSpPr>
+      <p:sp>
+        <p:nvSpPr>
+          <p:cNvPr id="2" name="标题 1">
+            <a:extLst>
+              <a:ext uri="{FF2B5EF4-FFF2-40B4-BE49-F238E27FC236}">
+                <a16:creationId xmlns:a16="http://schemas.microsoft.com/office/drawing/2014/main" id="{5BDE9020-E17F-ACD1-FC9C-7511FC7A9121}"/>
+              </a:ext>
+            </a:extLst>
+          </p:cNvPr>
+          <p:cNvSpPr>
+            <a:spLocks noGrp="1"/>
+          </p:cNvSpPr>
+          <p:nvPr>
+            <p:ph type="title"/>
+          </p:nvPr>
+        </p:nvSpPr>
+        <p:spPr/>
+        <p:txBody>
+          <a:bodyPr/>
+          <a:lstStyle/>
+          <a:p>
+            <a:endParaRPr lang="zh-CN" altLang="en-US"/>
+          </a:p>
+        </p:txBody>
+      </p:sp>
+      <p:pic>
+        <p:nvPicPr>
+          <p:cNvPr id="5" name="内容占位符 4">
+            <a:extLst>
+              <a:ext uri="{FF2B5EF4-FFF2-40B4-BE49-F238E27FC236}">
+                <a16:creationId xmlns:a16="http://schemas.microsoft.com/office/drawing/2014/main" id="{C4FD544F-E1DE-4B46-0489-AA1FC6B0B34E}"/>
+              </a:ext>
+            </a:extLst>
+          </p:cNvPr>
+          <p:cNvPicPr>
+            <a:picLocks noGrp="1" noChangeAspect="1"/>
+          </p:cNvPicPr>
+          <p:nvPr>
+            <p:ph idx="1"/>
+          </p:nvPr>
+        </p:nvPicPr>
+        <p:blipFill>
+          <a:blip r:embed="rId2">
+            <a:extLst>
+              <a:ext uri="{28A0092B-C50C-407E-A947-70E740481C1C}">
+                <a14:useLocalDpi xmlns:a14="http://schemas.microsoft.com/office/drawing/2010/main" val="0"/>
+              </a:ext>
+            </a:extLst>
+          </a:blip>
+          <a:stretch>
+            <a:fillRect/>
+          </a:stretch>
+        </p:blipFill>
+        <p:spPr>
+          <a:xfrm>
+            <a:off x="0" y="47035"/>
+            <a:ext cx="12024765" cy="6763930"/>
+          </a:xfrm>
+          <a:prstGeom prst="rect">
+            <a:avLst/>
+          </a:prstGeom>
+        </p:spPr>
+      </p:pic>
+      <p:sp>
+        <p:nvSpPr>
+          <p:cNvPr id="6" name="矩形 5">
+            <a:extLst>
+              <a:ext uri="{FF2B5EF4-FFF2-40B4-BE49-F238E27FC236}">
+                <a16:creationId xmlns:a16="http://schemas.microsoft.com/office/drawing/2014/main" id="{D159B870-DCE8-304D-A20E-26455E927ACC}"/>
+              </a:ext>
+            </a:extLst>
+          </p:cNvPr>
+          <p:cNvSpPr/>
+          <p:nvPr/>
+        </p:nvSpPr>
+        <p:spPr>
+          <a:xfrm>
+            <a:off x="7800721" y="2963033"/>
+            <a:ext cx="3689969" cy="931933"/>
+          </a:xfrm>
+          <a:prstGeom prst="rect">
+            <a:avLst/>
+          </a:prstGeom>
+          <a:solidFill>
+            <a:schemeClr val="accent2"/>
+          </a:solidFill>
+          <a:ln>
+            <a:noFill/>
+          </a:ln>
+        </p:spPr>
+        <p:style>
+          <a:lnRef idx="2">
+            <a:schemeClr val="accent1">
+              <a:shade val="15000"/>
+            </a:schemeClr>
+          </a:lnRef>
+          <a:fillRef idx="1">
+            <a:schemeClr val="accent1"/>
+          </a:fillRef>
+          <a:effectRef idx="0">
+            <a:schemeClr val="accent1"/>
+          </a:effectRef>
+          <a:fontRef idx="minor">
+            <a:schemeClr val="lt1"/>
+          </a:fontRef>
+        </p:style>
+        <p:txBody>
+          <a:bodyPr rtlCol="0" anchor="ctr"/>
+          <a:lstStyle/>
+          <a:p>
+            <a:pPr algn="ctr"/>
+            <a:r>
+              <a:rPr lang="en-US" altLang="zh-CN" sz="3200" b="1"/>
+              <a:t>VIBRATION</a:t>
+            </a:r>
+            <a:endParaRPr lang="zh-CN" altLang="en-US" sz="3200" b="1"/>
+          </a:p>
+        </p:txBody>
+      </p:sp>
+      <p:sp>
+        <p:nvSpPr>
+          <p:cNvPr id="7" name="矩形 6">
+            <a:extLst>
+              <a:ext uri="{FF2B5EF4-FFF2-40B4-BE49-F238E27FC236}">
+                <a16:creationId xmlns:a16="http://schemas.microsoft.com/office/drawing/2014/main" id="{133386A9-765D-5237-C6DE-4EE0134D82B5}"/>
+              </a:ext>
+            </a:extLst>
+          </p:cNvPr>
+          <p:cNvSpPr/>
+          <p:nvPr/>
+        </p:nvSpPr>
+        <p:spPr>
+          <a:xfrm>
+            <a:off x="7443325" y="5560943"/>
+            <a:ext cx="2259026" cy="931932"/>
+          </a:xfrm>
+          <a:prstGeom prst="rect">
+            <a:avLst/>
+          </a:prstGeom>
+          <a:solidFill>
+            <a:schemeClr val="accent2"/>
+          </a:solidFill>
+          <a:ln>
+            <a:noFill/>
+          </a:ln>
+        </p:spPr>
+        <p:style>
+          <a:lnRef idx="2">
+            <a:schemeClr val="accent1">
+              <a:shade val="15000"/>
+            </a:schemeClr>
+          </a:lnRef>
+          <a:fillRef idx="1">
+            <a:schemeClr val="accent1"/>
+          </a:fillRef>
+          <a:effectRef idx="0">
+            <a:schemeClr val="accent1"/>
+          </a:effectRef>
+          <a:fontRef idx="minor">
+            <a:schemeClr val="lt1"/>
+          </a:fontRef>
+        </p:style>
+        <p:txBody>
+          <a:bodyPr rtlCol="0" anchor="ctr"/>
+          <a:lstStyle/>
+          <a:p>
+            <a:pPr algn="ctr"/>
+            <a:r>
+              <a:rPr lang="en-US" altLang="zh-CN" sz="3200" b="1"/>
+              <a:t>LED</a:t>
+            </a:r>
+            <a:endParaRPr lang="zh-CN" altLang="en-US" sz="3200" b="1"/>
+          </a:p>
+        </p:txBody>
+      </p:sp>
+      <p:sp>
+        <p:nvSpPr>
+          <p:cNvPr id="8" name="矩形 7">
+            <a:extLst>
+              <a:ext uri="{FF2B5EF4-FFF2-40B4-BE49-F238E27FC236}">
+                <a16:creationId xmlns:a16="http://schemas.microsoft.com/office/drawing/2014/main" id="{E300AE15-7057-197B-4101-FB87A492DDB9}"/>
+              </a:ext>
+            </a:extLst>
+          </p:cNvPr>
+          <p:cNvSpPr/>
+          <p:nvPr/>
+        </p:nvSpPr>
+        <p:spPr>
+          <a:xfrm>
+            <a:off x="838200" y="5438214"/>
+            <a:ext cx="3497783" cy="931932"/>
+          </a:xfrm>
+          <a:prstGeom prst="rect">
+            <a:avLst/>
+          </a:prstGeom>
+          <a:solidFill>
+            <a:schemeClr val="accent2"/>
+          </a:solidFill>
+          <a:ln>
+            <a:noFill/>
+          </a:ln>
+        </p:spPr>
+        <p:style>
+          <a:lnRef idx="2">
+            <a:schemeClr val="accent1">
+              <a:shade val="15000"/>
+            </a:schemeClr>
+          </a:lnRef>
+          <a:fillRef idx="1">
+            <a:schemeClr val="accent1"/>
+          </a:fillRef>
+          <a:effectRef idx="0">
+            <a:schemeClr val="accent1"/>
+          </a:effectRef>
+          <a:fontRef idx="minor">
+            <a:schemeClr val="lt1"/>
+          </a:fontRef>
+        </p:style>
+        <p:txBody>
+          <a:bodyPr rtlCol="0" anchor="ctr"/>
+          <a:lstStyle/>
+          <a:p>
+            <a:pPr algn="ctr"/>
+            <a:r>
+              <a:rPr lang="en-US" altLang="zh-CN" sz="3200" b="1"/>
+              <a:t>METAL PLATE</a:t>
+            </a:r>
+            <a:endParaRPr lang="zh-CN" altLang="en-US" sz="3200" b="1"/>
+          </a:p>
+        </p:txBody>
+      </p:sp>
+    </p:spTree>
+    <p:extLst>
+      <p:ext uri="{BB962C8B-B14F-4D97-AF65-F5344CB8AC3E}">
+        <p14:creationId xmlns:p14="http://schemas.microsoft.com/office/powerpoint/2010/main" val="3269207892"/>
+      </p:ext>
+    </p:extLst>
+  </p:cSld>
+  <p:clrMapOvr>
+    <a:masterClrMapping/>
+  </p:clrMapOvr>
+</p:sld>
+</file>
+
+<file path=ppt/slides/slide6.xml><?xml version="1.0" encoding="utf-8"?>
 <p:sld xmlns:a="http://schemas.openxmlformats.org/drawingml/2006/main" xmlns:r="http://schemas.openxmlformats.org/officeDocument/2006/relationships" xmlns:p="http://schemas.openxmlformats.org/presentationml/2006/main">
   <p:cSld>
     <p:bg>
@@ -15280,14 +13416,14 @@
             <p:ph idx="1"/>
             <p:extLst>
               <p:ext uri="{D42A27DB-BD31-4B8C-83A1-F6EECF244321}">
-                <p14:modId xmlns:p14="http://schemas.microsoft.com/office/powerpoint/2010/main" val="2891255820"/>
+                <p14:modId xmlns:p14="http://schemas.microsoft.com/office/powerpoint/2010/main" val="2293308885"/>
               </p:ext>
             </p:extLst>
           </p:nvPr>
         </p:nvGraphicFramePr>
         <p:xfrm>
-          <a:off x="376766" y="874712"/>
-          <a:ext cx="11438467" cy="5108576"/>
+          <a:off x="376766" y="372233"/>
+          <a:ext cx="7707177" cy="6230867"/>
         </p:xfrm>
         <a:graphic>
           <a:graphicData uri="http://schemas.openxmlformats.org/drawingml/2006/diagram">
@@ -15295,6 +13431,263 @@
           </a:graphicData>
         </a:graphic>
       </p:graphicFrame>
+      <p:grpSp>
+        <p:nvGrpSpPr>
+          <p:cNvPr id="2" name="组合 1">
+            <a:extLst>
+              <a:ext uri="{FF2B5EF4-FFF2-40B4-BE49-F238E27FC236}">
+                <a16:creationId xmlns:a16="http://schemas.microsoft.com/office/drawing/2014/main" id="{7814B468-1EE3-F036-1464-4BA52CF7B8F7}"/>
+              </a:ext>
+            </a:extLst>
+          </p:cNvPr>
+          <p:cNvGrpSpPr/>
+          <p:nvPr/>
+        </p:nvGrpSpPr>
+        <p:grpSpPr>
+          <a:xfrm>
+            <a:off x="9227723" y="2808373"/>
+            <a:ext cx="2675661" cy="1514057"/>
+            <a:chOff x="2738299" y="4258517"/>
+            <a:chExt cx="3039782" cy="1823869"/>
+          </a:xfrm>
+        </p:grpSpPr>
+        <p:sp>
+          <p:nvSpPr>
+            <p:cNvPr id="3" name="矩形 2">
+              <a:extLst>
+                <a:ext uri="{FF2B5EF4-FFF2-40B4-BE49-F238E27FC236}">
+                  <a16:creationId xmlns:a16="http://schemas.microsoft.com/office/drawing/2014/main" id="{FBAACA81-54D4-CDBC-FF98-1EA229D835DC}"/>
+                </a:ext>
+              </a:extLst>
+            </p:cNvPr>
+            <p:cNvSpPr/>
+            <p:nvPr/>
+          </p:nvSpPr>
+          <p:spPr>
+            <a:xfrm>
+              <a:off x="2738299" y="4258517"/>
+              <a:ext cx="3039782" cy="1823869"/>
+            </a:xfrm>
+            <a:prstGeom prst="rect">
+              <a:avLst/>
+            </a:prstGeom>
+          </p:spPr>
+          <p:style>
+            <a:lnRef idx="3">
+              <a:schemeClr val="lt1">
+                <a:hueOff val="0"/>
+                <a:satOff val="0"/>
+                <a:lumOff val="0"/>
+                <a:alphaOff val="0"/>
+              </a:schemeClr>
+            </a:lnRef>
+            <a:fillRef idx="1">
+              <a:schemeClr val="accent2">
+                <a:hueOff val="6443614"/>
+                <a:satOff val="-18493"/>
+                <a:lumOff val="-29609"/>
+                <a:alphaOff val="0"/>
+              </a:schemeClr>
+            </a:fillRef>
+            <a:effectRef idx="1">
+              <a:schemeClr val="accent2">
+                <a:hueOff val="6443614"/>
+                <a:satOff val="-18493"/>
+                <a:lumOff val="-29609"/>
+                <a:alphaOff val="0"/>
+              </a:schemeClr>
+            </a:effectRef>
+            <a:fontRef idx="minor">
+              <a:schemeClr val="lt1"/>
+            </a:fontRef>
+          </p:style>
+          <p:txBody>
+            <a:bodyPr/>
+            <a:lstStyle/>
+            <a:p>
+              <a:endParaRPr lang="zh-CN" altLang="en-US" sz="3600"/>
+            </a:p>
+          </p:txBody>
+        </p:sp>
+        <p:sp>
+          <p:nvSpPr>
+            <p:cNvPr id="4" name="文本框 3">
+              <a:extLst>
+                <a:ext uri="{FF2B5EF4-FFF2-40B4-BE49-F238E27FC236}">
+                  <a16:creationId xmlns:a16="http://schemas.microsoft.com/office/drawing/2014/main" id="{BD30F49C-B77C-6A31-C2D5-C7B8141C5D82}"/>
+                </a:ext>
+              </a:extLst>
+            </p:cNvPr>
+            <p:cNvSpPr txBox="1"/>
+            <p:nvPr/>
+          </p:nvSpPr>
+          <p:spPr>
+            <a:xfrm>
+              <a:off x="2738299" y="4258517"/>
+              <a:ext cx="3039782" cy="1823869"/>
+            </a:xfrm>
+            <a:prstGeom prst="rect">
+              <a:avLst/>
+            </a:prstGeom>
+          </p:spPr>
+          <p:style>
+            <a:lnRef idx="0">
+              <a:scrgbClr r="0" g="0" b="0"/>
+            </a:lnRef>
+            <a:fillRef idx="0">
+              <a:scrgbClr r="0" g="0" b="0"/>
+            </a:fillRef>
+            <a:effectRef idx="0">
+              <a:scrgbClr r="0" g="0" b="0"/>
+            </a:effectRef>
+            <a:fontRef idx="minor">
+              <a:schemeClr val="lt1"/>
+            </a:fontRef>
+          </p:style>
+          <p:txBody>
+            <a:bodyPr spcFirstLastPara="0" vert="horz" wrap="square" lIns="95250" tIns="95250" rIns="95250" bIns="95250" numCol="1" spcCol="1270" anchor="ctr" anchorCtr="0">
+              <a:noAutofit/>
+            </a:bodyPr>
+            <a:lstStyle/>
+            <a:p>
+              <a:pPr marL="0" lvl="0" indent="0" algn="ctr" defTabSz="1111250">
+                <a:lnSpc>
+                  <a:spcPct val="90000"/>
+                </a:lnSpc>
+                <a:spcBef>
+                  <a:spcPct val="0"/>
+                </a:spcBef>
+                <a:spcAft>
+                  <a:spcPct val="35000"/>
+                </a:spcAft>
+                <a:buNone/>
+              </a:pPr>
+              <a:r>
+                <a:rPr lang="en-GB" sz="4400" kern="1200"/>
+                <a:t>3 states</a:t>
+              </a:r>
+            </a:p>
+          </p:txBody>
+        </p:sp>
+      </p:grpSp>
+      <p:sp>
+        <p:nvSpPr>
+          <p:cNvPr id="7" name="箭头: 右 6">
+            <a:extLst>
+              <a:ext uri="{FF2B5EF4-FFF2-40B4-BE49-F238E27FC236}">
+                <a16:creationId xmlns:a16="http://schemas.microsoft.com/office/drawing/2014/main" id="{BAF4E6AD-368C-2A5D-629F-6C32A76061C3}"/>
+              </a:ext>
+            </a:extLst>
+          </p:cNvPr>
+          <p:cNvSpPr/>
+          <p:nvPr/>
+        </p:nvSpPr>
+        <p:spPr>
+          <a:xfrm>
+            <a:off x="8189140" y="3180170"/>
+            <a:ext cx="776835" cy="655455"/>
+          </a:xfrm>
+          <a:prstGeom prst="rightArrow">
+            <a:avLst/>
+          </a:prstGeom>
+        </p:spPr>
+        <p:style>
+          <a:lnRef idx="2">
+            <a:schemeClr val="accent1">
+              <a:shade val="15000"/>
+            </a:schemeClr>
+          </a:lnRef>
+          <a:fillRef idx="1">
+            <a:schemeClr val="accent1"/>
+          </a:fillRef>
+          <a:effectRef idx="0">
+            <a:schemeClr val="accent1"/>
+          </a:effectRef>
+          <a:fontRef idx="minor">
+            <a:schemeClr val="lt1"/>
+          </a:fontRef>
+        </p:style>
+        <p:txBody>
+          <a:bodyPr rtlCol="0" anchor="ctr"/>
+          <a:lstStyle/>
+          <a:p>
+            <a:pPr algn="ctr"/>
+            <a:endParaRPr lang="zh-CN" altLang="en-US"/>
+          </a:p>
+        </p:txBody>
+      </p:sp>
+      <p:sp>
+        <p:nvSpPr>
+          <p:cNvPr id="8" name="文本框 7">
+            <a:extLst>
+              <a:ext uri="{FF2B5EF4-FFF2-40B4-BE49-F238E27FC236}">
+                <a16:creationId xmlns:a16="http://schemas.microsoft.com/office/drawing/2014/main" id="{17C932BA-AC48-B4B1-AA31-881EEC4E11A9}"/>
+              </a:ext>
+            </a:extLst>
+          </p:cNvPr>
+          <p:cNvSpPr txBox="1"/>
+          <p:nvPr/>
+        </p:nvSpPr>
+        <p:spPr>
+          <a:xfrm>
+            <a:off x="2257827" y="372224"/>
+            <a:ext cx="3945054" cy="523220"/>
+          </a:xfrm>
+          <a:prstGeom prst="rect">
+            <a:avLst/>
+          </a:prstGeom>
+          <a:noFill/>
+        </p:spPr>
+        <p:txBody>
+          <a:bodyPr wrap="none" rtlCol="0">
+            <a:spAutoFit/>
+          </a:bodyPr>
+          <a:lstStyle/>
+          <a:p>
+            <a:r>
+              <a:rPr lang="en-US" altLang="zh-CN" sz="2800" b="1"/>
+              <a:t>Check phone on Table?</a:t>
+            </a:r>
+            <a:endParaRPr lang="zh-CN" altLang="en-US" sz="2800" b="1"/>
+          </a:p>
+        </p:txBody>
+      </p:sp>
+      <p:sp>
+        <p:nvSpPr>
+          <p:cNvPr id="10" name="文本框 9">
+            <a:extLst>
+              <a:ext uri="{FF2B5EF4-FFF2-40B4-BE49-F238E27FC236}">
+                <a16:creationId xmlns:a16="http://schemas.microsoft.com/office/drawing/2014/main" id="{5B988EC5-28DC-1D32-FFC0-4BC7F43CD760}"/>
+              </a:ext>
+            </a:extLst>
+          </p:cNvPr>
+          <p:cNvSpPr txBox="1"/>
+          <p:nvPr/>
+        </p:nvSpPr>
+        <p:spPr>
+          <a:xfrm>
+            <a:off x="2355249" y="3507897"/>
+            <a:ext cx="6105440" cy="523220"/>
+          </a:xfrm>
+          <a:prstGeom prst="rect">
+            <a:avLst/>
+          </a:prstGeom>
+          <a:noFill/>
+        </p:spPr>
+        <p:txBody>
+          <a:bodyPr wrap="square">
+            <a:spAutoFit/>
+          </a:bodyPr>
+          <a:lstStyle/>
+          <a:p>
+            <a:r>
+              <a:rPr lang="en-US" altLang="zh-CN" sz="2800" b="1"/>
+              <a:t>Check Study Status</a:t>
+            </a:r>
+            <a:endParaRPr lang="zh-CN" altLang="en-US" sz="2800" b="1"/>
+          </a:p>
+        </p:txBody>
+      </p:sp>
     </p:spTree>
     <p:extLst>
       <p:ext uri="{BB962C8B-B14F-4D97-AF65-F5344CB8AC3E}">
@@ -15308,7 +13701,7 @@
 </p:sld>
 </file>
 
-<file path=ppt/slides/slide5.xml><?xml version="1.0" encoding="utf-8"?>
+<file path=ppt/slides/slide7.xml><?xml version="1.0" encoding="utf-8"?>
 <p:sld xmlns:a="http://schemas.openxmlformats.org/drawingml/2006/main" xmlns:r="http://schemas.openxmlformats.org/officeDocument/2006/relationships" xmlns:p="http://schemas.openxmlformats.org/presentationml/2006/main">
   <p:cSld>
     <p:bg>
@@ -15487,7 +13880,7 @@
         </p:nvSpPr>
         <p:spPr>
           <a:xfrm>
-            <a:off x="838200" y="365125"/>
+            <a:off x="425506" y="122901"/>
             <a:ext cx="10515600" cy="1325563"/>
           </a:xfrm>
         </p:spPr>
@@ -15498,43 +13891,453 @@
           <a:lstStyle/>
           <a:p>
             <a:r>
-              <a:rPr lang="en-GB" dirty="0"/>
+              <a:rPr lang="en-GB"/>
               <a:t>States </a:t>
             </a:r>
           </a:p>
         </p:txBody>
       </p:sp>
-      <p:graphicFrame>
-        <p:nvGraphicFramePr>
-          <p:cNvPr id="5" name="Content Placeholder 2">
+      <p:grpSp>
+        <p:nvGrpSpPr>
+          <p:cNvPr id="3" name="组合 2">
             <a:extLst>
               <a:ext uri="{FF2B5EF4-FFF2-40B4-BE49-F238E27FC236}">
-                <a16:creationId xmlns:a16="http://schemas.microsoft.com/office/drawing/2014/main" id="{7BAC24A7-803C-AE1E-7EEC-369CC9AF2158}"/>
+                <a16:creationId xmlns:a16="http://schemas.microsoft.com/office/drawing/2014/main" id="{DC38FC60-D69A-D8A9-2419-29202631D06D}"/>
               </a:ext>
             </a:extLst>
           </p:cNvPr>
-          <p:cNvGraphicFramePr>
-            <a:graphicFrameLocks noGrp="1"/>
-          </p:cNvGraphicFramePr>
-          <p:nvPr>
-            <p:ph idx="1"/>
-            <p:extLst>
-              <p:ext uri="{D42A27DB-BD31-4B8C-83A1-F6EECF244321}">
-                <p14:modId xmlns:p14="http://schemas.microsoft.com/office/powerpoint/2010/main" val="941900475"/>
-              </p:ext>
-            </p:extLst>
-          </p:nvPr>
-        </p:nvGraphicFramePr>
-        <p:xfrm>
-          <a:off x="838200" y="1825625"/>
-          <a:ext cx="10515600" cy="4351338"/>
-        </p:xfrm>
-        <a:graphic>
-          <a:graphicData uri="http://schemas.openxmlformats.org/drawingml/2006/diagram">
-            <dgm:relIds xmlns:dgm="http://schemas.openxmlformats.org/drawingml/2006/diagram" xmlns:r="http://schemas.openxmlformats.org/officeDocument/2006/relationships" r:dm="rId3" r:lo="rId4" r:qs="rId5" r:cs="rId6"/>
-          </a:graphicData>
-        </a:graphic>
-      </p:graphicFrame>
+          <p:cNvGrpSpPr/>
+          <p:nvPr/>
+        </p:nvGrpSpPr>
+        <p:grpSpPr>
+          <a:xfrm>
+            <a:off x="1864593" y="1299531"/>
+            <a:ext cx="8379924" cy="1523829"/>
+            <a:chOff x="3364992" y="0"/>
+            <a:chExt cx="3785616" cy="1523829"/>
+          </a:xfrm>
+        </p:grpSpPr>
+        <p:sp>
+          <p:nvSpPr>
+            <p:cNvPr id="4" name="矩形: 圆角 3">
+              <a:extLst>
+                <a:ext uri="{FF2B5EF4-FFF2-40B4-BE49-F238E27FC236}">
+                  <a16:creationId xmlns:a16="http://schemas.microsoft.com/office/drawing/2014/main" id="{457D9BCC-C5B8-18F8-0361-9EFB9B84FE20}"/>
+                </a:ext>
+              </a:extLst>
+            </p:cNvPr>
+            <p:cNvSpPr/>
+            <p:nvPr/>
+          </p:nvSpPr>
+          <p:spPr>
+            <a:xfrm>
+              <a:off x="3364992" y="0"/>
+              <a:ext cx="3785616" cy="1523829"/>
+            </a:xfrm>
+            <a:prstGeom prst="roundRect">
+              <a:avLst/>
+            </a:prstGeom>
+            <a:solidFill>
+              <a:srgbClr val="00B050"/>
+            </a:solidFill>
+          </p:spPr>
+          <p:style>
+            <a:lnRef idx="2">
+              <a:schemeClr val="lt1">
+                <a:hueOff val="0"/>
+                <a:satOff val="0"/>
+                <a:lumOff val="0"/>
+                <a:alphaOff val="0"/>
+              </a:schemeClr>
+            </a:lnRef>
+            <a:fillRef idx="1">
+              <a:scrgbClr r="0" g="0" b="0"/>
+            </a:fillRef>
+            <a:effectRef idx="0">
+              <a:schemeClr val="accent2">
+                <a:hueOff val="0"/>
+                <a:satOff val="0"/>
+                <a:lumOff val="0"/>
+                <a:alphaOff val="0"/>
+              </a:schemeClr>
+            </a:effectRef>
+            <a:fontRef idx="minor">
+              <a:schemeClr val="lt1"/>
+            </a:fontRef>
+          </p:style>
+          <p:txBody>
+            <a:bodyPr/>
+            <a:lstStyle/>
+            <a:p>
+              <a:endParaRPr lang="zh-CN" altLang="en-US" sz="3600"/>
+            </a:p>
+          </p:txBody>
+        </p:sp>
+        <p:sp>
+          <p:nvSpPr>
+            <p:cNvPr id="6" name="矩形: 圆角 4">
+              <a:extLst>
+                <a:ext uri="{FF2B5EF4-FFF2-40B4-BE49-F238E27FC236}">
+                  <a16:creationId xmlns:a16="http://schemas.microsoft.com/office/drawing/2014/main" id="{C40AEA70-ABA5-3843-52FB-853B37F7D002}"/>
+                </a:ext>
+              </a:extLst>
+            </p:cNvPr>
+            <p:cNvSpPr txBox="1"/>
+            <p:nvPr/>
+          </p:nvSpPr>
+          <p:spPr>
+            <a:xfrm>
+              <a:off x="3439379" y="74387"/>
+              <a:ext cx="3636842" cy="1375055"/>
+            </a:xfrm>
+            <a:prstGeom prst="rect">
+              <a:avLst/>
+            </a:prstGeom>
+          </p:spPr>
+          <p:style>
+            <a:lnRef idx="0">
+              <a:scrgbClr r="0" g="0" b="0"/>
+            </a:lnRef>
+            <a:fillRef idx="0">
+              <a:scrgbClr r="0" g="0" b="0"/>
+            </a:fillRef>
+            <a:effectRef idx="0">
+              <a:scrgbClr r="0" g="0" b="0"/>
+            </a:effectRef>
+            <a:fontRef idx="minor">
+              <a:schemeClr val="lt1"/>
+            </a:fontRef>
+          </p:style>
+          <p:txBody>
+            <a:bodyPr spcFirstLastPara="0" vert="horz" wrap="square" lIns="87630" tIns="43815" rIns="87630" bIns="43815" numCol="1" spcCol="1270" anchor="ctr" anchorCtr="0">
+              <a:noAutofit/>
+            </a:bodyPr>
+            <a:lstStyle/>
+            <a:p>
+              <a:pPr marL="0" lvl="0" indent="0" algn="ctr" defTabSz="1022350">
+                <a:lnSpc>
+                  <a:spcPct val="90000"/>
+                </a:lnSpc>
+                <a:spcBef>
+                  <a:spcPct val="0"/>
+                </a:spcBef>
+                <a:spcAft>
+                  <a:spcPct val="35000"/>
+                </a:spcAft>
+                <a:buNone/>
+                <a:defRPr cap="all"/>
+              </a:pPr>
+              <a:r>
+                <a:rPr lang="en-GB" sz="4000" kern="1200">
+                  <a:solidFill>
+                    <a:schemeClr val="tx1"/>
+                  </a:solidFill>
+                </a:rPr>
+                <a:t>Locked-in </a:t>
+              </a:r>
+              <a:endParaRPr lang="en-US" sz="4000" kern="1200">
+                <a:solidFill>
+                  <a:schemeClr val="tx1"/>
+                </a:solidFill>
+              </a:endParaRPr>
+            </a:p>
+          </p:txBody>
+        </p:sp>
+      </p:grpSp>
+      <p:grpSp>
+        <p:nvGrpSpPr>
+          <p:cNvPr id="7" name="组合 6">
+            <a:extLst>
+              <a:ext uri="{FF2B5EF4-FFF2-40B4-BE49-F238E27FC236}">
+                <a16:creationId xmlns:a16="http://schemas.microsoft.com/office/drawing/2014/main" id="{9D3EA2CB-80C0-C9BB-C380-0A6299925012}"/>
+              </a:ext>
+            </a:extLst>
+          </p:cNvPr>
+          <p:cNvGrpSpPr/>
+          <p:nvPr/>
+        </p:nvGrpSpPr>
+        <p:grpSpPr>
+          <a:xfrm>
+            <a:off x="1856340" y="2982999"/>
+            <a:ext cx="8322036" cy="1374896"/>
+            <a:chOff x="3361238" y="144431"/>
+            <a:chExt cx="3785616" cy="2306523"/>
+          </a:xfrm>
+        </p:grpSpPr>
+        <p:sp>
+          <p:nvSpPr>
+            <p:cNvPr id="8" name="矩形: 圆角 7">
+              <a:extLst>
+                <a:ext uri="{FF2B5EF4-FFF2-40B4-BE49-F238E27FC236}">
+                  <a16:creationId xmlns:a16="http://schemas.microsoft.com/office/drawing/2014/main" id="{DDD41C37-96F0-89D3-B90D-7FAC2D59B969}"/>
+                </a:ext>
+              </a:extLst>
+            </p:cNvPr>
+            <p:cNvSpPr/>
+            <p:nvPr/>
+          </p:nvSpPr>
+          <p:spPr>
+            <a:xfrm>
+              <a:off x="3361238" y="144431"/>
+              <a:ext cx="3785616" cy="2306523"/>
+            </a:xfrm>
+            <a:prstGeom prst="roundRect">
+              <a:avLst/>
+            </a:prstGeom>
+            <a:solidFill>
+              <a:srgbClr val="FFFF00"/>
+            </a:solidFill>
+          </p:spPr>
+          <p:style>
+            <a:lnRef idx="2">
+              <a:schemeClr val="lt1">
+                <a:hueOff val="0"/>
+                <a:satOff val="0"/>
+                <a:lumOff val="0"/>
+                <a:alphaOff val="0"/>
+              </a:schemeClr>
+            </a:lnRef>
+            <a:fillRef idx="1">
+              <a:scrgbClr r="0" g="0" b="0"/>
+            </a:fillRef>
+            <a:effectRef idx="0">
+              <a:schemeClr val="accent2">
+                <a:hueOff val="0"/>
+                <a:satOff val="0"/>
+                <a:lumOff val="0"/>
+                <a:alphaOff val="0"/>
+              </a:schemeClr>
+            </a:effectRef>
+            <a:fontRef idx="minor">
+              <a:schemeClr val="lt1"/>
+            </a:fontRef>
+          </p:style>
+          <p:txBody>
+            <a:bodyPr/>
+            <a:lstStyle/>
+            <a:p>
+              <a:endParaRPr lang="zh-CN" altLang="en-US" sz="2800"/>
+            </a:p>
+          </p:txBody>
+        </p:sp>
+        <p:sp>
+          <p:nvSpPr>
+            <p:cNvPr id="9" name="矩形: 圆角 4">
+              <a:extLst>
+                <a:ext uri="{FF2B5EF4-FFF2-40B4-BE49-F238E27FC236}">
+                  <a16:creationId xmlns:a16="http://schemas.microsoft.com/office/drawing/2014/main" id="{3AA2CC05-D225-62C6-333E-E7916662B971}"/>
+                </a:ext>
+              </a:extLst>
+            </p:cNvPr>
+            <p:cNvSpPr txBox="1"/>
+            <p:nvPr/>
+          </p:nvSpPr>
+          <p:spPr>
+            <a:xfrm>
+              <a:off x="3473833" y="269222"/>
+              <a:ext cx="3560426" cy="2081333"/>
+            </a:xfrm>
+            <a:prstGeom prst="rect">
+              <a:avLst/>
+            </a:prstGeom>
+          </p:spPr>
+          <p:style>
+            <a:lnRef idx="0">
+              <a:scrgbClr r="0" g="0" b="0"/>
+            </a:lnRef>
+            <a:fillRef idx="0">
+              <a:scrgbClr r="0" g="0" b="0"/>
+            </a:fillRef>
+            <a:effectRef idx="0">
+              <a:scrgbClr r="0" g="0" b="0"/>
+            </a:effectRef>
+            <a:fontRef idx="minor">
+              <a:schemeClr val="lt1"/>
+            </a:fontRef>
+          </p:style>
+          <p:txBody>
+            <a:bodyPr spcFirstLastPara="0" vert="horz" wrap="square" lIns="106680" tIns="53340" rIns="106680" bIns="53340" numCol="1" spcCol="1270" anchor="ctr" anchorCtr="0">
+              <a:noAutofit/>
+            </a:bodyPr>
+            <a:lstStyle/>
+            <a:p>
+              <a:pPr marL="0" lvl="0" indent="0" algn="ctr" defTabSz="1244600">
+                <a:lnSpc>
+                  <a:spcPct val="90000"/>
+                </a:lnSpc>
+                <a:spcBef>
+                  <a:spcPct val="0"/>
+                </a:spcBef>
+                <a:spcAft>
+                  <a:spcPct val="35000"/>
+                </a:spcAft>
+                <a:buNone/>
+                <a:defRPr cap="all"/>
+              </a:pPr>
+              <a:r>
+                <a:rPr lang="en-GB" sz="4000" kern="1200">
+                  <a:solidFill>
+                    <a:schemeClr val="tx1"/>
+                  </a:solidFill>
+                </a:rPr>
+                <a:t>Distracted</a:t>
+              </a:r>
+              <a:r>
+                <a:rPr lang="en-GB" sz="4000" kern="1200"/>
+                <a:t> </a:t>
+              </a:r>
+              <a:endParaRPr lang="en-US" sz="4000" kern="1200"/>
+            </a:p>
+          </p:txBody>
+        </p:sp>
+      </p:grpSp>
+      <p:grpSp>
+        <p:nvGrpSpPr>
+          <p:cNvPr id="12" name="组合 11">
+            <a:extLst>
+              <a:ext uri="{FF2B5EF4-FFF2-40B4-BE49-F238E27FC236}">
+                <a16:creationId xmlns:a16="http://schemas.microsoft.com/office/drawing/2014/main" id="{30F3825E-E58D-8DB9-B417-0AD812F7AD6F}"/>
+              </a:ext>
+            </a:extLst>
+          </p:cNvPr>
+          <p:cNvGrpSpPr/>
+          <p:nvPr/>
+        </p:nvGrpSpPr>
+        <p:grpSpPr>
+          <a:xfrm>
+            <a:off x="1864593" y="4571492"/>
+            <a:ext cx="8313784" cy="1523829"/>
+            <a:chOff x="3364992" y="0"/>
+            <a:chExt cx="3785616" cy="4728489"/>
+          </a:xfrm>
+        </p:grpSpPr>
+        <p:sp>
+          <p:nvSpPr>
+            <p:cNvPr id="13" name="矩形: 圆角 12">
+              <a:extLst>
+                <a:ext uri="{FF2B5EF4-FFF2-40B4-BE49-F238E27FC236}">
+                  <a16:creationId xmlns:a16="http://schemas.microsoft.com/office/drawing/2014/main" id="{14B9B0F9-677D-8A49-A775-9739DCB35B0E}"/>
+                </a:ext>
+              </a:extLst>
+            </p:cNvPr>
+            <p:cNvSpPr/>
+            <p:nvPr/>
+          </p:nvSpPr>
+          <p:spPr>
+            <a:xfrm>
+              <a:off x="3364992" y="0"/>
+              <a:ext cx="3785616" cy="4728489"/>
+            </a:xfrm>
+            <a:prstGeom prst="roundRect">
+              <a:avLst/>
+            </a:prstGeom>
+            <a:solidFill>
+              <a:srgbClr val="FF0000"/>
+            </a:solidFill>
+          </p:spPr>
+          <p:style>
+            <a:lnRef idx="2">
+              <a:schemeClr val="lt1">
+                <a:hueOff val="0"/>
+                <a:satOff val="0"/>
+                <a:lumOff val="0"/>
+                <a:alphaOff val="0"/>
+              </a:schemeClr>
+            </a:lnRef>
+            <a:fillRef idx="1">
+              <a:scrgbClr r="0" g="0" b="0"/>
+            </a:fillRef>
+            <a:effectRef idx="0">
+              <a:schemeClr val="accent2">
+                <a:hueOff val="0"/>
+                <a:satOff val="0"/>
+                <a:lumOff val="0"/>
+                <a:alphaOff val="0"/>
+              </a:schemeClr>
+            </a:effectRef>
+            <a:fontRef idx="minor">
+              <a:schemeClr val="lt1"/>
+            </a:fontRef>
+          </p:style>
+          <p:txBody>
+            <a:bodyPr/>
+            <a:lstStyle/>
+            <a:p>
+              <a:endParaRPr lang="zh-CN" altLang="en-US"/>
+            </a:p>
+          </p:txBody>
+        </p:sp>
+        <p:sp>
+          <p:nvSpPr>
+            <p:cNvPr id="14" name="矩形: 圆角 4">
+              <a:extLst>
+                <a:ext uri="{FF2B5EF4-FFF2-40B4-BE49-F238E27FC236}">
+                  <a16:creationId xmlns:a16="http://schemas.microsoft.com/office/drawing/2014/main" id="{DCE1694A-2F90-94C7-DC6A-6B8743C0AF4D}"/>
+                </a:ext>
+              </a:extLst>
+            </p:cNvPr>
+            <p:cNvSpPr txBox="1"/>
+            <p:nvPr/>
+          </p:nvSpPr>
+          <p:spPr>
+            <a:xfrm>
+              <a:off x="3549791" y="726191"/>
+              <a:ext cx="3416018" cy="3817498"/>
+            </a:xfrm>
+            <a:prstGeom prst="rect">
+              <a:avLst/>
+            </a:prstGeom>
+          </p:spPr>
+          <p:style>
+            <a:lnRef idx="0">
+              <a:scrgbClr r="0" g="0" b="0"/>
+            </a:lnRef>
+            <a:fillRef idx="0">
+              <a:scrgbClr r="0" g="0" b="0"/>
+            </a:fillRef>
+            <a:effectRef idx="0">
+              <a:scrgbClr r="0" g="0" b="0"/>
+            </a:effectRef>
+            <a:fontRef idx="minor">
+              <a:schemeClr val="lt1"/>
+            </a:fontRef>
+          </p:style>
+          <p:txBody>
+            <a:bodyPr spcFirstLastPara="0" vert="horz" wrap="square" lIns="140970" tIns="70485" rIns="140970" bIns="70485" numCol="1" spcCol="1270" anchor="ctr" anchorCtr="0">
+              <a:noAutofit/>
+            </a:bodyPr>
+            <a:lstStyle/>
+            <a:p>
+              <a:pPr marL="0" lvl="0" indent="0" algn="ctr" defTabSz="1644650">
+                <a:lnSpc>
+                  <a:spcPct val="90000"/>
+                </a:lnSpc>
+                <a:spcBef>
+                  <a:spcPct val="0"/>
+                </a:spcBef>
+                <a:spcAft>
+                  <a:spcPct val="35000"/>
+                </a:spcAft>
+                <a:buNone/>
+                <a:defRPr cap="all"/>
+              </a:pPr>
+              <a:r>
+                <a:rPr lang="en-GB" sz="3700" kern="1200">
+                  <a:solidFill>
+                    <a:schemeClr val="tx1"/>
+                  </a:solidFill>
+                </a:rPr>
+                <a:t>Distracted &gt; 5min</a:t>
+              </a:r>
+              <a:endParaRPr lang="en-US" sz="3700" kern="1200">
+                <a:solidFill>
+                  <a:schemeClr val="tx1"/>
+                </a:solidFill>
+              </a:endParaRPr>
+            </a:p>
+          </p:txBody>
+        </p:sp>
+      </p:grpSp>
     </p:spTree>
     <p:extLst>
       <p:ext uri="{BB962C8B-B14F-4D97-AF65-F5344CB8AC3E}">
@@ -15548,7 +14351,204 @@
 </p:sld>
 </file>
 
-<file path=ppt/slides/slide6.xml><?xml version="1.0" encoding="utf-8"?>
+<file path=ppt/slides/slide8.xml><?xml version="1.0" encoding="utf-8"?>
+<p:sld xmlns:a="http://schemas.openxmlformats.org/drawingml/2006/main" xmlns:r="http://schemas.openxmlformats.org/officeDocument/2006/relationships" xmlns:p="http://schemas.openxmlformats.org/presentationml/2006/main">
+  <p:cSld>
+    <p:spTree>
+      <p:nvGrpSpPr>
+        <p:cNvPr id="1" name="">
+          <a:extLst>
+            <a:ext uri="{FF2B5EF4-FFF2-40B4-BE49-F238E27FC236}">
+              <a16:creationId xmlns:a16="http://schemas.microsoft.com/office/drawing/2014/main" id="{A65F4206-9597-3F30-BB3A-8393D6B7F666}"/>
+            </a:ext>
+          </a:extLst>
+        </p:cNvPr>
+        <p:cNvGrpSpPr/>
+        <p:nvPr/>
+      </p:nvGrpSpPr>
+      <p:grpSpPr>
+        <a:xfrm>
+          <a:off x="0" y="0"/>
+          <a:ext cx="0" cy="0"/>
+          <a:chOff x="0" y="0"/>
+          <a:chExt cx="0" cy="0"/>
+        </a:xfrm>
+      </p:grpSpPr>
+      <p:pic>
+        <p:nvPicPr>
+          <p:cNvPr id="6" name="Picture 5">
+            <a:extLst>
+              <a:ext uri="{FF2B5EF4-FFF2-40B4-BE49-F238E27FC236}">
+                <a16:creationId xmlns:a16="http://schemas.microsoft.com/office/drawing/2014/main" id="{7870CFEA-62BD-63AF-2D20-268D71AB9063}"/>
+              </a:ext>
+            </a:extLst>
+          </p:cNvPr>
+          <p:cNvPicPr>
+            <a:picLocks noChangeAspect="1"/>
+          </p:cNvPicPr>
+          <p:nvPr/>
+        </p:nvPicPr>
+        <p:blipFill>
+          <a:blip r:embed="rId2">
+            <a:duotone>
+              <a:schemeClr val="bg2">
+                <a:shade val="45000"/>
+                <a:satMod val="135000"/>
+              </a:schemeClr>
+              <a:prstClr val="white"/>
+            </a:duotone>
+          </a:blip>
+          <a:srcRect t="23677" r="9091"/>
+          <a:stretch>
+            <a:fillRect/>
+          </a:stretch>
+        </p:blipFill>
+        <p:spPr>
+          <a:xfrm>
+            <a:off x="20" y="0"/>
+            <a:ext cx="12191980" cy="6857990"/>
+          </a:xfrm>
+          <a:prstGeom prst="rect">
+            <a:avLst/>
+          </a:prstGeom>
+        </p:spPr>
+      </p:pic>
+      <p:sp>
+        <p:nvSpPr>
+          <p:cNvPr id="11" name="内容占位符 10">
+            <a:extLst>
+              <a:ext uri="{FF2B5EF4-FFF2-40B4-BE49-F238E27FC236}">
+                <a16:creationId xmlns:a16="http://schemas.microsoft.com/office/drawing/2014/main" id="{AED28E60-4887-AC60-050A-71D5F931492F}"/>
+              </a:ext>
+            </a:extLst>
+          </p:cNvPr>
+          <p:cNvSpPr>
+            <a:spLocks noGrp="1"/>
+          </p:cNvSpPr>
+          <p:nvPr>
+            <p:ph idx="1"/>
+          </p:nvPr>
+        </p:nvSpPr>
+        <p:spPr>
+          <a:xfrm>
+            <a:off x="449782" y="1325563"/>
+            <a:ext cx="5133722" cy="4351338"/>
+          </a:xfrm>
+        </p:spPr>
+        <p:txBody>
+          <a:bodyPr>
+            <a:normAutofit/>
+          </a:bodyPr>
+          <a:lstStyle/>
+          <a:p>
+            <a:r>
+              <a:rPr lang="en-US" altLang="zh-CN" sz="5400"/>
+              <a:t>Receive Data of Inclination</a:t>
+            </a:r>
+          </a:p>
+          <a:p>
+            <a:pPr marL="457200" lvl="1" indent="0">
+              <a:buNone/>
+            </a:pPr>
+            <a:r>
+              <a:rPr lang="en-US" altLang="zh-CN" sz="5000"/>
+              <a:t>-&gt;csv.</a:t>
+            </a:r>
+          </a:p>
+          <a:p>
+            <a:endParaRPr lang="en-US" altLang="zh-CN" sz="5400"/>
+          </a:p>
+          <a:p>
+            <a:r>
+              <a:rPr lang="en-US" altLang="zh-CN" sz="5400" err="1"/>
+              <a:t>Matlab</a:t>
+            </a:r>
+            <a:r>
+              <a:rPr lang="en-US" altLang="zh-CN" sz="5400"/>
+              <a:t> GUI…</a:t>
+            </a:r>
+            <a:endParaRPr lang="zh-CN" altLang="en-US" sz="5400"/>
+          </a:p>
+        </p:txBody>
+      </p:sp>
+      <p:sp>
+        <p:nvSpPr>
+          <p:cNvPr id="12" name="标题 1">
+            <a:extLst>
+              <a:ext uri="{FF2B5EF4-FFF2-40B4-BE49-F238E27FC236}">
+                <a16:creationId xmlns:a16="http://schemas.microsoft.com/office/drawing/2014/main" id="{A919F3B6-F696-ECAE-DD6B-FBF285AA6105}"/>
+              </a:ext>
+            </a:extLst>
+          </p:cNvPr>
+          <p:cNvSpPr>
+            <a:spLocks noGrp="1"/>
+          </p:cNvSpPr>
+          <p:nvPr>
+            <p:ph type="title"/>
+          </p:nvPr>
+        </p:nvSpPr>
+        <p:spPr>
+          <a:xfrm>
+            <a:off x="174653" y="0"/>
+            <a:ext cx="10515600" cy="1325563"/>
+          </a:xfrm>
+        </p:spPr>
+        <p:txBody>
+          <a:bodyPr/>
+          <a:lstStyle/>
+          <a:p>
+            <a:r>
+              <a:rPr lang="en-US" altLang="zh-CN" b="1"/>
+              <a:t>MATLAB</a:t>
+            </a:r>
+            <a:endParaRPr lang="zh-CN" altLang="en-US" b="1"/>
+          </a:p>
+        </p:txBody>
+      </p:sp>
+      <p:pic>
+        <p:nvPicPr>
+          <p:cNvPr id="14" name="图片 13">
+            <a:extLst>
+              <a:ext uri="{FF2B5EF4-FFF2-40B4-BE49-F238E27FC236}">
+                <a16:creationId xmlns:a16="http://schemas.microsoft.com/office/drawing/2014/main" id="{A47987A3-F995-65BB-B365-823123F80020}"/>
+              </a:ext>
+            </a:extLst>
+          </p:cNvPr>
+          <p:cNvPicPr>
+            <a:picLocks noChangeAspect="1"/>
+          </p:cNvPicPr>
+          <p:nvPr/>
+        </p:nvPicPr>
+        <p:blipFill>
+          <a:blip r:embed="rId3"/>
+          <a:stretch>
+            <a:fillRect/>
+          </a:stretch>
+        </p:blipFill>
+        <p:spPr>
+          <a:xfrm>
+            <a:off x="5583504" y="686433"/>
+            <a:ext cx="6555092" cy="5629598"/>
+          </a:xfrm>
+          <a:prstGeom prst="rect">
+            <a:avLst/>
+          </a:prstGeom>
+        </p:spPr>
+      </p:pic>
+    </p:spTree>
+    <p:extLst>
+      <p:ext uri="{BB962C8B-B14F-4D97-AF65-F5344CB8AC3E}">
+        <p14:creationId xmlns:p14="http://schemas.microsoft.com/office/powerpoint/2010/main" val="1605906832"/>
+      </p:ext>
+    </p:extLst>
+  </p:cSld>
+  <p:clrMapOvr>
+    <a:masterClrMapping/>
+  </p:clrMapOvr>
+</p:sld>
+</file>
+
+<file path=ppt/slides/slide9.xml><?xml version="1.0" encoding="utf-8"?>
 <p:sld xmlns:a="http://schemas.openxmlformats.org/drawingml/2006/main" xmlns:r="http://schemas.openxmlformats.org/officeDocument/2006/relationships" xmlns:p="http://schemas.openxmlformats.org/presentationml/2006/main">
   <p:cSld>
     <p:bg>
@@ -15714,7 +14714,7 @@
         </p:nvSpPr>
         <p:spPr>
           <a:xfrm>
-            <a:off x="804672" y="802955"/>
+            <a:off x="412892" y="98659"/>
             <a:ext cx="4977976" cy="1454051"/>
           </a:xfrm>
         </p:spPr>
@@ -15725,12 +14725,12 @@
           <a:lstStyle/>
           <a:p>
             <a:r>
-              <a:rPr lang="en-GB" sz="3600">
+              <a:rPr lang="en-GB" sz="4000" b="1">
                 <a:solidFill>
                   <a:schemeClr val="tx2"/>
                 </a:solidFill>
               </a:rPr>
-              <a:t>Outputs</a:t>
+              <a:t>FUTURE</a:t>
             </a:r>
           </a:p>
         </p:txBody>
@@ -15753,47 +14753,108 @@
         </p:nvSpPr>
         <p:spPr>
           <a:xfrm>
-            <a:off x="804672" y="2421682"/>
-            <a:ext cx="4977578" cy="3639289"/>
+            <a:off x="696113" y="1721088"/>
+            <a:ext cx="6805401" cy="4606920"/>
           </a:xfrm>
         </p:spPr>
         <p:txBody>
           <a:bodyPr anchor="ctr">
-            <a:normAutofit/>
+            <a:normAutofit fontScale="85000" lnSpcReduction="20000"/>
           </a:bodyPr>
           <a:lstStyle/>
           <a:p>
             <a:r>
-              <a:rPr lang="en-GB" sz="1800">
+              <a:rPr lang="en-GB" sz="4000">
                 <a:solidFill>
                   <a:schemeClr val="tx2"/>
                 </a:solidFill>
               </a:rPr>
-              <a:t>Locked-In: Green light illuminated</a:t>
+              <a:t>Wireless charging</a:t>
             </a:r>
           </a:p>
           <a:p>
+            <a:endParaRPr lang="en-GB" sz="4000">
+              <a:solidFill>
+                <a:schemeClr val="tx2"/>
+              </a:solidFill>
+            </a:endParaRPr>
+          </a:p>
+          <a:p>
             <a:r>
-              <a:rPr lang="en-GB" sz="1800">
+              <a:rPr lang="en-GB" sz="4000">
                 <a:solidFill>
                   <a:schemeClr val="tx2"/>
                 </a:solidFill>
               </a:rPr>
-              <a:t>Distracted: Yellow light illuminated</a:t>
+              <a:t>Magnets for </a:t>
             </a:r>
-          </a:p>
-          <a:p>
             <a:r>
-              <a:rPr lang="en-GB" sz="1800">
+              <a:rPr lang="en-GB" sz="4000" err="1">
                 <a:solidFill>
                   <a:schemeClr val="tx2"/>
                 </a:solidFill>
               </a:rPr>
-              <a:t>Distracted for over a certain amount of time: Red light illuminated and vibrations on device using vibration pad</a:t>
+              <a:t>Magsafe</a:t>
+            </a:r>
+            <a:endParaRPr lang="en-GB" sz="4000">
+              <a:solidFill>
+                <a:schemeClr val="tx2"/>
+              </a:solidFill>
+            </a:endParaRPr>
+          </a:p>
+          <a:p>
+            <a:endParaRPr lang="en-GB" sz="4000">
+              <a:solidFill>
+                <a:schemeClr val="tx2"/>
+              </a:solidFill>
+            </a:endParaRPr>
+          </a:p>
+          <a:p>
+            <a:r>
+              <a:rPr lang="en-GB" sz="4000">
+                <a:solidFill>
+                  <a:schemeClr val="tx2"/>
+                </a:solidFill>
+              </a:rPr>
+              <a:t>Better sensor</a:t>
             </a:r>
           </a:p>
           <a:p>
-            <a:endParaRPr lang="en-GB" sz="1800">
+            <a:endParaRPr lang="en-GB" sz="4000">
+              <a:solidFill>
+                <a:schemeClr val="tx2"/>
+              </a:solidFill>
+            </a:endParaRPr>
+          </a:p>
+          <a:p>
+            <a:r>
+              <a:rPr lang="en-GB" sz="4000">
+                <a:solidFill>
+                  <a:schemeClr val="tx2"/>
+                </a:solidFill>
+              </a:rPr>
+              <a:t>Offline Streaming</a:t>
+            </a:r>
+          </a:p>
+          <a:p>
+            <a:endParaRPr lang="en-GB" sz="4000">
+              <a:solidFill>
+                <a:schemeClr val="tx2"/>
+              </a:solidFill>
+            </a:endParaRPr>
+          </a:p>
+          <a:p>
+            <a:r>
+              <a:rPr lang="en-GB" sz="4000">
+                <a:solidFill>
+                  <a:schemeClr val="tx2"/>
+                </a:solidFill>
+              </a:rPr>
+              <a:t>GUI</a:t>
+            </a:r>
+          </a:p>
+          <a:p>
+            <a:endParaRPr lang="en-GB" sz="4000">
               <a:solidFill>
                 <a:schemeClr val="tx2"/>
               </a:solidFill>
